--- a/insight/N+2/SoC片上互联与多级缓存全景-N2.pptx
+++ b/insight/N+2/SoC片上互联与多级缓存全景-N2.pptx
@@ -15,9 +15,10 @@
     <p:sldId id="263" r:id="rId9"/>
     <p:sldId id="264" r:id="rId10"/>
     <p:sldId id="265" r:id="rId11"/>
+    <p:sldId id="266" r:id="rId12"/>
   </p:sldIdLst>
   <p:notesMasterIdLst>
-    <p:notesMasterId r:id="rId12"/>
+    <p:notesMasterId r:id="rId13"/>
   </p:notesMasterIdLst>
   <p:sldSz cx="12191695" cy="6858000"/>
   <p:notesSz cx="6858000" cy="12191695"/>
@@ -623,6 +624,94 @@
             <a:fld id="{F7021451-1387-4CA6-816F-3879F97B5CBC}" type="slidenum">
               <a:rPr lang="en-US"/>
               <a:t>10</a:t>
+            </a:fld>
+            <a:endParaRPr lang="en-US"/>
+          </a:p>
+        </p:txBody>
+      </p:sp>
+    </p:spTree>
+    <p:extLst>
+      <p:ext uri="{BB962C8B-B14F-4D97-AF65-F5344CB8AC3E}">
+        <p14:creationId xmlns:p14="http://schemas.microsoft.com/office/powerpoint/2010/main" val="1024086991"/>
+      </p:ext>
+    </p:extLst>
+  </p:cSld>
+  <p:clrMapOvr>
+    <a:masterClrMapping/>
+  </p:clrMapOvr>
+</p:notes>
+</file>
+
+<file path=ppt/notesSlides/notesSlide11.xml><?xml version="1.0" encoding="utf-8"?>
+<p:notes xmlns:a="http://schemas.openxmlformats.org/drawingml/2006/main" xmlns:r="http://schemas.openxmlformats.org/officeDocument/2006/relationships" xmlns:p="http://schemas.openxmlformats.org/presentationml/2006/main">
+  <p:cSld>
+    <p:spTree>
+      <p:nvGrpSpPr>
+        <p:cNvPr id="1" name=""/>
+        <p:cNvGrpSpPr/>
+        <p:nvPr/>
+      </p:nvGrpSpPr>
+      <p:grpSpPr>
+        <a:xfrm>
+          <a:off x="0" y="0"/>
+          <a:ext cx="0" cy="0"/>
+          <a:chOff x="0" y="0"/>
+          <a:chExt cx="0" cy="0"/>
+        </a:xfrm>
+      </p:grpSpPr>
+      <p:sp>
+        <p:nvSpPr>
+          <p:cNvPr id="2" name="Slide Image Placeholder 1"/>
+          <p:cNvSpPr>
+            <a:spLocks noGrp="1" noRot="1" noChangeAspect="1"/>
+          </p:cNvSpPr>
+          <p:nvPr>
+            <p:ph type="sldImg"/>
+          </p:nvPr>
+        </p:nvSpPr>
+        <p:spPr/>
+      </p:sp>
+      <p:sp>
+        <p:nvSpPr>
+          <p:cNvPr id="3" name="Notes Placeholder 2"/>
+          <p:cNvSpPr>
+            <a:spLocks noGrp="1"/>
+          </p:cNvSpPr>
+          <p:nvPr>
+            <p:ph type="body" idx="1"/>
+          </p:nvPr>
+        </p:nvSpPr>
+        <p:spPr/>
+        <p:txBody>
+          <a:bodyPr/>
+          <a:lstStyle/>
+          <a:p>
+            <a:r>
+              <a:rPr lang="en-US" dirty="0"/>
+              <a:t/>
+            </a:r>
+            <a:endParaRPr lang="en-US" dirty="0"/>
+          </a:p>
+        </p:txBody>
+      </p:sp>
+      <p:sp>
+        <p:nvSpPr>
+          <p:cNvPr id="4" name="Slide Number Placeholder 3"/>
+          <p:cNvSpPr>
+            <a:spLocks noGrp="1"/>
+          </p:cNvSpPr>
+          <p:nvPr>
+            <p:ph type="sldNum" sz="quarter" idx="10"/>
+          </p:nvPr>
+        </p:nvSpPr>
+        <p:spPr/>
+        <p:txBody>
+          <a:bodyPr/>
+          <a:lstStyle/>
+          <a:p>
+            <a:fld id="{F7021451-1387-4CA6-816F-3879F97B5CBC}" type="slidenum">
+              <a:rPr lang="en-US"/>
+              <a:t>11</a:t>
             </a:fld>
             <a:endParaRPr lang="en-US"/>
           </a:p>
@@ -2317,6 +2406,727 @@
     <p:bg>
       <p:bgPr>
         <a:solidFill>
+          <a:srgbClr val="FFFFFF"/>
+        </a:solidFill>
+      </p:bgPr>
+    </p:bg>
+    <p:spTree>
+      <p:nvGrpSpPr>
+        <p:cNvPr id="1" name=""/>
+        <p:cNvGrpSpPr/>
+        <p:nvPr/>
+      </p:nvGrpSpPr>
+      <p:grpSpPr>
+        <a:xfrm>
+          <a:off x="0" y="0"/>
+          <a:ext cx="0" cy="0"/>
+          <a:chOff x="0" y="0"/>
+          <a:chExt cx="0" cy="0"/>
+        </a:xfrm>
+      </p:grpSpPr>
+      <p:sp>
+        <p:nvSpPr>
+          <p:cNvPr id="2" name="Shape 0"/>
+          <p:cNvSpPr/>
+          <p:nvPr/>
+        </p:nvSpPr>
+        <p:spPr>
+          <a:xfrm>
+            <a:off x="548640" y="320040"/>
+            <a:ext cx="512064" cy="512064"/>
+          </a:xfrm>
+          <a:prstGeom prst="ellipse">
+            <a:avLst/>
+          </a:prstGeom>
+          <a:solidFill>
+            <a:srgbClr val="7C3AED"/>
+          </a:solidFill>
+          <a:ln w="12700">
+            <a:solidFill>
+              <a:srgbClr val="7C3AED"/>
+            </a:solidFill>
+            <a:prstDash val="solid"/>
+          </a:ln>
+        </p:spPr>
+      </p:sp>
+      <p:sp>
+        <p:nvSpPr>
+          <p:cNvPr id="3" name="Text 1"/>
+          <p:cNvSpPr/>
+          <p:nvPr/>
+        </p:nvSpPr>
+        <p:spPr>
+          <a:xfrm>
+            <a:off x="548640" y="320040"/>
+            <a:ext cx="512064" cy="512064"/>
+          </a:xfrm>
+          <a:prstGeom prst="rect">
+            <a:avLst/>
+          </a:prstGeom>
+          <a:noFill/>
+          <a:ln/>
+        </p:spPr>
+        <p:txBody>
+          <a:bodyPr wrap="square" lIns="0" tIns="0" rIns="0" bIns="0" rtlCol="0" anchor="ctr"/>
+          <a:lstStyle/>
+          <a:p>
+            <a:pPr algn="ctr" indent="0" marL="0">
+              <a:buNone/>
+            </a:pPr>
+            <a:r>
+              <a:rPr lang="en-US" sz="1800" b="1" dirty="0">
+                <a:solidFill>
+                  <a:srgbClr val="FFFFFF"/>
+                </a:solidFill>
+                <a:latin typeface="PingFang SC" pitchFamily="34" charset="0"/>
+                <a:ea typeface="PingFang SC" pitchFamily="34" charset="-122"/>
+                <a:cs typeface="PingFang SC" pitchFamily="34" charset="-120"/>
+              </a:rPr>
+              <a:t>7</a:t>
+            </a:r>
+            <a:endParaRPr lang="en-US" sz="1800" dirty="0"/>
+          </a:p>
+        </p:txBody>
+      </p:sp>
+      <p:sp>
+        <p:nvSpPr>
+          <p:cNvPr id="4" name="Text 2"/>
+          <p:cNvSpPr/>
+          <p:nvPr/>
+        </p:nvSpPr>
+        <p:spPr>
+          <a:xfrm>
+            <a:off x="1188720" y="320040"/>
+            <a:ext cx="7315200" cy="512064"/>
+          </a:xfrm>
+          <a:prstGeom prst="rect">
+            <a:avLst/>
+          </a:prstGeom>
+          <a:noFill/>
+          <a:ln/>
+        </p:spPr>
+        <p:txBody>
+          <a:bodyPr wrap="square" lIns="0" tIns="0" rIns="0" bIns="0" rtlCol="0" anchor="ctr"/>
+          <a:lstStyle/>
+          <a:p>
+            <a:pPr indent="0" marL="0">
+              <a:buNone/>
+            </a:pPr>
+            <a:r>
+              <a:rPr lang="en-US" sz="2600" b="1" dirty="0">
+                <a:solidFill>
+                  <a:srgbClr val="0F172A"/>
+                </a:solidFill>
+                <a:latin typeface="PingFang SC" pitchFamily="34" charset="0"/>
+                <a:ea typeface="PingFang SC" pitchFamily="34" charset="-122"/>
+                <a:cs typeface="PingFang SC" pitchFamily="34" charset="-120"/>
+              </a:rPr>
+              <a:t>Processing-using-DRAM（Proteus）</a:t>
+            </a:r>
+            <a:endParaRPr lang="en-US" sz="2600" dirty="0"/>
+          </a:p>
+        </p:txBody>
+      </p:sp>
+      <p:sp>
+        <p:nvSpPr>
+          <p:cNvPr id="5" name="Shape 3"/>
+          <p:cNvSpPr/>
+          <p:nvPr/>
+        </p:nvSpPr>
+        <p:spPr>
+          <a:xfrm>
+            <a:off x="8686800" y="393192"/>
+            <a:ext cx="3200400" cy="365760"/>
+          </a:xfrm>
+          <a:prstGeom prst="roundRect">
+            <a:avLst>
+              <a:gd name="adj" fmla="val 50000"/>
+            </a:avLst>
+          </a:prstGeom>
+          <a:solidFill>
+            <a:srgbClr val="FFFFFF"/>
+          </a:solidFill>
+          <a:ln w="12700">
+            <a:solidFill>
+              <a:srgbClr val="7C3AED"/>
+            </a:solidFill>
+            <a:prstDash val="solid"/>
+          </a:ln>
+        </p:spPr>
+      </p:sp>
+      <p:sp>
+        <p:nvSpPr>
+          <p:cNvPr id="6" name="Text 4"/>
+          <p:cNvSpPr/>
+          <p:nvPr/>
+        </p:nvSpPr>
+        <p:spPr>
+          <a:xfrm>
+            <a:off x="8778240" y="393192"/>
+            <a:ext cx="3017520" cy="365760"/>
+          </a:xfrm>
+          <a:prstGeom prst="rect">
+            <a:avLst/>
+          </a:prstGeom>
+          <a:noFill/>
+          <a:ln/>
+        </p:spPr>
+        <p:txBody>
+          <a:bodyPr wrap="square" lIns="0" tIns="0" rIns="0" bIns="0" rtlCol="0" anchor="ctr"/>
+          <a:lstStyle/>
+          <a:p>
+            <a:pPr algn="ctr" indent="0" marL="0">
+              <a:buNone/>
+            </a:pPr>
+            <a:r>
+              <a:rPr lang="en-US" sz="1100" b="1" dirty="0">
+                <a:solidFill>
+                  <a:srgbClr val="7C3AED"/>
+                </a:solidFill>
+                <a:latin typeface="PingFang SC" pitchFamily="34" charset="0"/>
+                <a:ea typeface="PingFang SC" pitchFamily="34" charset="-122"/>
+                <a:cs typeface="PingFang SC" pitchFamily="34" charset="-120"/>
+              </a:rPr>
+              <a:t>模块：DRAM Bank 子阵列 / 位线</a:t>
+            </a:r>
+            <a:endParaRPr lang="en-US" sz="1100" dirty="0"/>
+          </a:p>
+        </p:txBody>
+      </p:sp>
+      <p:sp>
+        <p:nvSpPr>
+          <p:cNvPr id="7" name="Shape 5"/>
+          <p:cNvSpPr/>
+          <p:nvPr/>
+        </p:nvSpPr>
+        <p:spPr>
+          <a:xfrm>
+            <a:off x="548640" y="1097280"/>
+            <a:ext cx="5303520" cy="2377440"/>
+          </a:xfrm>
+          <a:prstGeom prst="roundRect">
+            <a:avLst>
+              <a:gd name="adj" fmla="val 5769"/>
+            </a:avLst>
+          </a:prstGeom>
+          <a:solidFill>
+            <a:srgbClr val="FEF2F2"/>
+          </a:solidFill>
+          <a:ln w="12700">
+            <a:solidFill>
+              <a:srgbClr val="DC2626"/>
+            </a:solidFill>
+            <a:prstDash val="solid"/>
+          </a:ln>
+          <a:effectLst>
+            <a:outerShdw sx="100000" sy="100000" kx="0" ky="0" algn="bl" rotWithShape="0" blurRad="101600" dist="38100" dir="5400000">
+              <a:srgbClr val="000000">
+                <a:alpha val="12000"/>
+              </a:srgbClr>
+            </a:outerShdw>
+          </a:effectLst>
+        </p:spPr>
+      </p:sp>
+      <p:sp>
+        <p:nvSpPr>
+          <p:cNvPr id="8" name="Text 6"/>
+          <p:cNvSpPr/>
+          <p:nvPr/>
+        </p:nvSpPr>
+        <p:spPr>
+          <a:xfrm>
+            <a:off x="777240" y="1234440"/>
+            <a:ext cx="4846320" cy="402336"/>
+          </a:xfrm>
+          <a:prstGeom prst="rect">
+            <a:avLst/>
+          </a:prstGeom>
+          <a:noFill/>
+          <a:ln/>
+        </p:spPr>
+        <p:txBody>
+          <a:bodyPr wrap="square" lIns="0" tIns="0" rIns="0" bIns="0" rtlCol="0" anchor="ctr"/>
+          <a:lstStyle/>
+          <a:p>
+            <a:pPr indent="0" marL="0">
+              <a:buNone/>
+            </a:pPr>
+            <a:r>
+              <a:rPr lang="en-US" sz="1800" b="1" dirty="0">
+                <a:solidFill>
+                  <a:srgbClr val="DC2626"/>
+                </a:solidFill>
+                <a:latin typeface="PingFang SC" pitchFamily="34" charset="0"/>
+                <a:ea typeface="PingFang SC" pitchFamily="34" charset="-122"/>
+                <a:cs typeface="PingFang SC" pitchFamily="34" charset="-120"/>
+              </a:rPr>
+              <a:t>面临的问题</a:t>
+            </a:r>
+            <a:endParaRPr lang="en-US" sz="1800" dirty="0"/>
+          </a:p>
+        </p:txBody>
+      </p:sp>
+      <p:sp>
+        <p:nvSpPr>
+          <p:cNvPr id="9" name="Text 7"/>
+          <p:cNvSpPr/>
+          <p:nvPr/>
+        </p:nvSpPr>
+        <p:spPr>
+          <a:xfrm>
+            <a:off x="777240" y="1691640"/>
+            <a:ext cx="4846320" cy="1645920"/>
+          </a:xfrm>
+          <a:prstGeom prst="rect">
+            <a:avLst/>
+          </a:prstGeom>
+          <a:noFill/>
+          <a:ln/>
+        </p:spPr>
+        <p:txBody>
+          <a:bodyPr wrap="square" lIns="0" tIns="0" rIns="0" bIns="0" rtlCol="0" anchor="t"/>
+          <a:lstStyle/>
+          <a:p>
+            <a:pPr indent="0" marL="0">
+              <a:lnSpc>
+                <a:spcPct val="130000"/>
+              </a:lnSpc>
+              <a:buNone/>
+            </a:pPr>
+            <a:r>
+              <a:rPr lang="en-US" sz="1500" dirty="0">
+                <a:solidFill>
+                  <a:srgbClr val="334155"/>
+                </a:solidFill>
+                <a:latin typeface="PingFang SC" pitchFamily="34" charset="0"/>
+                <a:ea typeface="PingFang SC" pitchFamily="34" charset="-122"/>
+                <a:cs typeface="PingFang SC" pitchFamily="34" charset="-120"/>
+              </a:rPr>
+              <a:t>现有 PuD（Ambit/SIMDRAM）对 N 位操作数固定 N 串行周期不考虑有效精度；单阵列执行未利用 DRAM 多阵列并行性。</a:t>
+            </a:r>
+            <a:endParaRPr lang="en-US" sz="1500" dirty="0"/>
+          </a:p>
+        </p:txBody>
+      </p:sp>
+      <p:sp>
+        <p:nvSpPr>
+          <p:cNvPr id="10" name="Shape 8"/>
+          <p:cNvSpPr/>
+          <p:nvPr/>
+        </p:nvSpPr>
+        <p:spPr>
+          <a:xfrm>
+            <a:off x="6126480" y="1097280"/>
+            <a:ext cx="5486400" cy="2377440"/>
+          </a:xfrm>
+          <a:prstGeom prst="roundRect">
+            <a:avLst>
+              <a:gd name="adj" fmla="val 5769"/>
+            </a:avLst>
+          </a:prstGeom>
+          <a:solidFill>
+            <a:srgbClr val="F0FDF4"/>
+          </a:solidFill>
+          <a:ln w="12700">
+            <a:solidFill>
+              <a:srgbClr val="16A34A"/>
+            </a:solidFill>
+            <a:prstDash val="solid"/>
+          </a:ln>
+          <a:effectLst>
+            <a:outerShdw sx="100000" sy="100000" kx="0" ky="0" algn="bl" rotWithShape="0" blurRad="101600" dist="38100" dir="5400000">
+              <a:srgbClr val="000000">
+                <a:alpha val="12000"/>
+              </a:srgbClr>
+            </a:outerShdw>
+          </a:effectLst>
+        </p:spPr>
+      </p:sp>
+      <p:sp>
+        <p:nvSpPr>
+          <p:cNvPr id="11" name="Text 9"/>
+          <p:cNvSpPr/>
+          <p:nvPr/>
+        </p:nvSpPr>
+        <p:spPr>
+          <a:xfrm>
+            <a:off x="6355080" y="1234440"/>
+            <a:ext cx="5029200" cy="402336"/>
+          </a:xfrm>
+          <a:prstGeom prst="rect">
+            <a:avLst/>
+          </a:prstGeom>
+          <a:noFill/>
+          <a:ln/>
+        </p:spPr>
+        <p:txBody>
+          <a:bodyPr wrap="square" lIns="0" tIns="0" rIns="0" bIns="0" rtlCol="0" anchor="ctr"/>
+          <a:lstStyle/>
+          <a:p>
+            <a:pPr indent="0" marL="0">
+              <a:buNone/>
+            </a:pPr>
+            <a:r>
+              <a:rPr lang="en-US" sz="1800" b="1" dirty="0">
+                <a:solidFill>
+                  <a:srgbClr val="16A34A"/>
+                </a:solidFill>
+                <a:latin typeface="PingFang SC" pitchFamily="34" charset="0"/>
+                <a:ea typeface="PingFang SC" pitchFamily="34" charset="-122"/>
+                <a:cs typeface="PingFang SC" pitchFamily="34" charset="-120"/>
+              </a:rPr>
+              <a:t>我们的洞察怎么解</a:t>
+            </a:r>
+            <a:endParaRPr lang="en-US" sz="1800" dirty="0"/>
+          </a:p>
+        </p:txBody>
+      </p:sp>
+      <p:sp>
+        <p:nvSpPr>
+          <p:cNvPr id="12" name="Text 10"/>
+          <p:cNvSpPr/>
+          <p:nvPr/>
+        </p:nvSpPr>
+        <p:spPr>
+          <a:xfrm>
+            <a:off x="6355080" y="1691640"/>
+            <a:ext cx="5029200" cy="1645920"/>
+          </a:xfrm>
+          <a:prstGeom prst="rect">
+            <a:avLst/>
+          </a:prstGeom>
+          <a:noFill/>
+          <a:ln/>
+        </p:spPr>
+        <p:txBody>
+          <a:bodyPr wrap="square" lIns="0" tIns="0" rIns="0" bIns="0" rtlCol="0" anchor="t"/>
+          <a:lstStyle/>
+          <a:p>
+            <a:pPr indent="0" marL="0">
+              <a:lnSpc>
+                <a:spcPct val="130000"/>
+              </a:lnSpc>
+              <a:buNone/>
+            </a:pPr>
+            <a:r>
+              <a:rPr lang="en-US" sz="1500" dirty="0">
+                <a:solidFill>
+                  <a:srgbClr val="334155"/>
+                </a:solidFill>
+                <a:latin typeface="PingFang SC" pitchFamily="34" charset="0"/>
+                <a:ea typeface="PingFang SC" pitchFamily="34" charset="-122"/>
+                <a:cs typeface="PingFang SC" pitchFamily="34" charset="-120"/>
+              </a:rPr>
+              <a:t>Proteus 运行时检测有效精度（前导零/一），动态压缩位宽 + 跨多阵列并发执行，延迟从线性于位宽变为线性于有效精度。</a:t>
+            </a:r>
+            <a:endParaRPr lang="en-US" sz="1500" dirty="0"/>
+          </a:p>
+        </p:txBody>
+      </p:sp>
+      <p:sp>
+        <p:nvSpPr>
+          <p:cNvPr id="13" name="Shape 11"/>
+          <p:cNvSpPr/>
+          <p:nvPr/>
+        </p:nvSpPr>
+        <p:spPr>
+          <a:xfrm>
+            <a:off x="548640" y="3749040"/>
+            <a:ext cx="11064240" cy="548640"/>
+          </a:xfrm>
+          <a:prstGeom prst="roundRect">
+            <a:avLst>
+              <a:gd name="adj" fmla="val 16667"/>
+            </a:avLst>
+          </a:prstGeom>
+          <a:solidFill>
+            <a:srgbClr val="F8FAFC"/>
+          </a:solidFill>
+          <a:ln w="12700">
+            <a:solidFill>
+              <a:srgbClr val="E2E8F0"/>
+            </a:solidFill>
+            <a:prstDash val="solid"/>
+          </a:ln>
+        </p:spPr>
+      </p:sp>
+      <p:sp>
+        <p:nvSpPr>
+          <p:cNvPr id="14" name="Text 12"/>
+          <p:cNvSpPr/>
+          <p:nvPr/>
+        </p:nvSpPr>
+        <p:spPr>
+          <a:xfrm>
+            <a:off x="777240" y="3749040"/>
+            <a:ext cx="10607040" cy="548640"/>
+          </a:xfrm>
+          <a:prstGeom prst="rect">
+            <a:avLst/>
+          </a:prstGeom>
+          <a:noFill/>
+          <a:ln/>
+        </p:spPr>
+        <p:txBody>
+          <a:bodyPr wrap="square" lIns="0" tIns="0" rIns="0" bIns="0" rtlCol="0" anchor="ctr"/>
+          <a:lstStyle/>
+          <a:p>
+            <a:pPr indent="0" marL="0">
+              <a:buNone/>
+            </a:pPr>
+            <a:r>
+              <a:rPr lang="en-US" sz="1400" dirty="0">
+                <a:solidFill>
+                  <a:srgbClr val="0F172A"/>
+                </a:solidFill>
+                <a:latin typeface="PingFang SC" pitchFamily="34" charset="0"/>
+                <a:ea typeface="PingFang SC" pitchFamily="34" charset="-122"/>
+                <a:cs typeface="PingFang SC" pitchFamily="34" charset="-120"/>
+              </a:rPr>
+              <a:t>一句话：「固定位宽串行」→「有效精度自适应 + 多阵列并行」</a:t>
+            </a:r>
+            <a:endParaRPr lang="en-US" sz="1400" dirty="0"/>
+          </a:p>
+        </p:txBody>
+      </p:sp>
+      <p:sp>
+        <p:nvSpPr>
+          <p:cNvPr id="15" name="Shape 13"/>
+          <p:cNvSpPr/>
+          <p:nvPr/>
+        </p:nvSpPr>
+        <p:spPr>
+          <a:xfrm>
+            <a:off x="1828800" y="4572000"/>
+            <a:ext cx="3657600" cy="1463040"/>
+          </a:xfrm>
+          <a:prstGeom prst="roundRect">
+            <a:avLst>
+              <a:gd name="adj" fmla="val 9375"/>
+            </a:avLst>
+          </a:prstGeom>
+          <a:solidFill>
+            <a:srgbClr val="F5F3FF"/>
+          </a:solidFill>
+          <a:ln w="12700">
+            <a:solidFill>
+              <a:srgbClr val="7C3AED"/>
+            </a:solidFill>
+            <a:prstDash val="solid"/>
+          </a:ln>
+          <a:effectLst>
+            <a:outerShdw sx="100000" sy="100000" kx="0" ky="0" algn="bl" rotWithShape="0" blurRad="101600" dist="38100" dir="5400000">
+              <a:srgbClr val="000000">
+                <a:alpha val="12000"/>
+              </a:srgbClr>
+            </a:outerShdw>
+          </a:effectLst>
+        </p:spPr>
+      </p:sp>
+      <p:sp>
+        <p:nvSpPr>
+          <p:cNvPr id="16" name="Text 14"/>
+          <p:cNvSpPr/>
+          <p:nvPr/>
+        </p:nvSpPr>
+        <p:spPr>
+          <a:xfrm>
+            <a:off x="1828800" y="4709160"/>
+            <a:ext cx="3657600" cy="731520"/>
+          </a:xfrm>
+          <a:prstGeom prst="rect">
+            <a:avLst/>
+          </a:prstGeom>
+          <a:noFill/>
+          <a:ln/>
+        </p:spPr>
+        <p:txBody>
+          <a:bodyPr wrap="square" lIns="0" tIns="0" rIns="0" bIns="0" rtlCol="0" anchor="ctr"/>
+          <a:lstStyle/>
+          <a:p>
+            <a:pPr algn="ctr" indent="0" marL="0">
+              <a:buNone/>
+            </a:pPr>
+            <a:r>
+              <a:rPr lang="en-US" sz="4400" b="1" dirty="0">
+                <a:solidFill>
+                  <a:srgbClr val="7C3AED"/>
+                </a:solidFill>
+                <a:latin typeface="PingFang SC" pitchFamily="34" charset="0"/>
+                <a:ea typeface="PingFang SC" pitchFamily="34" charset="-122"/>
+                <a:cs typeface="PingFang SC" pitchFamily="34" charset="-120"/>
+              </a:rPr>
+              <a:t>88×</a:t>
+            </a:r>
+            <a:endParaRPr lang="en-US" sz="4400" dirty="0"/>
+          </a:p>
+        </p:txBody>
+      </p:sp>
+      <p:sp>
+        <p:nvSpPr>
+          <p:cNvPr id="17" name="Text 15"/>
+          <p:cNvSpPr/>
+          <p:nvPr/>
+        </p:nvSpPr>
+        <p:spPr>
+          <a:xfrm>
+            <a:off x="1828800" y="5486400"/>
+            <a:ext cx="3657600" cy="365760"/>
+          </a:xfrm>
+          <a:prstGeom prst="rect">
+            <a:avLst/>
+          </a:prstGeom>
+          <a:noFill/>
+          <a:ln/>
+        </p:spPr>
+        <p:txBody>
+          <a:bodyPr wrap="square" lIns="0" tIns="0" rIns="0" bIns="0" rtlCol="0" anchor="ctr"/>
+          <a:lstStyle/>
+          <a:p>
+            <a:pPr algn="ctr" indent="0" marL="0">
+              <a:buNone/>
+            </a:pPr>
+            <a:r>
+              <a:rPr lang="en-US" sz="1400" dirty="0">
+                <a:solidFill>
+                  <a:srgbClr val="64748B"/>
+                </a:solidFill>
+                <a:latin typeface="PingFang SC" pitchFamily="34" charset="0"/>
+                <a:ea typeface="PingFang SC" pitchFamily="34" charset="-122"/>
+                <a:cs typeface="PingFang SC" pitchFamily="34" charset="-120"/>
+              </a:rPr>
+              <a:t>vs CPU 吞吐（16 bank）</a:t>
+            </a:r>
+            <a:endParaRPr lang="en-US" sz="1400" dirty="0"/>
+          </a:p>
+        </p:txBody>
+      </p:sp>
+      <p:sp>
+        <p:nvSpPr>
+          <p:cNvPr id="18" name="Shape 16"/>
+          <p:cNvSpPr/>
+          <p:nvPr/>
+        </p:nvSpPr>
+        <p:spPr>
+          <a:xfrm>
+            <a:off x="6675120" y="4572000"/>
+            <a:ext cx="3657600" cy="1463040"/>
+          </a:xfrm>
+          <a:prstGeom prst="roundRect">
+            <a:avLst>
+              <a:gd name="adj" fmla="val 9375"/>
+            </a:avLst>
+          </a:prstGeom>
+          <a:solidFill>
+            <a:srgbClr val="F5F3FF"/>
+          </a:solidFill>
+          <a:ln w="12700">
+            <a:solidFill>
+              <a:srgbClr val="7C3AED"/>
+            </a:solidFill>
+            <a:prstDash val="solid"/>
+          </a:ln>
+          <a:effectLst>
+            <a:outerShdw sx="100000" sy="100000" kx="0" ky="0" algn="bl" rotWithShape="0" blurRad="101600" dist="38100" dir="5400000">
+              <a:srgbClr val="000000">
+                <a:alpha val="12000"/>
+              </a:srgbClr>
+            </a:outerShdw>
+          </a:effectLst>
+        </p:spPr>
+      </p:sp>
+      <p:sp>
+        <p:nvSpPr>
+          <p:cNvPr id="19" name="Text 17"/>
+          <p:cNvSpPr/>
+          <p:nvPr/>
+        </p:nvSpPr>
+        <p:spPr>
+          <a:xfrm>
+            <a:off x="6675120" y="4709160"/>
+            <a:ext cx="3657600" cy="731520"/>
+          </a:xfrm>
+          <a:prstGeom prst="rect">
+            <a:avLst/>
+          </a:prstGeom>
+          <a:noFill/>
+          <a:ln/>
+        </p:spPr>
+        <p:txBody>
+          <a:bodyPr wrap="square" lIns="0" tIns="0" rIns="0" bIns="0" rtlCol="0" anchor="ctr"/>
+          <a:lstStyle/>
+          <a:p>
+            <a:pPr algn="ctr" indent="0" marL="0">
+              <a:buNone/>
+            </a:pPr>
+            <a:r>
+              <a:rPr lang="en-US" sz="4400" b="1" dirty="0">
+                <a:solidFill>
+                  <a:srgbClr val="7C3AED"/>
+                </a:solidFill>
+                <a:latin typeface="PingFang SC" pitchFamily="34" charset="0"/>
+                <a:ea typeface="PingFang SC" pitchFamily="34" charset="-122"/>
+                <a:cs typeface="PingFang SC" pitchFamily="34" charset="-120"/>
+              </a:rPr>
+              <a:t>35×</a:t>
+            </a:r>
+            <a:endParaRPr lang="en-US" sz="4400" dirty="0"/>
+          </a:p>
+        </p:txBody>
+      </p:sp>
+      <p:sp>
+        <p:nvSpPr>
+          <p:cNvPr id="20" name="Text 18"/>
+          <p:cNvSpPr/>
+          <p:nvPr/>
+        </p:nvSpPr>
+        <p:spPr>
+          <a:xfrm>
+            <a:off x="6675120" y="5486400"/>
+            <a:ext cx="3657600" cy="365760"/>
+          </a:xfrm>
+          <a:prstGeom prst="rect">
+            <a:avLst/>
+          </a:prstGeom>
+          <a:noFill/>
+          <a:ln/>
+        </p:spPr>
+        <p:txBody>
+          <a:bodyPr wrap="square" lIns="0" tIns="0" rIns="0" bIns="0" rtlCol="0" anchor="ctr"/>
+          <a:lstStyle/>
+          <a:p>
+            <a:pPr algn="ctr" indent="0" marL="0">
+              <a:buNone/>
+            </a:pPr>
+            <a:r>
+              <a:rPr lang="en-US" sz="1400" dirty="0">
+                <a:solidFill>
+                  <a:srgbClr val="64748B"/>
+                </a:solidFill>
+                <a:latin typeface="PingFang SC" pitchFamily="34" charset="0"/>
+                <a:ea typeface="PingFang SC" pitchFamily="34" charset="-122"/>
+                <a:cs typeface="PingFang SC" pitchFamily="34" charset="-120"/>
+              </a:rPr>
+              <a:t>vs CPU 能耗降低</a:t>
+            </a:r>
+            <a:endParaRPr lang="en-US" sz="1400" dirty="0"/>
+          </a:p>
+        </p:txBody>
+      </p:sp>
+    </p:spTree>
+  </p:cSld>
+  <p:clrMapOvr>
+    <a:masterClrMapping/>
+  </p:clrMapOvr>
+</p:sld>
+</file>
+
+<file path=ppt/slides/slide11.xml><?xml version="1.0" encoding="utf-8"?>
+<p:sld xmlns:a="http://schemas.openxmlformats.org/drawingml/2006/main" xmlns:r="http://schemas.openxmlformats.org/officeDocument/2006/relationships" xmlns:p="http://schemas.openxmlformats.org/presentationml/2006/main">
+  <p:cSld name="Slide 11">
+    <p:bg>
+      <p:bgPr>
+        <a:solidFill>
           <a:srgbClr val="0F172A"/>
         </a:solidFill>
       </p:bgPr>
@@ -4037,22 +4847,2517 @@
       </p:grpSpPr>
       <p:sp>
         <p:nvSpPr>
-          <p:cNvPr id="2" name="Shape 0"/>
-          <p:cNvSpPr/>
-          <p:nvPr/>
-        </p:nvSpPr>
-        <p:spPr>
-          <a:xfrm>
-            <a:off x="548640" y="320040"/>
-            <a:ext cx="512064" cy="512064"/>
+          <p:cNvPr id="2" name="Text 0"/>
+          <p:cNvSpPr/>
+          <p:nvPr/>
+        </p:nvSpPr>
+        <p:spPr>
+          <a:xfrm>
+            <a:off x="274320" y="146304"/>
+            <a:ext cx="11612880" cy="438912"/>
+          </a:xfrm>
+          <a:prstGeom prst="rect">
+            <a:avLst/>
+          </a:prstGeom>
+          <a:noFill/>
+          <a:ln/>
+        </p:spPr>
+        <p:txBody>
+          <a:bodyPr wrap="square" lIns="0" tIns="0" rIns="0" bIns="0" rtlCol="0" anchor="ctr"/>
+          <a:lstStyle/>
+          <a:p>
+            <a:pPr indent="0" marL="0">
+              <a:buNone/>
+            </a:pPr>
+            <a:r>
+              <a:rPr lang="en-US" sz="2200" b="1" dirty="0">
+                <a:solidFill>
+                  <a:srgbClr val="0F172A"/>
+                </a:solidFill>
+                <a:latin typeface="PingFang SC" pitchFamily="34" charset="0"/>
+                <a:ea typeface="PingFang SC" pitchFamily="34" charset="-122"/>
+                <a:cs typeface="PingFang SC" pitchFamily="34" charset="-120"/>
+              </a:rPr>
+              <a:t>框架总览（原生组件）：端侧 SoC 片上互联与多级缓存</a:t>
+            </a:r>
+            <a:endParaRPr lang="en-US" sz="2200" dirty="0"/>
+          </a:p>
+        </p:txBody>
+      </p:sp>
+      <p:sp>
+        <p:nvSpPr>
+          <p:cNvPr id="3" name="Shape 1"/>
+          <p:cNvSpPr/>
+          <p:nvPr/>
+        </p:nvSpPr>
+        <p:spPr>
+          <a:xfrm>
+            <a:off x="274320" y="841248"/>
+            <a:ext cx="1940357" cy="1188720"/>
+          </a:xfrm>
+          <a:prstGeom prst="roundRect">
+            <a:avLst>
+              <a:gd name="adj" fmla="val 4615"/>
+            </a:avLst>
+          </a:prstGeom>
+          <a:solidFill>
+            <a:srgbClr val="DBEAFE"/>
+          </a:solidFill>
+          <a:ln w="15875">
+            <a:solidFill>
+              <a:srgbClr val="2563EB"/>
+            </a:solidFill>
+            <a:prstDash val="solid"/>
+          </a:ln>
+        </p:spPr>
+      </p:sp>
+      <p:sp>
+        <p:nvSpPr>
+          <p:cNvPr id="4" name="Text 2"/>
+          <p:cNvSpPr/>
+          <p:nvPr/>
+        </p:nvSpPr>
+        <p:spPr>
+          <a:xfrm>
+            <a:off x="347472" y="886968"/>
+            <a:ext cx="1794053" cy="219456"/>
+          </a:xfrm>
+          <a:prstGeom prst="rect">
+            <a:avLst/>
+          </a:prstGeom>
+          <a:noFill/>
+          <a:ln/>
+        </p:spPr>
+        <p:txBody>
+          <a:bodyPr wrap="square" lIns="0" tIns="0" rIns="0" bIns="0" rtlCol="0" anchor="ctr"/>
+          <a:lstStyle/>
+          <a:p>
+            <a:pPr indent="0" marL="0">
+              <a:buNone/>
+            </a:pPr>
+            <a:r>
+              <a:rPr lang="en-US" sz="1200" b="1" dirty="0">
+                <a:solidFill>
+                  <a:srgbClr val="0F172A"/>
+                </a:solidFill>
+                <a:latin typeface="PingFang SC" pitchFamily="34" charset="0"/>
+                <a:ea typeface="PingFang SC" pitchFamily="34" charset="-122"/>
+                <a:cs typeface="PingFang SC" pitchFamily="34" charset="-120"/>
+              </a:rPr>
+              <a:t>P-cluster · 大核</a:t>
+            </a:r>
+            <a:endParaRPr lang="en-US" sz="1200" dirty="0"/>
+          </a:p>
+        </p:txBody>
+      </p:sp>
+      <p:sp>
+        <p:nvSpPr>
+          <p:cNvPr id="5" name="Text 3"/>
+          <p:cNvSpPr/>
+          <p:nvPr/>
+        </p:nvSpPr>
+        <p:spPr>
+          <a:xfrm>
+            <a:off x="347472" y="1115568"/>
+            <a:ext cx="1794053" cy="164592"/>
+          </a:xfrm>
+          <a:prstGeom prst="rect">
+            <a:avLst/>
+          </a:prstGeom>
+          <a:noFill/>
+          <a:ln/>
+        </p:spPr>
+        <p:txBody>
+          <a:bodyPr wrap="square" lIns="0" tIns="0" rIns="0" bIns="0" rtlCol="0" anchor="ctr"/>
+          <a:lstStyle/>
+          <a:p>
+            <a:pPr indent="0" marL="0">
+              <a:buNone/>
+            </a:pPr>
+            <a:r>
+              <a:rPr lang="en-US" sz="900" dirty="0">
+                <a:solidFill>
+                  <a:srgbClr val="334155"/>
+                </a:solidFill>
+                <a:latin typeface="PingFang SC" pitchFamily="34" charset="0"/>
+                <a:ea typeface="PingFang SC" pitchFamily="34" charset="-122"/>
+                <a:cs typeface="PingFang SC" pitchFamily="34" charset="-120"/>
+              </a:rPr>
+              <a:t>4× Cortex-X / Oryon</a:t>
+            </a:r>
+            <a:endParaRPr lang="en-US" sz="900" dirty="0"/>
+          </a:p>
+        </p:txBody>
+      </p:sp>
+      <p:sp>
+        <p:nvSpPr>
+          <p:cNvPr id="6" name="Shape 4"/>
+          <p:cNvSpPr/>
+          <p:nvPr/>
+        </p:nvSpPr>
+        <p:spPr>
+          <a:xfrm>
+            <a:off x="347472" y="1316736"/>
+            <a:ext cx="561442" cy="201168"/>
+          </a:xfrm>
+          <a:prstGeom prst="roundRect">
+            <a:avLst>
+              <a:gd name="adj" fmla="val 13636"/>
+            </a:avLst>
+          </a:prstGeom>
+          <a:solidFill>
+            <a:srgbClr val="FFFFFF"/>
+          </a:solidFill>
+          <a:ln w="9525">
+            <a:solidFill>
+              <a:srgbClr val="1E3A8A"/>
+            </a:solidFill>
+            <a:prstDash val="solid"/>
+          </a:ln>
+        </p:spPr>
+      </p:sp>
+      <p:sp>
+        <p:nvSpPr>
+          <p:cNvPr id="7" name="Text 5"/>
+          <p:cNvSpPr/>
+          <p:nvPr/>
+        </p:nvSpPr>
+        <p:spPr>
+          <a:xfrm>
+            <a:off x="347472" y="1316736"/>
+            <a:ext cx="561442" cy="201168"/>
+          </a:xfrm>
+          <a:prstGeom prst="rect">
+            <a:avLst/>
+          </a:prstGeom>
+          <a:noFill/>
+          <a:ln/>
+        </p:spPr>
+        <p:txBody>
+          <a:bodyPr wrap="square" lIns="0" tIns="0" rIns="0" bIns="0" rtlCol="0" anchor="ctr"/>
+          <a:lstStyle/>
+          <a:p>
+            <a:pPr algn="ctr" indent="0" marL="0">
+              <a:buNone/>
+            </a:pPr>
+            <a:r>
+              <a:rPr lang="en-US" sz="800" dirty="0">
+                <a:solidFill>
+                  <a:srgbClr val="1E3A8A"/>
+                </a:solidFill>
+                <a:latin typeface="PingFang SC" pitchFamily="34" charset="0"/>
+                <a:ea typeface="PingFang SC" pitchFamily="34" charset="-122"/>
+                <a:cs typeface="PingFang SC" pitchFamily="34" charset="-120"/>
+              </a:rPr>
+              <a:t>L1i</a:t>
+            </a:r>
+            <a:endParaRPr lang="en-US" sz="800" dirty="0"/>
+          </a:p>
+        </p:txBody>
+      </p:sp>
+      <p:sp>
+        <p:nvSpPr>
+          <p:cNvPr id="8" name="Shape 6"/>
+          <p:cNvSpPr/>
+          <p:nvPr/>
+        </p:nvSpPr>
+        <p:spPr>
+          <a:xfrm>
+            <a:off x="963778" y="1316736"/>
+            <a:ext cx="561442" cy="201168"/>
+          </a:xfrm>
+          <a:prstGeom prst="roundRect">
+            <a:avLst>
+              <a:gd name="adj" fmla="val 13636"/>
+            </a:avLst>
+          </a:prstGeom>
+          <a:solidFill>
+            <a:srgbClr val="FFFFFF"/>
+          </a:solidFill>
+          <a:ln w="9525">
+            <a:solidFill>
+              <a:srgbClr val="1E3A8A"/>
+            </a:solidFill>
+            <a:prstDash val="solid"/>
+          </a:ln>
+        </p:spPr>
+      </p:sp>
+      <p:sp>
+        <p:nvSpPr>
+          <p:cNvPr id="9" name="Text 7"/>
+          <p:cNvSpPr/>
+          <p:nvPr/>
+        </p:nvSpPr>
+        <p:spPr>
+          <a:xfrm>
+            <a:off x="963778" y="1316736"/>
+            <a:ext cx="561442" cy="201168"/>
+          </a:xfrm>
+          <a:prstGeom prst="rect">
+            <a:avLst/>
+          </a:prstGeom>
+          <a:noFill/>
+          <a:ln/>
+        </p:spPr>
+        <p:txBody>
+          <a:bodyPr wrap="square" lIns="0" tIns="0" rIns="0" bIns="0" rtlCol="0" anchor="ctr"/>
+          <a:lstStyle/>
+          <a:p>
+            <a:pPr algn="ctr" indent="0" marL="0">
+              <a:buNone/>
+            </a:pPr>
+            <a:r>
+              <a:rPr lang="en-US" sz="800" dirty="0">
+                <a:solidFill>
+                  <a:srgbClr val="1E3A8A"/>
+                </a:solidFill>
+                <a:latin typeface="PingFang SC" pitchFamily="34" charset="0"/>
+                <a:ea typeface="PingFang SC" pitchFamily="34" charset="-122"/>
+                <a:cs typeface="PingFang SC" pitchFamily="34" charset="-120"/>
+              </a:rPr>
+              <a:t>L1d</a:t>
+            </a:r>
+            <a:endParaRPr lang="en-US" sz="800" dirty="0"/>
+          </a:p>
+        </p:txBody>
+      </p:sp>
+      <p:sp>
+        <p:nvSpPr>
+          <p:cNvPr id="10" name="Shape 8"/>
+          <p:cNvSpPr/>
+          <p:nvPr/>
+        </p:nvSpPr>
+        <p:spPr>
+          <a:xfrm>
+            <a:off x="1580083" y="1316736"/>
+            <a:ext cx="561442" cy="201168"/>
+          </a:xfrm>
+          <a:prstGeom prst="roundRect">
+            <a:avLst>
+              <a:gd name="adj" fmla="val 13636"/>
+            </a:avLst>
+          </a:prstGeom>
+          <a:solidFill>
+            <a:srgbClr val="FFFFFF"/>
+          </a:solidFill>
+          <a:ln w="9525">
+            <a:solidFill>
+              <a:srgbClr val="1E3A8A"/>
+            </a:solidFill>
+            <a:prstDash val="solid"/>
+          </a:ln>
+        </p:spPr>
+      </p:sp>
+      <p:sp>
+        <p:nvSpPr>
+          <p:cNvPr id="11" name="Text 9"/>
+          <p:cNvSpPr/>
+          <p:nvPr/>
+        </p:nvSpPr>
+        <p:spPr>
+          <a:xfrm>
+            <a:off x="1580083" y="1316736"/>
+            <a:ext cx="561442" cy="201168"/>
+          </a:xfrm>
+          <a:prstGeom prst="rect">
+            <a:avLst/>
+          </a:prstGeom>
+          <a:noFill/>
+          <a:ln/>
+        </p:spPr>
+        <p:txBody>
+          <a:bodyPr wrap="square" lIns="0" tIns="0" rIns="0" bIns="0" rtlCol="0" anchor="ctr"/>
+          <a:lstStyle/>
+          <a:p>
+            <a:pPr algn="ctr" indent="0" marL="0">
+              <a:buNone/>
+            </a:pPr>
+            <a:r>
+              <a:rPr lang="en-US" sz="800" dirty="0">
+                <a:solidFill>
+                  <a:srgbClr val="1E3A8A"/>
+                </a:solidFill>
+                <a:latin typeface="PingFang SC" pitchFamily="34" charset="0"/>
+                <a:ea typeface="PingFang SC" pitchFamily="34" charset="-122"/>
+                <a:cs typeface="PingFang SC" pitchFamily="34" charset="-120"/>
+              </a:rPr>
+              <a:t>Private L2</a:t>
+            </a:r>
+            <a:endParaRPr lang="en-US" sz="800" dirty="0"/>
+          </a:p>
+        </p:txBody>
+      </p:sp>
+      <p:sp>
+        <p:nvSpPr>
+          <p:cNvPr id="12" name="Shape 10"/>
+          <p:cNvSpPr/>
+          <p:nvPr/>
+        </p:nvSpPr>
+        <p:spPr>
+          <a:xfrm>
+            <a:off x="347472" y="1554480"/>
+            <a:ext cx="1794053" cy="201168"/>
+          </a:xfrm>
+          <a:prstGeom prst="roundRect">
+            <a:avLst>
+              <a:gd name="adj" fmla="val 13636"/>
+            </a:avLst>
+          </a:prstGeom>
+          <a:solidFill>
+            <a:srgbClr val="FFFFFF"/>
+          </a:solidFill>
+          <a:ln w="9525">
+            <a:solidFill>
+              <a:srgbClr val="1E3A8A"/>
+            </a:solidFill>
+            <a:prstDash val="solid"/>
+          </a:ln>
+        </p:spPr>
+      </p:sp>
+      <p:sp>
+        <p:nvSpPr>
+          <p:cNvPr id="13" name="Text 11"/>
+          <p:cNvSpPr/>
+          <p:nvPr/>
+        </p:nvSpPr>
+        <p:spPr>
+          <a:xfrm>
+            <a:off x="347472" y="1554480"/>
+            <a:ext cx="1794053" cy="201168"/>
+          </a:xfrm>
+          <a:prstGeom prst="rect">
+            <a:avLst/>
+          </a:prstGeom>
+          <a:noFill/>
+          <a:ln/>
+        </p:spPr>
+        <p:txBody>
+          <a:bodyPr wrap="square" lIns="0" tIns="0" rIns="0" bIns="0" rtlCol="0" anchor="ctr"/>
+          <a:lstStyle/>
+          <a:p>
+            <a:pPr algn="ctr" indent="0" marL="0">
+              <a:buNone/>
+            </a:pPr>
+            <a:r>
+              <a:rPr lang="en-US" sz="800" dirty="0">
+                <a:solidFill>
+                  <a:srgbClr val="1E3A8A"/>
+                </a:solidFill>
+                <a:latin typeface="PingFang SC" pitchFamily="34" charset="0"/>
+                <a:ea typeface="PingFang SC" pitchFamily="34" charset="-122"/>
+                <a:cs typeface="PingFang SC" pitchFamily="34" charset="-120"/>
+              </a:rPr>
+              <a:t>MMU / TLB</a:t>
+            </a:r>
+            <a:endParaRPr lang="en-US" sz="800" dirty="0"/>
+          </a:p>
+        </p:txBody>
+      </p:sp>
+      <p:sp>
+        <p:nvSpPr>
+          <p:cNvPr id="14" name="Text 12"/>
+          <p:cNvSpPr/>
+          <p:nvPr/>
+        </p:nvSpPr>
+        <p:spPr>
+          <a:xfrm>
+            <a:off x="347472" y="1792224"/>
+            <a:ext cx="1794053" cy="182880"/>
+          </a:xfrm>
+          <a:prstGeom prst="rect">
+            <a:avLst/>
+          </a:prstGeom>
+          <a:noFill/>
+          <a:ln/>
+        </p:spPr>
+        <p:txBody>
+          <a:bodyPr wrap="square" lIns="0" tIns="0" rIns="0" bIns="0" rtlCol="0" anchor="ctr"/>
+          <a:lstStyle/>
+          <a:p>
+            <a:pPr indent="0" marL="0">
+              <a:buNone/>
+            </a:pPr>
+            <a:r>
+              <a:rPr lang="en-US" sz="850" dirty="0">
+                <a:solidFill>
+                  <a:srgbClr val="334155"/>
+                </a:solidFill>
+                <a:latin typeface="PingFang SC" pitchFamily="34" charset="0"/>
+                <a:ea typeface="PingFang SC" pitchFamily="34" charset="-122"/>
+                <a:cs typeface="PingFang SC" pitchFamily="34" charset="-120"/>
+              </a:rPr>
+              <a:t>MESI 写回 · 64B · PASID</a:t>
+            </a:r>
+            <a:endParaRPr lang="en-US" sz="850" dirty="0"/>
+          </a:p>
+        </p:txBody>
+      </p:sp>
+      <p:sp>
+        <p:nvSpPr>
+          <p:cNvPr id="15" name="Shape 13"/>
+          <p:cNvSpPr/>
+          <p:nvPr/>
+        </p:nvSpPr>
+        <p:spPr>
+          <a:xfrm>
+            <a:off x="2292401" y="841248"/>
+            <a:ext cx="1940357" cy="1188720"/>
+          </a:xfrm>
+          <a:prstGeom prst="roundRect">
+            <a:avLst>
+              <a:gd name="adj" fmla="val 4615"/>
+            </a:avLst>
+          </a:prstGeom>
+          <a:solidFill>
+            <a:srgbClr val="DBEAFE"/>
+          </a:solidFill>
+          <a:ln w="15875">
+            <a:solidFill>
+              <a:srgbClr val="2563EB"/>
+            </a:solidFill>
+            <a:prstDash val="solid"/>
+          </a:ln>
+        </p:spPr>
+      </p:sp>
+      <p:sp>
+        <p:nvSpPr>
+          <p:cNvPr id="16" name="Text 14"/>
+          <p:cNvSpPr/>
+          <p:nvPr/>
+        </p:nvSpPr>
+        <p:spPr>
+          <a:xfrm>
+            <a:off x="2365553" y="886968"/>
+            <a:ext cx="1794053" cy="219456"/>
+          </a:xfrm>
+          <a:prstGeom prst="rect">
+            <a:avLst/>
+          </a:prstGeom>
+          <a:noFill/>
+          <a:ln/>
+        </p:spPr>
+        <p:txBody>
+          <a:bodyPr wrap="square" lIns="0" tIns="0" rIns="0" bIns="0" rtlCol="0" anchor="ctr"/>
+          <a:lstStyle/>
+          <a:p>
+            <a:pPr indent="0" marL="0">
+              <a:buNone/>
+            </a:pPr>
+            <a:r>
+              <a:rPr lang="en-US" sz="1200" b="1" dirty="0">
+                <a:solidFill>
+                  <a:srgbClr val="0F172A"/>
+                </a:solidFill>
+                <a:latin typeface="PingFang SC" pitchFamily="34" charset="0"/>
+                <a:ea typeface="PingFang SC" pitchFamily="34" charset="-122"/>
+                <a:cs typeface="PingFang SC" pitchFamily="34" charset="-120"/>
+              </a:rPr>
+              <a:t>E-cluster · 小核</a:t>
+            </a:r>
+            <a:endParaRPr lang="en-US" sz="1200" dirty="0"/>
+          </a:p>
+        </p:txBody>
+      </p:sp>
+      <p:sp>
+        <p:nvSpPr>
+          <p:cNvPr id="17" name="Text 15"/>
+          <p:cNvSpPr/>
+          <p:nvPr/>
+        </p:nvSpPr>
+        <p:spPr>
+          <a:xfrm>
+            <a:off x="2365553" y="1115568"/>
+            <a:ext cx="1794053" cy="164592"/>
+          </a:xfrm>
+          <a:prstGeom prst="rect">
+            <a:avLst/>
+          </a:prstGeom>
+          <a:noFill/>
+          <a:ln/>
+        </p:spPr>
+        <p:txBody>
+          <a:bodyPr wrap="square" lIns="0" tIns="0" rIns="0" bIns="0" rtlCol="0" anchor="ctr"/>
+          <a:lstStyle/>
+          <a:p>
+            <a:pPr indent="0" marL="0">
+              <a:buNone/>
+            </a:pPr>
+            <a:r>
+              <a:rPr lang="en-US" sz="900" dirty="0">
+                <a:solidFill>
+                  <a:srgbClr val="334155"/>
+                </a:solidFill>
+                <a:latin typeface="PingFang SC" pitchFamily="34" charset="0"/>
+                <a:ea typeface="PingFang SC" pitchFamily="34" charset="-122"/>
+                <a:cs typeface="PingFang SC" pitchFamily="34" charset="-120"/>
+              </a:rPr>
+              <a:t>4× Cortex-A720</a:t>
+            </a:r>
+            <a:endParaRPr lang="en-US" sz="900" dirty="0"/>
+          </a:p>
+        </p:txBody>
+      </p:sp>
+      <p:sp>
+        <p:nvSpPr>
+          <p:cNvPr id="18" name="Shape 16"/>
+          <p:cNvSpPr/>
+          <p:nvPr/>
+        </p:nvSpPr>
+        <p:spPr>
+          <a:xfrm>
+            <a:off x="2365553" y="1316736"/>
+            <a:ext cx="561442" cy="201168"/>
+          </a:xfrm>
+          <a:prstGeom prst="roundRect">
+            <a:avLst>
+              <a:gd name="adj" fmla="val 13636"/>
+            </a:avLst>
+          </a:prstGeom>
+          <a:solidFill>
+            <a:srgbClr val="FFFFFF"/>
+          </a:solidFill>
+          <a:ln w="9525">
+            <a:solidFill>
+              <a:srgbClr val="1E3A8A"/>
+            </a:solidFill>
+            <a:prstDash val="solid"/>
+          </a:ln>
+        </p:spPr>
+      </p:sp>
+      <p:sp>
+        <p:nvSpPr>
+          <p:cNvPr id="19" name="Text 17"/>
+          <p:cNvSpPr/>
+          <p:nvPr/>
+        </p:nvSpPr>
+        <p:spPr>
+          <a:xfrm>
+            <a:off x="2365553" y="1316736"/>
+            <a:ext cx="561442" cy="201168"/>
+          </a:xfrm>
+          <a:prstGeom prst="rect">
+            <a:avLst/>
+          </a:prstGeom>
+          <a:noFill/>
+          <a:ln/>
+        </p:spPr>
+        <p:txBody>
+          <a:bodyPr wrap="square" lIns="0" tIns="0" rIns="0" bIns="0" rtlCol="0" anchor="ctr"/>
+          <a:lstStyle/>
+          <a:p>
+            <a:pPr algn="ctr" indent="0" marL="0">
+              <a:buNone/>
+            </a:pPr>
+            <a:r>
+              <a:rPr lang="en-US" sz="800" dirty="0">
+                <a:solidFill>
+                  <a:srgbClr val="1E3A8A"/>
+                </a:solidFill>
+                <a:latin typeface="PingFang SC" pitchFamily="34" charset="0"/>
+                <a:ea typeface="PingFang SC" pitchFamily="34" charset="-122"/>
+                <a:cs typeface="PingFang SC" pitchFamily="34" charset="-120"/>
+              </a:rPr>
+              <a:t>L1i</a:t>
+            </a:r>
+            <a:endParaRPr lang="en-US" sz="800" dirty="0"/>
+          </a:p>
+        </p:txBody>
+      </p:sp>
+      <p:sp>
+        <p:nvSpPr>
+          <p:cNvPr id="20" name="Shape 18"/>
+          <p:cNvSpPr/>
+          <p:nvPr/>
+        </p:nvSpPr>
+        <p:spPr>
+          <a:xfrm>
+            <a:off x="2981858" y="1316736"/>
+            <a:ext cx="561442" cy="201168"/>
+          </a:xfrm>
+          <a:prstGeom prst="roundRect">
+            <a:avLst>
+              <a:gd name="adj" fmla="val 13636"/>
+            </a:avLst>
+          </a:prstGeom>
+          <a:solidFill>
+            <a:srgbClr val="FFFFFF"/>
+          </a:solidFill>
+          <a:ln w="9525">
+            <a:solidFill>
+              <a:srgbClr val="1E3A8A"/>
+            </a:solidFill>
+            <a:prstDash val="solid"/>
+          </a:ln>
+        </p:spPr>
+      </p:sp>
+      <p:sp>
+        <p:nvSpPr>
+          <p:cNvPr id="21" name="Text 19"/>
+          <p:cNvSpPr/>
+          <p:nvPr/>
+        </p:nvSpPr>
+        <p:spPr>
+          <a:xfrm>
+            <a:off x="2981858" y="1316736"/>
+            <a:ext cx="561442" cy="201168"/>
+          </a:xfrm>
+          <a:prstGeom prst="rect">
+            <a:avLst/>
+          </a:prstGeom>
+          <a:noFill/>
+          <a:ln/>
+        </p:spPr>
+        <p:txBody>
+          <a:bodyPr wrap="square" lIns="0" tIns="0" rIns="0" bIns="0" rtlCol="0" anchor="ctr"/>
+          <a:lstStyle/>
+          <a:p>
+            <a:pPr algn="ctr" indent="0" marL="0">
+              <a:buNone/>
+            </a:pPr>
+            <a:r>
+              <a:rPr lang="en-US" sz="800" dirty="0">
+                <a:solidFill>
+                  <a:srgbClr val="1E3A8A"/>
+                </a:solidFill>
+                <a:latin typeface="PingFang SC" pitchFamily="34" charset="0"/>
+                <a:ea typeface="PingFang SC" pitchFamily="34" charset="-122"/>
+                <a:cs typeface="PingFang SC" pitchFamily="34" charset="-120"/>
+              </a:rPr>
+              <a:t>L1d</a:t>
+            </a:r>
+            <a:endParaRPr lang="en-US" sz="800" dirty="0"/>
+          </a:p>
+        </p:txBody>
+      </p:sp>
+      <p:sp>
+        <p:nvSpPr>
+          <p:cNvPr id="22" name="Shape 20"/>
+          <p:cNvSpPr/>
+          <p:nvPr/>
+        </p:nvSpPr>
+        <p:spPr>
+          <a:xfrm>
+            <a:off x="3598164" y="1316736"/>
+            <a:ext cx="561442" cy="201168"/>
+          </a:xfrm>
+          <a:prstGeom prst="roundRect">
+            <a:avLst>
+              <a:gd name="adj" fmla="val 13636"/>
+            </a:avLst>
+          </a:prstGeom>
+          <a:solidFill>
+            <a:srgbClr val="FFFFFF"/>
+          </a:solidFill>
+          <a:ln w="9525">
+            <a:solidFill>
+              <a:srgbClr val="1E3A8A"/>
+            </a:solidFill>
+            <a:prstDash val="solid"/>
+          </a:ln>
+        </p:spPr>
+      </p:sp>
+      <p:sp>
+        <p:nvSpPr>
+          <p:cNvPr id="23" name="Text 21"/>
+          <p:cNvSpPr/>
+          <p:nvPr/>
+        </p:nvSpPr>
+        <p:spPr>
+          <a:xfrm>
+            <a:off x="3598164" y="1316736"/>
+            <a:ext cx="561442" cy="201168"/>
+          </a:xfrm>
+          <a:prstGeom prst="rect">
+            <a:avLst/>
+          </a:prstGeom>
+          <a:noFill/>
+          <a:ln/>
+        </p:spPr>
+        <p:txBody>
+          <a:bodyPr wrap="square" lIns="0" tIns="0" rIns="0" bIns="0" rtlCol="0" anchor="ctr"/>
+          <a:lstStyle/>
+          <a:p>
+            <a:pPr algn="ctr" indent="0" marL="0">
+              <a:buNone/>
+            </a:pPr>
+            <a:r>
+              <a:rPr lang="en-US" sz="800" dirty="0">
+                <a:solidFill>
+                  <a:srgbClr val="1E3A8A"/>
+                </a:solidFill>
+                <a:latin typeface="PingFang SC" pitchFamily="34" charset="0"/>
+                <a:ea typeface="PingFang SC" pitchFamily="34" charset="-122"/>
+                <a:cs typeface="PingFang SC" pitchFamily="34" charset="-120"/>
+              </a:rPr>
+              <a:t>Private L2</a:t>
+            </a:r>
+            <a:endParaRPr lang="en-US" sz="800" dirty="0"/>
+          </a:p>
+        </p:txBody>
+      </p:sp>
+      <p:sp>
+        <p:nvSpPr>
+          <p:cNvPr id="24" name="Shape 22"/>
+          <p:cNvSpPr/>
+          <p:nvPr/>
+        </p:nvSpPr>
+        <p:spPr>
+          <a:xfrm>
+            <a:off x="2365553" y="1554480"/>
+            <a:ext cx="1794053" cy="201168"/>
+          </a:xfrm>
+          <a:prstGeom prst="roundRect">
+            <a:avLst>
+              <a:gd name="adj" fmla="val 13636"/>
+            </a:avLst>
+          </a:prstGeom>
+          <a:solidFill>
+            <a:srgbClr val="FFFFFF"/>
+          </a:solidFill>
+          <a:ln w="9525">
+            <a:solidFill>
+              <a:srgbClr val="1E3A8A"/>
+            </a:solidFill>
+            <a:prstDash val="solid"/>
+          </a:ln>
+        </p:spPr>
+      </p:sp>
+      <p:sp>
+        <p:nvSpPr>
+          <p:cNvPr id="25" name="Text 23"/>
+          <p:cNvSpPr/>
+          <p:nvPr/>
+        </p:nvSpPr>
+        <p:spPr>
+          <a:xfrm>
+            <a:off x="2365553" y="1554480"/>
+            <a:ext cx="1794053" cy="201168"/>
+          </a:xfrm>
+          <a:prstGeom prst="rect">
+            <a:avLst/>
+          </a:prstGeom>
+          <a:noFill/>
+          <a:ln/>
+        </p:spPr>
+        <p:txBody>
+          <a:bodyPr wrap="square" lIns="0" tIns="0" rIns="0" bIns="0" rtlCol="0" anchor="ctr"/>
+          <a:lstStyle/>
+          <a:p>
+            <a:pPr algn="ctr" indent="0" marL="0">
+              <a:buNone/>
+            </a:pPr>
+            <a:r>
+              <a:rPr lang="en-US" sz="800" dirty="0">
+                <a:solidFill>
+                  <a:srgbClr val="1E3A8A"/>
+                </a:solidFill>
+                <a:latin typeface="PingFang SC" pitchFamily="34" charset="0"/>
+                <a:ea typeface="PingFang SC" pitchFamily="34" charset="-122"/>
+                <a:cs typeface="PingFang SC" pitchFamily="34" charset="-120"/>
+              </a:rPr>
+              <a:t>MMU / TLB</a:t>
+            </a:r>
+            <a:endParaRPr lang="en-US" sz="800" dirty="0"/>
+          </a:p>
+        </p:txBody>
+      </p:sp>
+      <p:sp>
+        <p:nvSpPr>
+          <p:cNvPr id="26" name="Text 24"/>
+          <p:cNvSpPr/>
+          <p:nvPr/>
+        </p:nvSpPr>
+        <p:spPr>
+          <a:xfrm>
+            <a:off x="2365553" y="1792224"/>
+            <a:ext cx="1794053" cy="182880"/>
+          </a:xfrm>
+          <a:prstGeom prst="rect">
+            <a:avLst/>
+          </a:prstGeom>
+          <a:noFill/>
+          <a:ln/>
+        </p:spPr>
+        <p:txBody>
+          <a:bodyPr wrap="square" lIns="0" tIns="0" rIns="0" bIns="0" rtlCol="0" anchor="ctr"/>
+          <a:lstStyle/>
+          <a:p>
+            <a:pPr indent="0" marL="0">
+              <a:buNone/>
+            </a:pPr>
+            <a:r>
+              <a:rPr lang="en-US" sz="850" dirty="0">
+                <a:solidFill>
+                  <a:srgbClr val="334155"/>
+                </a:solidFill>
+                <a:latin typeface="PingFang SC" pitchFamily="34" charset="0"/>
+                <a:ea typeface="PingFang SC" pitchFamily="34" charset="-122"/>
+                <a:cs typeface="PingFang SC" pitchFamily="34" charset="-120"/>
+              </a:rPr>
+              <a:t>低功耗 · 效率任务</a:t>
+            </a:r>
+            <a:endParaRPr lang="en-US" sz="850" dirty="0"/>
+          </a:p>
+        </p:txBody>
+      </p:sp>
+      <p:sp>
+        <p:nvSpPr>
+          <p:cNvPr id="27" name="Shape 25"/>
+          <p:cNvSpPr/>
+          <p:nvPr/>
+        </p:nvSpPr>
+        <p:spPr>
+          <a:xfrm>
+            <a:off x="4310482" y="841248"/>
+            <a:ext cx="1648663" cy="1188720"/>
+          </a:xfrm>
+          <a:prstGeom prst="roundRect">
+            <a:avLst>
+              <a:gd name="adj" fmla="val 4615"/>
+            </a:avLst>
+          </a:prstGeom>
+          <a:solidFill>
+            <a:srgbClr val="DBEAFE"/>
+          </a:solidFill>
+          <a:ln w="15875">
+            <a:solidFill>
+              <a:srgbClr val="2563EB"/>
+            </a:solidFill>
+            <a:prstDash val="solid"/>
+          </a:ln>
+        </p:spPr>
+      </p:sp>
+      <p:sp>
+        <p:nvSpPr>
+          <p:cNvPr id="28" name="Text 26"/>
+          <p:cNvSpPr/>
+          <p:nvPr/>
+        </p:nvSpPr>
+        <p:spPr>
+          <a:xfrm>
+            <a:off x="4383634" y="886968"/>
+            <a:ext cx="1502359" cy="219456"/>
+          </a:xfrm>
+          <a:prstGeom prst="rect">
+            <a:avLst/>
+          </a:prstGeom>
+          <a:noFill/>
+          <a:ln/>
+        </p:spPr>
+        <p:txBody>
+          <a:bodyPr wrap="square" lIns="0" tIns="0" rIns="0" bIns="0" rtlCol="0" anchor="ctr"/>
+          <a:lstStyle/>
+          <a:p>
+            <a:pPr indent="0" marL="0">
+              <a:buNone/>
+            </a:pPr>
+            <a:r>
+              <a:rPr lang="en-US" sz="1200" b="1" dirty="0">
+                <a:solidFill>
+                  <a:srgbClr val="0F172A"/>
+                </a:solidFill>
+                <a:latin typeface="PingFang SC" pitchFamily="34" charset="0"/>
+                <a:ea typeface="PingFang SC" pitchFamily="34" charset="-122"/>
+                <a:cs typeface="PingFang SC" pitchFamily="34" charset="-120"/>
+              </a:rPr>
+              <a:t>GPU</a:t>
+            </a:r>
+            <a:endParaRPr lang="en-US" sz="1200" dirty="0"/>
+          </a:p>
+        </p:txBody>
+      </p:sp>
+      <p:sp>
+        <p:nvSpPr>
+          <p:cNvPr id="29" name="Text 27"/>
+          <p:cNvSpPr/>
+          <p:nvPr/>
+        </p:nvSpPr>
+        <p:spPr>
+          <a:xfrm>
+            <a:off x="4383634" y="1115568"/>
+            <a:ext cx="1502359" cy="164592"/>
+          </a:xfrm>
+          <a:prstGeom prst="rect">
+            <a:avLst/>
+          </a:prstGeom>
+          <a:noFill/>
+          <a:ln/>
+        </p:spPr>
+        <p:txBody>
+          <a:bodyPr wrap="square" lIns="0" tIns="0" rIns="0" bIns="0" rtlCol="0" anchor="ctr"/>
+          <a:lstStyle/>
+          <a:p>
+            <a:pPr indent="0" marL="0">
+              <a:buNone/>
+            </a:pPr>
+            <a:r>
+              <a:rPr lang="en-US" sz="900" dirty="0">
+                <a:solidFill>
+                  <a:srgbClr val="334155"/>
+                </a:solidFill>
+                <a:latin typeface="PingFang SC" pitchFamily="34" charset="0"/>
+                <a:ea typeface="PingFang SC" pitchFamily="34" charset="-122"/>
+                <a:cs typeface="PingFang SC" pitchFamily="34" charset="-120"/>
+              </a:rPr>
+              <a:t>Shader / ALU 阵列</a:t>
+            </a:r>
+            <a:endParaRPr lang="en-US" sz="900" dirty="0"/>
+          </a:p>
+        </p:txBody>
+      </p:sp>
+      <p:sp>
+        <p:nvSpPr>
+          <p:cNvPr id="30" name="Shape 28"/>
+          <p:cNvSpPr/>
+          <p:nvPr/>
+        </p:nvSpPr>
+        <p:spPr>
+          <a:xfrm>
+            <a:off x="4383634" y="1316736"/>
+            <a:ext cx="723748" cy="201168"/>
+          </a:xfrm>
+          <a:prstGeom prst="roundRect">
+            <a:avLst>
+              <a:gd name="adj" fmla="val 13636"/>
+            </a:avLst>
+          </a:prstGeom>
+          <a:solidFill>
+            <a:srgbClr val="FFFFFF"/>
+          </a:solidFill>
+          <a:ln w="9525">
+            <a:solidFill>
+              <a:srgbClr val="1E3A8A"/>
+            </a:solidFill>
+            <a:prstDash val="solid"/>
+          </a:ln>
+        </p:spPr>
+      </p:sp>
+      <p:sp>
+        <p:nvSpPr>
+          <p:cNvPr id="31" name="Text 29"/>
+          <p:cNvSpPr/>
+          <p:nvPr/>
+        </p:nvSpPr>
+        <p:spPr>
+          <a:xfrm>
+            <a:off x="4383634" y="1316736"/>
+            <a:ext cx="723748" cy="201168"/>
+          </a:xfrm>
+          <a:prstGeom prst="rect">
+            <a:avLst/>
+          </a:prstGeom>
+          <a:noFill/>
+          <a:ln/>
+        </p:spPr>
+        <p:txBody>
+          <a:bodyPr wrap="square" lIns="0" tIns="0" rIns="0" bIns="0" rtlCol="0" anchor="ctr"/>
+          <a:lstStyle/>
+          <a:p>
+            <a:pPr algn="ctr" indent="0" marL="0">
+              <a:buNone/>
+            </a:pPr>
+            <a:r>
+              <a:rPr lang="en-US" sz="800" dirty="0">
+                <a:solidFill>
+                  <a:srgbClr val="1E3A8A"/>
+                </a:solidFill>
+                <a:latin typeface="PingFang SC" pitchFamily="34" charset="0"/>
+                <a:ea typeface="PingFang SC" pitchFamily="34" charset="-122"/>
+                <a:cs typeface="PingFang SC" pitchFamily="34" charset="-120"/>
+              </a:rPr>
+              <a:t>L1/L2</a:t>
+            </a:r>
+            <a:endParaRPr lang="en-US" sz="800" dirty="0"/>
+          </a:p>
+        </p:txBody>
+      </p:sp>
+      <p:sp>
+        <p:nvSpPr>
+          <p:cNvPr id="32" name="Shape 30"/>
+          <p:cNvSpPr/>
+          <p:nvPr/>
+        </p:nvSpPr>
+        <p:spPr>
+          <a:xfrm>
+            <a:off x="5162245" y="1316736"/>
+            <a:ext cx="723748" cy="201168"/>
+          </a:xfrm>
+          <a:prstGeom prst="roundRect">
+            <a:avLst>
+              <a:gd name="adj" fmla="val 13636"/>
+            </a:avLst>
+          </a:prstGeom>
+          <a:solidFill>
+            <a:srgbClr val="FFFFFF"/>
+          </a:solidFill>
+          <a:ln w="9525">
+            <a:solidFill>
+              <a:srgbClr val="1E3A8A"/>
+            </a:solidFill>
+            <a:prstDash val="solid"/>
+          </a:ln>
+        </p:spPr>
+      </p:sp>
+      <p:sp>
+        <p:nvSpPr>
+          <p:cNvPr id="33" name="Text 31"/>
+          <p:cNvSpPr/>
+          <p:nvPr/>
+        </p:nvSpPr>
+        <p:spPr>
+          <a:xfrm>
+            <a:off x="5162245" y="1316736"/>
+            <a:ext cx="723748" cy="201168"/>
+          </a:xfrm>
+          <a:prstGeom prst="rect">
+            <a:avLst/>
+          </a:prstGeom>
+          <a:noFill/>
+          <a:ln/>
+        </p:spPr>
+        <p:txBody>
+          <a:bodyPr wrap="square" lIns="0" tIns="0" rIns="0" bIns="0" rtlCol="0" anchor="ctr"/>
+          <a:lstStyle/>
+          <a:p>
+            <a:pPr algn="ctr" indent="0" marL="0">
+              <a:buNone/>
+            </a:pPr>
+            <a:r>
+              <a:rPr lang="en-US" sz="800" dirty="0">
+                <a:solidFill>
+                  <a:srgbClr val="1E3A8A"/>
+                </a:solidFill>
+                <a:latin typeface="PingFang SC" pitchFamily="34" charset="0"/>
+                <a:ea typeface="PingFang SC" pitchFamily="34" charset="-122"/>
+                <a:cs typeface="PingFang SC" pitchFamily="34" charset="-120"/>
+              </a:rPr>
+              <a:t>Scratchpad</a:t>
+            </a:r>
+            <a:endParaRPr lang="en-US" sz="800" dirty="0"/>
+          </a:p>
+        </p:txBody>
+      </p:sp>
+      <p:sp>
+        <p:nvSpPr>
+          <p:cNvPr id="34" name="Text 32"/>
+          <p:cNvSpPr/>
+          <p:nvPr/>
+        </p:nvSpPr>
+        <p:spPr>
+          <a:xfrm>
+            <a:off x="4383634" y="1572768"/>
+            <a:ext cx="1502359" cy="182880"/>
+          </a:xfrm>
+          <a:prstGeom prst="rect">
+            <a:avLst/>
+          </a:prstGeom>
+          <a:noFill/>
+          <a:ln/>
+        </p:spPr>
+        <p:txBody>
+          <a:bodyPr wrap="square" lIns="0" tIns="0" rIns="0" bIns="0" rtlCol="0" anchor="ctr"/>
+          <a:lstStyle/>
+          <a:p>
+            <a:pPr indent="0" marL="0">
+              <a:buNone/>
+            </a:pPr>
+            <a:r>
+              <a:rPr lang="en-US" sz="850" dirty="0">
+                <a:solidFill>
+                  <a:srgbClr val="334155"/>
+                </a:solidFill>
+                <a:latin typeface="PingFang SC" pitchFamily="34" charset="0"/>
+                <a:ea typeface="PingFang SC" pitchFamily="34" charset="-122"/>
+                <a:cs typeface="PingFang SC" pitchFamily="34" charset="-120"/>
+              </a:rPr>
+              <a:t>数千线程 · 需 ReqV</a:t>
+            </a:r>
+            <a:endParaRPr lang="en-US" sz="850" dirty="0"/>
+          </a:p>
+        </p:txBody>
+      </p:sp>
+      <p:sp>
+        <p:nvSpPr>
+          <p:cNvPr id="35" name="Shape 33"/>
+          <p:cNvSpPr/>
+          <p:nvPr/>
+        </p:nvSpPr>
+        <p:spPr>
+          <a:xfrm>
+            <a:off x="6036869" y="841248"/>
+            <a:ext cx="1503274" cy="1188720"/>
+          </a:xfrm>
+          <a:prstGeom prst="roundRect">
+            <a:avLst>
+              <a:gd name="adj" fmla="val 4615"/>
+            </a:avLst>
+          </a:prstGeom>
+          <a:solidFill>
+            <a:srgbClr val="DBEAFE"/>
+          </a:solidFill>
+          <a:ln w="15875">
+            <a:solidFill>
+              <a:srgbClr val="2563EB"/>
+            </a:solidFill>
+            <a:prstDash val="solid"/>
+          </a:ln>
+        </p:spPr>
+      </p:sp>
+      <p:sp>
+        <p:nvSpPr>
+          <p:cNvPr id="36" name="Text 34"/>
+          <p:cNvSpPr/>
+          <p:nvPr/>
+        </p:nvSpPr>
+        <p:spPr>
+          <a:xfrm>
+            <a:off x="6110021" y="886968"/>
+            <a:ext cx="1356970" cy="219456"/>
+          </a:xfrm>
+          <a:prstGeom prst="rect">
+            <a:avLst/>
+          </a:prstGeom>
+          <a:noFill/>
+          <a:ln/>
+        </p:spPr>
+        <p:txBody>
+          <a:bodyPr wrap="square" lIns="0" tIns="0" rIns="0" bIns="0" rtlCol="0" anchor="ctr"/>
+          <a:lstStyle/>
+          <a:p>
+            <a:pPr indent="0" marL="0">
+              <a:buNone/>
+            </a:pPr>
+            <a:r>
+              <a:rPr lang="en-US" sz="1200" b="1" dirty="0">
+                <a:solidFill>
+                  <a:srgbClr val="0F172A"/>
+                </a:solidFill>
+                <a:latin typeface="PingFang SC" pitchFamily="34" charset="0"/>
+                <a:ea typeface="PingFang SC" pitchFamily="34" charset="-122"/>
+                <a:cs typeface="PingFang SC" pitchFamily="34" charset="-120"/>
+              </a:rPr>
+              <a:t>NPU / DSP</a:t>
+            </a:r>
+            <a:endParaRPr lang="en-US" sz="1200" dirty="0"/>
+          </a:p>
+        </p:txBody>
+      </p:sp>
+      <p:sp>
+        <p:nvSpPr>
+          <p:cNvPr id="37" name="Text 35"/>
+          <p:cNvSpPr/>
+          <p:nvPr/>
+        </p:nvSpPr>
+        <p:spPr>
+          <a:xfrm>
+            <a:off x="6110021" y="1115568"/>
+            <a:ext cx="1356970" cy="164592"/>
+          </a:xfrm>
+          <a:prstGeom prst="rect">
+            <a:avLst/>
+          </a:prstGeom>
+          <a:noFill/>
+          <a:ln/>
+        </p:spPr>
+        <p:txBody>
+          <a:bodyPr wrap="square" lIns="0" tIns="0" rIns="0" bIns="0" rtlCol="0" anchor="ctr"/>
+          <a:lstStyle/>
+          <a:p>
+            <a:pPr indent="0" marL="0">
+              <a:buNone/>
+            </a:pPr>
+            <a:r>
+              <a:rPr lang="en-US" sz="900" dirty="0">
+                <a:solidFill>
+                  <a:srgbClr val="334155"/>
+                </a:solidFill>
+                <a:latin typeface="PingFang SC" pitchFamily="34" charset="0"/>
+                <a:ea typeface="PingFang SC" pitchFamily="34" charset="-122"/>
+                <a:cs typeface="PingFang SC" pitchFamily="34" charset="-120"/>
+              </a:rPr>
+              <a:t>MAC 阵列 · 推理</a:t>
+            </a:r>
+            <a:endParaRPr lang="en-US" sz="900" dirty="0"/>
+          </a:p>
+        </p:txBody>
+      </p:sp>
+      <p:sp>
+        <p:nvSpPr>
+          <p:cNvPr id="38" name="Shape 36"/>
+          <p:cNvSpPr/>
+          <p:nvPr/>
+        </p:nvSpPr>
+        <p:spPr>
+          <a:xfrm>
+            <a:off x="6110021" y="1316736"/>
+            <a:ext cx="651053" cy="201168"/>
+          </a:xfrm>
+          <a:prstGeom prst="roundRect">
+            <a:avLst>
+              <a:gd name="adj" fmla="val 13636"/>
+            </a:avLst>
+          </a:prstGeom>
+          <a:solidFill>
+            <a:srgbClr val="FFFFFF"/>
+          </a:solidFill>
+          <a:ln w="9525">
+            <a:solidFill>
+              <a:srgbClr val="1E3A8A"/>
+            </a:solidFill>
+            <a:prstDash val="solid"/>
+          </a:ln>
+        </p:spPr>
+      </p:sp>
+      <p:sp>
+        <p:nvSpPr>
+          <p:cNvPr id="39" name="Text 37"/>
+          <p:cNvSpPr/>
+          <p:nvPr/>
+        </p:nvSpPr>
+        <p:spPr>
+          <a:xfrm>
+            <a:off x="6110021" y="1316736"/>
+            <a:ext cx="651053" cy="201168"/>
+          </a:xfrm>
+          <a:prstGeom prst="rect">
+            <a:avLst/>
+          </a:prstGeom>
+          <a:noFill/>
+          <a:ln/>
+        </p:spPr>
+        <p:txBody>
+          <a:bodyPr wrap="square" lIns="0" tIns="0" rIns="0" bIns="0" rtlCol="0" anchor="ctr"/>
+          <a:lstStyle/>
+          <a:p>
+            <a:pPr algn="ctr" indent="0" marL="0">
+              <a:buNone/>
+            </a:pPr>
+            <a:r>
+              <a:rPr lang="en-US" sz="800" dirty="0">
+                <a:solidFill>
+                  <a:srgbClr val="1E3A8A"/>
+                </a:solidFill>
+                <a:latin typeface="PingFang SC" pitchFamily="34" charset="0"/>
+                <a:ea typeface="PingFang SC" pitchFamily="34" charset="-122"/>
+                <a:cs typeface="PingFang SC" pitchFamily="34" charset="-120"/>
+              </a:rPr>
+              <a:t>Local</a:t>
+            </a:r>
+            <a:endParaRPr lang="en-US" sz="800" dirty="0"/>
+          </a:p>
+        </p:txBody>
+      </p:sp>
+      <p:sp>
+        <p:nvSpPr>
+          <p:cNvPr id="40" name="Shape 38"/>
+          <p:cNvSpPr/>
+          <p:nvPr/>
+        </p:nvSpPr>
+        <p:spPr>
+          <a:xfrm>
+            <a:off x="6815938" y="1316736"/>
+            <a:ext cx="651053" cy="201168"/>
+          </a:xfrm>
+          <a:prstGeom prst="roundRect">
+            <a:avLst>
+              <a:gd name="adj" fmla="val 13636"/>
+            </a:avLst>
+          </a:prstGeom>
+          <a:solidFill>
+            <a:srgbClr val="FFFFFF"/>
+          </a:solidFill>
+          <a:ln w="9525">
+            <a:solidFill>
+              <a:srgbClr val="1E3A8A"/>
+            </a:solidFill>
+            <a:prstDash val="solid"/>
+          </a:ln>
+        </p:spPr>
+      </p:sp>
+      <p:sp>
+        <p:nvSpPr>
+          <p:cNvPr id="41" name="Text 39"/>
+          <p:cNvSpPr/>
+          <p:nvPr/>
+        </p:nvSpPr>
+        <p:spPr>
+          <a:xfrm>
+            <a:off x="6815938" y="1316736"/>
+            <a:ext cx="651053" cy="201168"/>
+          </a:xfrm>
+          <a:prstGeom prst="rect">
+            <a:avLst/>
+          </a:prstGeom>
+          <a:noFill/>
+          <a:ln/>
+        </p:spPr>
+        <p:txBody>
+          <a:bodyPr wrap="square" lIns="0" tIns="0" rIns="0" bIns="0" rtlCol="0" anchor="ctr"/>
+          <a:lstStyle/>
+          <a:p>
+            <a:pPr algn="ctr" indent="0" marL="0">
+              <a:buNone/>
+            </a:pPr>
+            <a:r>
+              <a:rPr lang="en-US" sz="800" dirty="0">
+                <a:solidFill>
+                  <a:srgbClr val="1E3A8A"/>
+                </a:solidFill>
+                <a:latin typeface="PingFang SC" pitchFamily="34" charset="0"/>
+                <a:ea typeface="PingFang SC" pitchFamily="34" charset="-122"/>
+                <a:cs typeface="PingFang SC" pitchFamily="34" charset="-120"/>
+              </a:rPr>
+              <a:t>Weight</a:t>
+            </a:r>
+            <a:endParaRPr lang="en-US" sz="800" dirty="0"/>
+          </a:p>
+        </p:txBody>
+      </p:sp>
+      <p:sp>
+        <p:nvSpPr>
+          <p:cNvPr id="42" name="Text 40"/>
+          <p:cNvSpPr/>
+          <p:nvPr/>
+        </p:nvSpPr>
+        <p:spPr>
+          <a:xfrm>
+            <a:off x="6110021" y="1572768"/>
+            <a:ext cx="1356970" cy="182880"/>
+          </a:xfrm>
+          <a:prstGeom prst="rect">
+            <a:avLst/>
+          </a:prstGeom>
+          <a:noFill/>
+          <a:ln/>
+        </p:spPr>
+        <p:txBody>
+          <a:bodyPr wrap="square" lIns="0" tIns="0" rIns="0" bIns="0" rtlCol="0" anchor="ctr"/>
+          <a:lstStyle/>
+          <a:p>
+            <a:pPr indent="0" marL="0">
+              <a:buNone/>
+            </a:pPr>
+            <a:r>
+              <a:rPr lang="en-US" sz="850" dirty="0">
+                <a:solidFill>
+                  <a:srgbClr val="334155"/>
+                </a:solidFill>
+                <a:latin typeface="PingFang SC" pitchFamily="34" charset="0"/>
+                <a:ea typeface="PingFang SC" pitchFamily="34" charset="-122"/>
+                <a:cs typeface="PingFang SC" pitchFamily="34" charset="-120"/>
+              </a:rPr>
+              <a:t>批量预加载权重</a:t>
+            </a:r>
+            <a:endParaRPr lang="en-US" sz="850" dirty="0"/>
+          </a:p>
+        </p:txBody>
+      </p:sp>
+      <p:sp>
+        <p:nvSpPr>
+          <p:cNvPr id="43" name="Shape 41"/>
+          <p:cNvSpPr/>
+          <p:nvPr/>
+        </p:nvSpPr>
+        <p:spPr>
+          <a:xfrm>
+            <a:off x="7617866" y="841248"/>
+            <a:ext cx="1164031" cy="1188720"/>
+          </a:xfrm>
+          <a:prstGeom prst="roundRect">
+            <a:avLst>
+              <a:gd name="adj" fmla="val 4713"/>
+            </a:avLst>
+          </a:prstGeom>
+          <a:solidFill>
+            <a:srgbClr val="DBEAFE"/>
+          </a:solidFill>
+          <a:ln w="15875">
+            <a:solidFill>
+              <a:srgbClr val="2563EB"/>
+            </a:solidFill>
+            <a:prstDash val="solid"/>
+          </a:ln>
+        </p:spPr>
+      </p:sp>
+      <p:sp>
+        <p:nvSpPr>
+          <p:cNvPr id="44" name="Text 42"/>
+          <p:cNvSpPr/>
+          <p:nvPr/>
+        </p:nvSpPr>
+        <p:spPr>
+          <a:xfrm>
+            <a:off x="7691018" y="886968"/>
+            <a:ext cx="1017727" cy="219456"/>
+          </a:xfrm>
+          <a:prstGeom prst="rect">
+            <a:avLst/>
+          </a:prstGeom>
+          <a:noFill/>
+          <a:ln/>
+        </p:spPr>
+        <p:txBody>
+          <a:bodyPr wrap="square" lIns="0" tIns="0" rIns="0" bIns="0" rtlCol="0" anchor="ctr"/>
+          <a:lstStyle/>
+          <a:p>
+            <a:pPr indent="0" marL="0">
+              <a:buNone/>
+            </a:pPr>
+            <a:r>
+              <a:rPr lang="en-US" sz="1200" b="1" dirty="0">
+                <a:solidFill>
+                  <a:srgbClr val="0F172A"/>
+                </a:solidFill>
+                <a:latin typeface="PingFang SC" pitchFamily="34" charset="0"/>
+                <a:ea typeface="PingFang SC" pitchFamily="34" charset="-122"/>
+                <a:cs typeface="PingFang SC" pitchFamily="34" charset="-120"/>
+              </a:rPr>
+              <a:t>ISP</a:t>
+            </a:r>
+            <a:endParaRPr lang="en-US" sz="1200" dirty="0"/>
+          </a:p>
+        </p:txBody>
+      </p:sp>
+      <p:sp>
+        <p:nvSpPr>
+          <p:cNvPr id="45" name="Text 43"/>
+          <p:cNvSpPr/>
+          <p:nvPr/>
+        </p:nvSpPr>
+        <p:spPr>
+          <a:xfrm>
+            <a:off x="7691018" y="1115568"/>
+            <a:ext cx="1017727" cy="164592"/>
+          </a:xfrm>
+          <a:prstGeom prst="rect">
+            <a:avLst/>
+          </a:prstGeom>
+          <a:noFill/>
+          <a:ln/>
+        </p:spPr>
+        <p:txBody>
+          <a:bodyPr wrap="square" lIns="0" tIns="0" rIns="0" bIns="0" rtlCol="0" anchor="ctr"/>
+          <a:lstStyle/>
+          <a:p>
+            <a:pPr indent="0" marL="0">
+              <a:buNone/>
+            </a:pPr>
+            <a:r>
+              <a:rPr lang="en-US" sz="900" dirty="0">
+                <a:solidFill>
+                  <a:srgbClr val="334155"/>
+                </a:solidFill>
+                <a:latin typeface="PingFang SC" pitchFamily="34" charset="0"/>
+                <a:ea typeface="PingFang SC" pitchFamily="34" charset="-122"/>
+                <a:cs typeface="PingFang SC" pitchFamily="34" charset="-120"/>
+              </a:rPr>
+              <a:t>图像信号处理</a:t>
+            </a:r>
+            <a:endParaRPr lang="en-US" sz="900" dirty="0"/>
+          </a:p>
+        </p:txBody>
+      </p:sp>
+      <p:sp>
+        <p:nvSpPr>
+          <p:cNvPr id="46" name="Shape 44"/>
+          <p:cNvSpPr/>
+          <p:nvPr/>
+        </p:nvSpPr>
+        <p:spPr>
+          <a:xfrm>
+            <a:off x="7691018" y="1316736"/>
+            <a:ext cx="1017727" cy="201168"/>
+          </a:xfrm>
+          <a:prstGeom prst="roundRect">
+            <a:avLst>
+              <a:gd name="adj" fmla="val 13636"/>
+            </a:avLst>
+          </a:prstGeom>
+          <a:solidFill>
+            <a:srgbClr val="FFFFFF"/>
+          </a:solidFill>
+          <a:ln w="9525">
+            <a:solidFill>
+              <a:srgbClr val="1E3A8A"/>
+            </a:solidFill>
+            <a:prstDash val="solid"/>
+          </a:ln>
+        </p:spPr>
+      </p:sp>
+      <p:sp>
+        <p:nvSpPr>
+          <p:cNvPr id="47" name="Text 45"/>
+          <p:cNvSpPr/>
+          <p:nvPr/>
+        </p:nvSpPr>
+        <p:spPr>
+          <a:xfrm>
+            <a:off x="7691018" y="1316736"/>
+            <a:ext cx="1017727" cy="201168"/>
+          </a:xfrm>
+          <a:prstGeom prst="rect">
+            <a:avLst/>
+          </a:prstGeom>
+          <a:noFill/>
+          <a:ln/>
+        </p:spPr>
+        <p:txBody>
+          <a:bodyPr wrap="square" lIns="0" tIns="0" rIns="0" bIns="0" rtlCol="0" anchor="ctr"/>
+          <a:lstStyle/>
+          <a:p>
+            <a:pPr algn="ctr" indent="0" marL="0">
+              <a:buNone/>
+            </a:pPr>
+            <a:r>
+              <a:rPr lang="en-US" sz="800" dirty="0">
+                <a:solidFill>
+                  <a:srgbClr val="1E3A8A"/>
+                </a:solidFill>
+                <a:latin typeface="PingFang SC" pitchFamily="34" charset="0"/>
+                <a:ea typeface="PingFang SC" pitchFamily="34" charset="-122"/>
+                <a:cs typeface="PingFang SC" pitchFamily="34" charset="-120"/>
+              </a:rPr>
+              <a:t>Pipeline Buf</a:t>
+            </a:r>
+            <a:endParaRPr lang="en-US" sz="800" dirty="0"/>
+          </a:p>
+        </p:txBody>
+      </p:sp>
+      <p:sp>
+        <p:nvSpPr>
+          <p:cNvPr id="48" name="Text 46"/>
+          <p:cNvSpPr/>
+          <p:nvPr/>
+        </p:nvSpPr>
+        <p:spPr>
+          <a:xfrm>
+            <a:off x="7691018" y="1572768"/>
+            <a:ext cx="1017727" cy="182880"/>
+          </a:xfrm>
+          <a:prstGeom prst="rect">
+            <a:avLst/>
+          </a:prstGeom>
+          <a:noFill/>
+          <a:ln/>
+        </p:spPr>
+        <p:txBody>
+          <a:bodyPr wrap="square" lIns="0" tIns="0" rIns="0" bIns="0" rtlCol="0" anchor="ctr"/>
+          <a:lstStyle/>
+          <a:p>
+            <a:pPr indent="0" marL="0">
+              <a:buNone/>
+            </a:pPr>
+            <a:r>
+              <a:rPr lang="en-US" sz="850" dirty="0">
+                <a:solidFill>
+                  <a:srgbClr val="334155"/>
+                </a:solidFill>
+                <a:latin typeface="PingFang SC" pitchFamily="34" charset="0"/>
+                <a:ea typeface="PingFang SC" pitchFamily="34" charset="-122"/>
+                <a:cs typeface="PingFang SC" pitchFamily="34" charset="-120"/>
+              </a:rPr>
+              <a:t>Camera 流水线</a:t>
+            </a:r>
+            <a:endParaRPr lang="en-US" sz="850" dirty="0"/>
+          </a:p>
+        </p:txBody>
+      </p:sp>
+      <p:sp>
+        <p:nvSpPr>
+          <p:cNvPr id="49" name="Shape 47"/>
+          <p:cNvSpPr/>
+          <p:nvPr/>
+        </p:nvSpPr>
+        <p:spPr>
+          <a:xfrm>
+            <a:off x="8859622" y="841248"/>
+            <a:ext cx="1260958" cy="1188720"/>
+          </a:xfrm>
+          <a:prstGeom prst="roundRect">
+            <a:avLst>
+              <a:gd name="adj" fmla="val 4615"/>
+            </a:avLst>
+          </a:prstGeom>
+          <a:solidFill>
+            <a:srgbClr val="DBEAFE"/>
+          </a:solidFill>
+          <a:ln w="15875">
+            <a:solidFill>
+              <a:srgbClr val="2563EB"/>
+            </a:solidFill>
+            <a:prstDash val="solid"/>
+          </a:ln>
+        </p:spPr>
+      </p:sp>
+      <p:sp>
+        <p:nvSpPr>
+          <p:cNvPr id="50" name="Text 48"/>
+          <p:cNvSpPr/>
+          <p:nvPr/>
+        </p:nvSpPr>
+        <p:spPr>
+          <a:xfrm>
+            <a:off x="8932774" y="886968"/>
+            <a:ext cx="1114654" cy="219456"/>
+          </a:xfrm>
+          <a:prstGeom prst="rect">
+            <a:avLst/>
+          </a:prstGeom>
+          <a:noFill/>
+          <a:ln/>
+        </p:spPr>
+        <p:txBody>
+          <a:bodyPr wrap="square" lIns="0" tIns="0" rIns="0" bIns="0" rtlCol="0" anchor="ctr"/>
+          <a:lstStyle/>
+          <a:p>
+            <a:pPr indent="0" marL="0">
+              <a:buNone/>
+            </a:pPr>
+            <a:r>
+              <a:rPr lang="en-US" sz="1200" b="1" dirty="0">
+                <a:solidFill>
+                  <a:srgbClr val="0F172A"/>
+                </a:solidFill>
+                <a:latin typeface="PingFang SC" pitchFamily="34" charset="0"/>
+                <a:ea typeface="PingFang SC" pitchFamily="34" charset="-122"/>
+                <a:cs typeface="PingFang SC" pitchFamily="34" charset="-120"/>
+              </a:rPr>
+              <a:t>Media / DMA</a:t>
+            </a:r>
+            <a:endParaRPr lang="en-US" sz="1200" dirty="0"/>
+          </a:p>
+        </p:txBody>
+      </p:sp>
+      <p:sp>
+        <p:nvSpPr>
+          <p:cNvPr id="51" name="Text 49"/>
+          <p:cNvSpPr/>
+          <p:nvPr/>
+        </p:nvSpPr>
+        <p:spPr>
+          <a:xfrm>
+            <a:off x="8932774" y="1115568"/>
+            <a:ext cx="1114654" cy="164592"/>
+          </a:xfrm>
+          <a:prstGeom prst="rect">
+            <a:avLst/>
+          </a:prstGeom>
+          <a:noFill/>
+          <a:ln/>
+        </p:spPr>
+        <p:txBody>
+          <a:bodyPr wrap="square" lIns="0" tIns="0" rIns="0" bIns="0" rtlCol="0" anchor="ctr"/>
+          <a:lstStyle/>
+          <a:p>
+            <a:pPr indent="0" marL="0">
+              <a:buNone/>
+            </a:pPr>
+            <a:r>
+              <a:rPr lang="en-US" sz="900" dirty="0">
+                <a:solidFill>
+                  <a:srgbClr val="334155"/>
+                </a:solidFill>
+                <a:latin typeface="PingFang SC" pitchFamily="34" charset="0"/>
+                <a:ea typeface="PingFang SC" pitchFamily="34" charset="-122"/>
+                <a:cs typeface="PingFang SC" pitchFamily="34" charset="-120"/>
+              </a:rPr>
+              <a:t>视频编解码</a:t>
+            </a:r>
+            <a:endParaRPr lang="en-US" sz="900" dirty="0"/>
+          </a:p>
+        </p:txBody>
+      </p:sp>
+      <p:sp>
+        <p:nvSpPr>
+          <p:cNvPr id="52" name="Shape 50"/>
+          <p:cNvSpPr/>
+          <p:nvPr/>
+        </p:nvSpPr>
+        <p:spPr>
+          <a:xfrm>
+            <a:off x="8932774" y="1316736"/>
+            <a:ext cx="1114654" cy="201168"/>
+          </a:xfrm>
+          <a:prstGeom prst="roundRect">
+            <a:avLst>
+              <a:gd name="adj" fmla="val 13636"/>
+            </a:avLst>
+          </a:prstGeom>
+          <a:solidFill>
+            <a:srgbClr val="FFFFFF"/>
+          </a:solidFill>
+          <a:ln w="9525">
+            <a:solidFill>
+              <a:srgbClr val="1E3A8A"/>
+            </a:solidFill>
+            <a:prstDash val="solid"/>
+          </a:ln>
+        </p:spPr>
+      </p:sp>
+      <p:sp>
+        <p:nvSpPr>
+          <p:cNvPr id="53" name="Text 51"/>
+          <p:cNvSpPr/>
+          <p:nvPr/>
+        </p:nvSpPr>
+        <p:spPr>
+          <a:xfrm>
+            <a:off x="8932774" y="1316736"/>
+            <a:ext cx="1114654" cy="201168"/>
+          </a:xfrm>
+          <a:prstGeom prst="rect">
+            <a:avLst/>
+          </a:prstGeom>
+          <a:noFill/>
+          <a:ln/>
+        </p:spPr>
+        <p:txBody>
+          <a:bodyPr wrap="square" lIns="0" tIns="0" rIns="0" bIns="0" rtlCol="0" anchor="ctr"/>
+          <a:lstStyle/>
+          <a:p>
+            <a:pPr algn="ctr" indent="0" marL="0">
+              <a:buNone/>
+            </a:pPr>
+            <a:r>
+              <a:rPr lang="en-US" sz="800" dirty="0">
+                <a:solidFill>
+                  <a:srgbClr val="1E3A8A"/>
+                </a:solidFill>
+                <a:latin typeface="PingFang SC" pitchFamily="34" charset="0"/>
+                <a:ea typeface="PingFang SC" pitchFamily="34" charset="-122"/>
+                <a:cs typeface="PingFang SC" pitchFamily="34" charset="-120"/>
+              </a:rPr>
+              <a:t>Codec Buffer</a:t>
+            </a:r>
+            <a:endParaRPr lang="en-US" sz="800" dirty="0"/>
+          </a:p>
+        </p:txBody>
+      </p:sp>
+      <p:sp>
+        <p:nvSpPr>
+          <p:cNvPr id="54" name="Text 52"/>
+          <p:cNvSpPr/>
+          <p:nvPr/>
+        </p:nvSpPr>
+        <p:spPr>
+          <a:xfrm>
+            <a:off x="8932774" y="1572768"/>
+            <a:ext cx="1114654" cy="182880"/>
+          </a:xfrm>
+          <a:prstGeom prst="rect">
+            <a:avLst/>
+          </a:prstGeom>
+          <a:noFill/>
+          <a:ln/>
+        </p:spPr>
+        <p:txBody>
+          <a:bodyPr wrap="square" lIns="0" tIns="0" rIns="0" bIns="0" rtlCol="0" anchor="ctr"/>
+          <a:lstStyle/>
+          <a:p>
+            <a:pPr indent="0" marL="0">
+              <a:buNone/>
+            </a:pPr>
+            <a:r>
+              <a:rPr lang="en-US" sz="850" dirty="0">
+                <a:solidFill>
+                  <a:srgbClr val="334155"/>
+                </a:solidFill>
+                <a:latin typeface="PingFang SC" pitchFamily="34" charset="0"/>
+                <a:ea typeface="PingFang SC" pitchFamily="34" charset="-122"/>
+                <a:cs typeface="PingFang SC" pitchFamily="34" charset="-120"/>
+              </a:rPr>
+              <a:t>H.265/AV1 · DMA</a:t>
+            </a:r>
+            <a:endParaRPr lang="en-US" sz="850" dirty="0"/>
+          </a:p>
+        </p:txBody>
+      </p:sp>
+      <p:sp>
+        <p:nvSpPr>
+          <p:cNvPr id="55" name="Shape 53"/>
+          <p:cNvSpPr/>
+          <p:nvPr/>
+        </p:nvSpPr>
+        <p:spPr>
+          <a:xfrm>
+            <a:off x="10198303" y="841248"/>
+            <a:ext cx="1717243" cy="1188720"/>
+          </a:xfrm>
+          <a:prstGeom prst="roundRect">
+            <a:avLst>
+              <a:gd name="adj" fmla="val 4615"/>
+            </a:avLst>
+          </a:prstGeom>
+          <a:solidFill>
+            <a:srgbClr val="F3E8FF"/>
+          </a:solidFill>
+          <a:ln w="15875">
+            <a:solidFill>
+              <a:srgbClr val="7C3AED"/>
+            </a:solidFill>
+            <a:prstDash val="dash"/>
+          </a:ln>
+        </p:spPr>
+      </p:sp>
+      <p:sp>
+        <p:nvSpPr>
+          <p:cNvPr id="56" name="Text 54"/>
+          <p:cNvSpPr/>
+          <p:nvPr/>
+        </p:nvSpPr>
+        <p:spPr>
+          <a:xfrm>
+            <a:off x="10271455" y="886968"/>
+            <a:ext cx="1570939" cy="219456"/>
+          </a:xfrm>
+          <a:prstGeom prst="rect">
+            <a:avLst/>
+          </a:prstGeom>
+          <a:noFill/>
+          <a:ln/>
+        </p:spPr>
+        <p:txBody>
+          <a:bodyPr wrap="square" lIns="0" tIns="0" rIns="0" bIns="0" rtlCol="0" anchor="ctr"/>
+          <a:lstStyle/>
+          <a:p>
+            <a:pPr indent="0" marL="0">
+              <a:buNone/>
+            </a:pPr>
+            <a:r>
+              <a:rPr lang="en-US" sz="1200" b="1" dirty="0">
+                <a:solidFill>
+                  <a:srgbClr val="581C87"/>
+                </a:solidFill>
+                <a:latin typeface="PingFang SC" pitchFamily="34" charset="0"/>
+                <a:ea typeface="PingFang SC" pitchFamily="34" charset="-122"/>
+                <a:cs typeface="PingFang SC" pitchFamily="34" charset="-120"/>
+              </a:rPr>
+              <a:t>芯粒 B（Chiplet）</a:t>
+            </a:r>
+            <a:endParaRPr lang="en-US" sz="1200" dirty="0"/>
+          </a:p>
+        </p:txBody>
+      </p:sp>
+      <p:sp>
+        <p:nvSpPr>
+          <p:cNvPr id="57" name="Text 55"/>
+          <p:cNvSpPr/>
+          <p:nvPr/>
+        </p:nvSpPr>
+        <p:spPr>
+          <a:xfrm>
+            <a:off x="10271455" y="1115568"/>
+            <a:ext cx="1570939" cy="164592"/>
+          </a:xfrm>
+          <a:prstGeom prst="rect">
+            <a:avLst/>
+          </a:prstGeom>
+          <a:noFill/>
+          <a:ln/>
+        </p:spPr>
+        <p:txBody>
+          <a:bodyPr wrap="square" lIns="0" tIns="0" rIns="0" bIns="0" rtlCol="0" anchor="ctr"/>
+          <a:lstStyle/>
+          <a:p>
+            <a:pPr indent="0" marL="0">
+              <a:buNone/>
+            </a:pPr>
+            <a:r>
+              <a:rPr lang="en-US" sz="900" dirty="0">
+                <a:solidFill>
+                  <a:srgbClr val="581C87"/>
+                </a:solidFill>
+                <a:latin typeface="PingFang SC" pitchFamily="34" charset="0"/>
+                <a:ea typeface="PingFang SC" pitchFamily="34" charset="-122"/>
+                <a:cs typeface="PingFang SC" pitchFamily="34" charset="-120"/>
+              </a:rPr>
+              <a:t>独立计算 IP · 不同工艺</a:t>
+            </a:r>
+            <a:endParaRPr lang="en-US" sz="900" dirty="0"/>
+          </a:p>
+        </p:txBody>
+      </p:sp>
+      <p:sp>
+        <p:nvSpPr>
+          <p:cNvPr id="58" name="Text 56"/>
+          <p:cNvSpPr/>
+          <p:nvPr/>
+        </p:nvSpPr>
+        <p:spPr>
+          <a:xfrm>
+            <a:off x="10271455" y="1316736"/>
+            <a:ext cx="1570939" cy="603504"/>
+          </a:xfrm>
+          <a:prstGeom prst="rect">
+            <a:avLst/>
+          </a:prstGeom>
+          <a:noFill/>
+          <a:ln/>
+        </p:spPr>
+        <p:txBody>
+          <a:bodyPr wrap="square" lIns="0" tIns="0" rIns="0" bIns="0" rtlCol="0" anchor="t"/>
+          <a:lstStyle/>
+          <a:p>
+            <a:pPr indent="0" marL="0">
+              <a:lnSpc>
+                <a:spcPct val="115000"/>
+              </a:lnSpc>
+              <a:buNone/>
+            </a:pPr>
+            <a:r>
+              <a:rPr lang="en-US" sz="850" dirty="0">
+                <a:solidFill>
+                  <a:srgbClr val="581C87"/>
+                </a:solidFill>
+                <a:latin typeface="PingFang SC" pitchFamily="34" charset="0"/>
+                <a:ea typeface="PingFang SC" pitchFamily="34" charset="-122"/>
+                <a:cs typeface="PingFang SC" pitchFamily="34" charset="-120"/>
+              </a:rPr>
+              <a:t>600mm² 良率~50%</a:t>
+            </a:r>
+            <a:endParaRPr lang="en-US" sz="850" dirty="0"/>
+          </a:p>
+          <a:p>
+            <a:pPr indent="0" marL="0">
+              <a:lnSpc>
+                <a:spcPct val="115000"/>
+              </a:lnSpc>
+              <a:buNone/>
+            </a:pPr>
+            <a:r>
+              <a:rPr lang="en-US" sz="850" dirty="0">
+                <a:solidFill>
+                  <a:srgbClr val="581C87"/>
+                </a:solidFill>
+                <a:latin typeface="PingFang SC" pitchFamily="34" charset="0"/>
+                <a:ea typeface="PingFang SC" pitchFamily="34" charset="-122"/>
+                <a:cs typeface="PingFang SC" pitchFamily="34" charset="-120"/>
+              </a:rPr>
+              <a:t>→ 2×300mm² 各~70%</a:t>
+            </a:r>
+            <a:endParaRPr lang="en-US" sz="850" dirty="0"/>
+          </a:p>
+        </p:txBody>
+      </p:sp>
+      <p:sp>
+        <p:nvSpPr>
+          <p:cNvPr id="59" name="Shape 57"/>
+          <p:cNvSpPr/>
+          <p:nvPr/>
+        </p:nvSpPr>
+        <p:spPr>
+          <a:xfrm>
+            <a:off x="4310482" y="2267712"/>
+            <a:ext cx="5810098" cy="457200"/>
+          </a:xfrm>
+          <a:prstGeom prst="roundRect">
+            <a:avLst>
+              <a:gd name="adj" fmla="val 12000"/>
+            </a:avLst>
+          </a:prstGeom>
+          <a:solidFill>
+            <a:srgbClr val="CCFBF1"/>
+          </a:solidFill>
+          <a:ln w="15875">
+            <a:solidFill>
+              <a:srgbClr val="0D9488"/>
+            </a:solidFill>
+            <a:prstDash val="solid"/>
+          </a:ln>
+        </p:spPr>
+      </p:sp>
+      <p:sp>
+        <p:nvSpPr>
+          <p:cNvPr id="60" name="Text 58"/>
+          <p:cNvSpPr/>
+          <p:nvPr/>
+        </p:nvSpPr>
+        <p:spPr>
+          <a:xfrm>
+            <a:off x="4401922" y="2304288"/>
+            <a:ext cx="1463040" cy="201168"/>
+          </a:xfrm>
+          <a:prstGeom prst="rect">
+            <a:avLst/>
+          </a:prstGeom>
+          <a:noFill/>
+          <a:ln/>
+        </p:spPr>
+        <p:txBody>
+          <a:bodyPr wrap="square" lIns="0" tIns="0" rIns="0" bIns="0" rtlCol="0" anchor="ctr"/>
+          <a:lstStyle/>
+          <a:p>
+            <a:pPr indent="0" marL="0">
+              <a:buNone/>
+            </a:pPr>
+            <a:r>
+              <a:rPr lang="en-US" sz="1100" b="1" dirty="0">
+                <a:solidFill>
+                  <a:srgbClr val="134E4A"/>
+                </a:solidFill>
+                <a:latin typeface="PingFang SC" pitchFamily="34" charset="0"/>
+                <a:ea typeface="PingFang SC" pitchFamily="34" charset="-122"/>
+                <a:cs typeface="PingFang SC" pitchFamily="34" charset="-120"/>
+              </a:rPr>
+              <a:t>IOMMU / SMMU v3</a:t>
+            </a:r>
+            <a:endParaRPr lang="en-US" sz="1100" dirty="0"/>
+          </a:p>
+        </p:txBody>
+      </p:sp>
+      <p:sp>
+        <p:nvSpPr>
+          <p:cNvPr id="61" name="Shape 59"/>
+          <p:cNvSpPr/>
+          <p:nvPr/>
+        </p:nvSpPr>
+        <p:spPr>
+          <a:xfrm>
+            <a:off x="5760720" y="2313432"/>
+            <a:ext cx="502920" cy="182880"/>
+          </a:xfrm>
+          <a:prstGeom prst="roundRect">
+            <a:avLst>
+              <a:gd name="adj" fmla="val 15000"/>
+            </a:avLst>
+          </a:prstGeom>
+          <a:solidFill>
+            <a:srgbClr val="FFFFFF"/>
+          </a:solidFill>
+          <a:ln w="9525">
+            <a:solidFill>
+              <a:srgbClr val="134E4A"/>
+            </a:solidFill>
+            <a:prstDash val="solid"/>
+          </a:ln>
+        </p:spPr>
+      </p:sp>
+      <p:sp>
+        <p:nvSpPr>
+          <p:cNvPr id="62" name="Text 60"/>
+          <p:cNvSpPr/>
+          <p:nvPr/>
+        </p:nvSpPr>
+        <p:spPr>
+          <a:xfrm>
+            <a:off x="5760720" y="2313432"/>
+            <a:ext cx="502920" cy="182880"/>
+          </a:xfrm>
+          <a:prstGeom prst="rect">
+            <a:avLst/>
+          </a:prstGeom>
+          <a:noFill/>
+          <a:ln/>
+        </p:spPr>
+        <p:txBody>
+          <a:bodyPr wrap="square" lIns="0" tIns="0" rIns="0" bIns="0" rtlCol="0" anchor="ctr"/>
+          <a:lstStyle/>
+          <a:p>
+            <a:pPr algn="ctr" indent="0" marL="0">
+              <a:buNone/>
+            </a:pPr>
+            <a:r>
+              <a:rPr lang="en-US" sz="800" dirty="0">
+                <a:solidFill>
+                  <a:srgbClr val="134E4A"/>
+                </a:solidFill>
+                <a:latin typeface="PingFang SC" pitchFamily="34" charset="0"/>
+                <a:ea typeface="PingFang SC" pitchFamily="34" charset="-122"/>
+                <a:cs typeface="PingFang SC" pitchFamily="34" charset="-120"/>
+              </a:rPr>
+              <a:t>SVA</a:t>
+            </a:r>
+            <a:endParaRPr lang="en-US" sz="800" dirty="0"/>
+          </a:p>
+        </p:txBody>
+      </p:sp>
+      <p:sp>
+        <p:nvSpPr>
+          <p:cNvPr id="63" name="Shape 61"/>
+          <p:cNvSpPr/>
+          <p:nvPr/>
+        </p:nvSpPr>
+        <p:spPr>
+          <a:xfrm>
+            <a:off x="6318504" y="2313432"/>
+            <a:ext cx="502920" cy="182880"/>
+          </a:xfrm>
+          <a:prstGeom prst="roundRect">
+            <a:avLst>
+              <a:gd name="adj" fmla="val 15000"/>
+            </a:avLst>
+          </a:prstGeom>
+          <a:solidFill>
+            <a:srgbClr val="FFFFFF"/>
+          </a:solidFill>
+          <a:ln w="9525">
+            <a:solidFill>
+              <a:srgbClr val="134E4A"/>
+            </a:solidFill>
+            <a:prstDash val="solid"/>
+          </a:ln>
+        </p:spPr>
+      </p:sp>
+      <p:sp>
+        <p:nvSpPr>
+          <p:cNvPr id="64" name="Text 62"/>
+          <p:cNvSpPr/>
+          <p:nvPr/>
+        </p:nvSpPr>
+        <p:spPr>
+          <a:xfrm>
+            <a:off x="6318504" y="2313432"/>
+            <a:ext cx="502920" cy="182880"/>
+          </a:xfrm>
+          <a:prstGeom prst="rect">
+            <a:avLst/>
+          </a:prstGeom>
+          <a:noFill/>
+          <a:ln/>
+        </p:spPr>
+        <p:txBody>
+          <a:bodyPr wrap="square" lIns="0" tIns="0" rIns="0" bIns="0" rtlCol="0" anchor="ctr"/>
+          <a:lstStyle/>
+          <a:p>
+            <a:pPr algn="ctr" indent="0" marL="0">
+              <a:buNone/>
+            </a:pPr>
+            <a:r>
+              <a:rPr lang="en-US" sz="800" dirty="0">
+                <a:solidFill>
+                  <a:srgbClr val="134E4A"/>
+                </a:solidFill>
+                <a:latin typeface="PingFang SC" pitchFamily="34" charset="0"/>
+                <a:ea typeface="PingFang SC" pitchFamily="34" charset="-122"/>
+                <a:cs typeface="PingFang SC" pitchFamily="34" charset="-120"/>
+              </a:rPr>
+              <a:t>IOPF</a:t>
+            </a:r>
+            <a:endParaRPr lang="en-US" sz="800" dirty="0"/>
+          </a:p>
+        </p:txBody>
+      </p:sp>
+      <p:sp>
+        <p:nvSpPr>
+          <p:cNvPr id="65" name="Shape 63"/>
+          <p:cNvSpPr/>
+          <p:nvPr/>
+        </p:nvSpPr>
+        <p:spPr>
+          <a:xfrm>
+            <a:off x="6876288" y="2313432"/>
+            <a:ext cx="658368" cy="182880"/>
+          </a:xfrm>
+          <a:prstGeom prst="roundRect">
+            <a:avLst>
+              <a:gd name="adj" fmla="val 15000"/>
+            </a:avLst>
+          </a:prstGeom>
+          <a:solidFill>
+            <a:srgbClr val="FFFFFF"/>
+          </a:solidFill>
+          <a:ln w="9525">
+            <a:solidFill>
+              <a:srgbClr val="134E4A"/>
+            </a:solidFill>
+            <a:prstDash val="solid"/>
+          </a:ln>
+        </p:spPr>
+      </p:sp>
+      <p:sp>
+        <p:nvSpPr>
+          <p:cNvPr id="66" name="Text 64"/>
+          <p:cNvSpPr/>
+          <p:nvPr/>
+        </p:nvSpPr>
+        <p:spPr>
+          <a:xfrm>
+            <a:off x="6876288" y="2313432"/>
+            <a:ext cx="658368" cy="182880"/>
+          </a:xfrm>
+          <a:prstGeom prst="rect">
+            <a:avLst/>
+          </a:prstGeom>
+          <a:noFill/>
+          <a:ln/>
+        </p:spPr>
+        <p:txBody>
+          <a:bodyPr wrap="square" lIns="0" tIns="0" rIns="0" bIns="0" rtlCol="0" anchor="ctr"/>
+          <a:lstStyle/>
+          <a:p>
+            <a:pPr algn="ctr" indent="0" marL="0">
+              <a:buNone/>
+            </a:pPr>
+            <a:r>
+              <a:rPr lang="en-US" sz="800" dirty="0">
+                <a:solidFill>
+                  <a:srgbClr val="134E4A"/>
+                </a:solidFill>
+                <a:latin typeface="PingFang SC" pitchFamily="34" charset="0"/>
+                <a:ea typeface="PingFang SC" pitchFamily="34" charset="-122"/>
+                <a:cs typeface="PingFang SC" pitchFamily="34" charset="-120"/>
+              </a:rPr>
+              <a:t>ATS/PRI</a:t>
+            </a:r>
+            <a:endParaRPr lang="en-US" sz="800" dirty="0"/>
+          </a:p>
+        </p:txBody>
+      </p:sp>
+      <p:sp>
+        <p:nvSpPr>
+          <p:cNvPr id="67" name="Shape 65"/>
+          <p:cNvSpPr/>
+          <p:nvPr/>
+        </p:nvSpPr>
+        <p:spPr>
+          <a:xfrm>
+            <a:off x="7589520" y="2313432"/>
+            <a:ext cx="566928" cy="182880"/>
+          </a:xfrm>
+          <a:prstGeom prst="roundRect">
+            <a:avLst>
+              <a:gd name="adj" fmla="val 15000"/>
+            </a:avLst>
+          </a:prstGeom>
+          <a:solidFill>
+            <a:srgbClr val="FFFFFF"/>
+          </a:solidFill>
+          <a:ln w="9525">
+            <a:solidFill>
+              <a:srgbClr val="134E4A"/>
+            </a:solidFill>
+            <a:prstDash val="solid"/>
+          </a:ln>
+        </p:spPr>
+      </p:sp>
+      <p:sp>
+        <p:nvSpPr>
+          <p:cNvPr id="68" name="Text 66"/>
+          <p:cNvSpPr/>
+          <p:nvPr/>
+        </p:nvSpPr>
+        <p:spPr>
+          <a:xfrm>
+            <a:off x="7589520" y="2313432"/>
+            <a:ext cx="566928" cy="182880"/>
+          </a:xfrm>
+          <a:prstGeom prst="rect">
+            <a:avLst/>
+          </a:prstGeom>
+          <a:noFill/>
+          <a:ln/>
+        </p:spPr>
+        <p:txBody>
+          <a:bodyPr wrap="square" lIns="0" tIns="0" rIns="0" bIns="0" rtlCol="0" anchor="ctr"/>
+          <a:lstStyle/>
+          <a:p>
+            <a:pPr algn="ctr" indent="0" marL="0">
+              <a:buNone/>
+            </a:pPr>
+            <a:r>
+              <a:rPr lang="en-US" sz="800" dirty="0">
+                <a:solidFill>
+                  <a:srgbClr val="134E4A"/>
+                </a:solidFill>
+                <a:latin typeface="PingFang SC" pitchFamily="34" charset="0"/>
+                <a:ea typeface="PingFang SC" pitchFamily="34" charset="-122"/>
+                <a:cs typeface="PingFang SC" pitchFamily="34" charset="-120"/>
+              </a:rPr>
+              <a:t>PASID</a:t>
+            </a:r>
+            <a:endParaRPr lang="en-US" sz="800" dirty="0"/>
+          </a:p>
+        </p:txBody>
+      </p:sp>
+      <p:sp>
+        <p:nvSpPr>
+          <p:cNvPr id="69" name="Shape 67"/>
+          <p:cNvSpPr/>
+          <p:nvPr/>
+        </p:nvSpPr>
+        <p:spPr>
+          <a:xfrm>
+            <a:off x="8211312" y="2313432"/>
+            <a:ext cx="713232" cy="182880"/>
+          </a:xfrm>
+          <a:prstGeom prst="roundRect">
+            <a:avLst>
+              <a:gd name="adj" fmla="val 15000"/>
+            </a:avLst>
+          </a:prstGeom>
+          <a:solidFill>
+            <a:srgbClr val="FFFFFF"/>
+          </a:solidFill>
+          <a:ln w="9525">
+            <a:solidFill>
+              <a:srgbClr val="134E4A"/>
+            </a:solidFill>
+            <a:prstDash val="solid"/>
+          </a:ln>
+        </p:spPr>
+      </p:sp>
+      <p:sp>
+        <p:nvSpPr>
+          <p:cNvPr id="70" name="Text 68"/>
+          <p:cNvSpPr/>
+          <p:nvPr/>
+        </p:nvSpPr>
+        <p:spPr>
+          <a:xfrm>
+            <a:off x="8211312" y="2313432"/>
+            <a:ext cx="713232" cy="182880"/>
+          </a:xfrm>
+          <a:prstGeom prst="rect">
+            <a:avLst/>
+          </a:prstGeom>
+          <a:noFill/>
+          <a:ln/>
+        </p:spPr>
+        <p:txBody>
+          <a:bodyPr wrap="square" lIns="0" tIns="0" rIns="0" bIns="0" rtlCol="0" anchor="ctr"/>
+          <a:lstStyle/>
+          <a:p>
+            <a:pPr algn="ctr" indent="0" marL="0">
+              <a:buNone/>
+            </a:pPr>
+            <a:r>
+              <a:rPr lang="en-US" sz="800" dirty="0">
+                <a:solidFill>
+                  <a:srgbClr val="134E4A"/>
+                </a:solidFill>
+                <a:latin typeface="PingFang SC" pitchFamily="34" charset="0"/>
+                <a:ea typeface="PingFang SC" pitchFamily="34" charset="-122"/>
+                <a:cs typeface="PingFang SC" pitchFamily="34" charset="-120"/>
+              </a:rPr>
+              <a:t>Stall 模型</a:t>
+            </a:r>
+            <a:endParaRPr lang="en-US" sz="800" dirty="0"/>
+          </a:p>
+        </p:txBody>
+      </p:sp>
+      <p:sp>
+        <p:nvSpPr>
+          <p:cNvPr id="71" name="Shape 69"/>
+          <p:cNvSpPr/>
+          <p:nvPr/>
+        </p:nvSpPr>
+        <p:spPr>
+          <a:xfrm>
+            <a:off x="9837115" y="2267712"/>
+            <a:ext cx="237744" cy="237744"/>
           </a:xfrm>
           <a:prstGeom prst="ellipse">
             <a:avLst/>
           </a:prstGeom>
           <a:solidFill>
-            <a:srgbClr val="7C3AED"/>
+            <a:srgbClr val="0F172A"/>
           </a:solidFill>
           <a:ln w="12700">
+            <a:solidFill>
+              <a:srgbClr val="333333"/>
+            </a:solidFill>
+            <a:prstDash val="solid"/>
+          </a:ln>
+        </p:spPr>
+      </p:sp>
+      <p:sp>
+        <p:nvSpPr>
+          <p:cNvPr id="72" name="Text 70"/>
+          <p:cNvSpPr/>
+          <p:nvPr/>
+        </p:nvSpPr>
+        <p:spPr>
+          <a:xfrm>
+            <a:off x="9837115" y="2267712"/>
+            <a:ext cx="237744" cy="237744"/>
+          </a:xfrm>
+          <a:prstGeom prst="rect">
+            <a:avLst/>
+          </a:prstGeom>
+          <a:noFill/>
+          <a:ln/>
+        </p:spPr>
+        <p:txBody>
+          <a:bodyPr wrap="square" lIns="0" tIns="0" rIns="0" bIns="0" rtlCol="0" anchor="ctr"/>
+          <a:lstStyle/>
+          <a:p>
+            <a:pPr algn="ctr" indent="0" marL="0">
+              <a:buNone/>
+            </a:pPr>
+            <a:r>
+              <a:rPr lang="en-US" sz="1100" b="1" dirty="0">
+                <a:solidFill>
+                  <a:srgbClr val="FFFFFF"/>
+                </a:solidFill>
+                <a:latin typeface="PingFang SC" pitchFamily="34" charset="0"/>
+                <a:ea typeface="PingFang SC" pitchFamily="34" charset="-122"/>
+                <a:cs typeface="PingFang SC" pitchFamily="34" charset="-120"/>
+              </a:rPr>
+              <a:t>1</a:t>
+            </a:r>
+            <a:endParaRPr lang="en-US" sz="1100" dirty="0"/>
+          </a:p>
+        </p:txBody>
+      </p:sp>
+      <p:sp>
+        <p:nvSpPr>
+          <p:cNvPr id="73" name="Text 71"/>
+          <p:cNvSpPr/>
+          <p:nvPr/>
+        </p:nvSpPr>
+        <p:spPr>
+          <a:xfrm>
+            <a:off x="4401922" y="2523744"/>
+            <a:ext cx="5627218" cy="164592"/>
+          </a:xfrm>
+          <a:prstGeom prst="rect">
+            <a:avLst/>
+          </a:prstGeom>
+          <a:noFill/>
+          <a:ln/>
+        </p:spPr>
+        <p:txBody>
+          <a:bodyPr wrap="square" lIns="0" tIns="0" rIns="0" bIns="0" rtlCol="0" anchor="ctr"/>
+          <a:lstStyle/>
+          <a:p>
+            <a:pPr indent="0" marL="0">
+              <a:buNone/>
+            </a:pPr>
+            <a:r>
+              <a:rPr lang="en-US" sz="850" dirty="0">
+                <a:solidFill>
+                  <a:srgbClr val="334155"/>
+                </a:solidFill>
+                <a:latin typeface="PingFang SC" pitchFamily="34" charset="0"/>
+                <a:ea typeface="PingFang SC" pitchFamily="34" charset="-122"/>
+                <a:cs typeface="PingFang SC" pitchFamily="34" charset="-120"/>
+              </a:rPr>
+              <a:t>设备共享进程虚拟地址 · 按需调页取代全程锁页 · 锁页 −60~80% · CPU 拷贝 −40~60%</a:t>
+            </a:r>
+            <a:endParaRPr lang="en-US" sz="850" dirty="0"/>
+          </a:p>
+        </p:txBody>
+      </p:sp>
+      <p:sp>
+        <p:nvSpPr>
+          <p:cNvPr id="74" name="Shape 72"/>
+          <p:cNvSpPr/>
+          <p:nvPr/>
+        </p:nvSpPr>
+        <p:spPr>
+          <a:xfrm>
+            <a:off x="274320" y="2907792"/>
+            <a:ext cx="11640312" cy="804672"/>
+          </a:xfrm>
+          <a:prstGeom prst="roundRect">
+            <a:avLst>
+              <a:gd name="adj" fmla="val 6818"/>
+            </a:avLst>
+          </a:prstGeom>
+          <a:solidFill>
+            <a:srgbClr val="F3E8FF"/>
+          </a:solidFill>
+          <a:ln w="15875">
             <a:solidFill>
               <a:srgbClr val="7C3AED"/>
             </a:solidFill>
@@ -4062,53 +7367,14 @@
       </p:sp>
       <p:sp>
         <p:nvSpPr>
-          <p:cNvPr id="3" name="Text 1"/>
-          <p:cNvSpPr/>
-          <p:nvPr/>
-        </p:nvSpPr>
-        <p:spPr>
-          <a:xfrm>
-            <a:off x="548640" y="320040"/>
-            <a:ext cx="512064" cy="512064"/>
-          </a:xfrm>
-          <a:prstGeom prst="rect">
-            <a:avLst/>
-          </a:prstGeom>
-          <a:noFill/>
-          <a:ln/>
-        </p:spPr>
-        <p:txBody>
-          <a:bodyPr wrap="square" lIns="0" tIns="0" rIns="0" bIns="0" rtlCol="0" anchor="ctr"/>
-          <a:lstStyle/>
-          <a:p>
-            <a:pPr algn="ctr" indent="0" marL="0">
-              <a:buNone/>
-            </a:pPr>
-            <a:r>
-              <a:rPr lang="en-US" sz="1800" b="1" dirty="0">
-                <a:solidFill>
-                  <a:srgbClr val="FFFFFF"/>
-                </a:solidFill>
-                <a:latin typeface="PingFang SC" pitchFamily="34" charset="0"/>
-                <a:ea typeface="PingFang SC" pitchFamily="34" charset="-122"/>
-                <a:cs typeface="PingFang SC" pitchFamily="34" charset="-120"/>
-              </a:rPr>
-              <a:t>1</a:t>
-            </a:r>
-            <a:endParaRPr lang="en-US" sz="1800" dirty="0"/>
-          </a:p>
-        </p:txBody>
-      </p:sp>
-      <p:sp>
-        <p:nvSpPr>
-          <p:cNvPr id="4" name="Text 2"/>
-          <p:cNvSpPr/>
-          <p:nvPr/>
-        </p:nvSpPr>
-        <p:spPr>
-          <a:xfrm>
-            <a:off x="1188720" y="320040"/>
-            <a:ext cx="7315200" cy="512064"/>
+          <p:cNvPr id="75" name="Text 73"/>
+          <p:cNvSpPr/>
+          <p:nvPr/>
+        </p:nvSpPr>
+        <p:spPr>
+          <a:xfrm>
+            <a:off x="411480" y="2944368"/>
+            <a:ext cx="5486400" cy="219456"/>
           </a:xfrm>
           <a:prstGeom prst="rect">
             <a:avLst/>
@@ -4124,40 +7390,40 @@
               <a:buNone/>
             </a:pPr>
             <a:r>
-              <a:rPr lang="en-US" sz="2600" b="1" dirty="0">
-                <a:solidFill>
-                  <a:srgbClr val="0F172A"/>
-                </a:solidFill>
-                <a:latin typeface="PingFang SC" pitchFamily="34" charset="0"/>
-                <a:ea typeface="PingFang SC" pitchFamily="34" charset="-122"/>
-                <a:cs typeface="PingFang SC" pitchFamily="34" charset="-120"/>
-              </a:rPr>
-              <a:t>IOMMU 缺页处理与 SVA 统一地址</a:t>
-            </a:r>
-            <a:endParaRPr lang="en-US" sz="2600" dirty="0"/>
-          </a:p>
-        </p:txBody>
-      </p:sp>
-      <p:sp>
-        <p:nvSpPr>
-          <p:cNvPr id="5" name="Shape 3"/>
-          <p:cNvSpPr/>
-          <p:nvPr/>
-        </p:nvSpPr>
-        <p:spPr>
-          <a:xfrm>
-            <a:off x="8686800" y="393192"/>
-            <a:ext cx="3200400" cy="365760"/>
+              <a:rPr lang="en-US" sz="1300" b="1" dirty="0">
+                <a:solidFill>
+                  <a:srgbClr val="581C87"/>
+                </a:solidFill>
+                <a:latin typeface="PingFang SC" pitchFamily="34" charset="0"/>
+                <a:ea typeface="PingFang SC" pitchFamily="34" charset="-122"/>
+                <a:cs typeface="PingFang SC" pitchFamily="34" charset="-120"/>
+              </a:rPr>
+              <a:t>Coherent Fabric / CMN NoC（AMBA CHI）</a:t>
+            </a:r>
+            <a:endParaRPr lang="en-US" sz="1300" dirty="0"/>
+          </a:p>
+        </p:txBody>
+      </p:sp>
+      <p:sp>
+        <p:nvSpPr>
+          <p:cNvPr id="76" name="Shape 74"/>
+          <p:cNvSpPr/>
+          <p:nvPr/>
+        </p:nvSpPr>
+        <p:spPr>
+          <a:xfrm>
+            <a:off x="411480" y="3218688"/>
+            <a:ext cx="2743200" cy="420624"/>
           </a:xfrm>
           <a:prstGeom prst="roundRect">
             <a:avLst>
-              <a:gd name="adj" fmla="val 50000"/>
+              <a:gd name="adj" fmla="val 13043"/>
             </a:avLst>
           </a:prstGeom>
           <a:solidFill>
             <a:srgbClr val="FFFFFF"/>
           </a:solidFill>
-          <a:ln w="12700">
+          <a:ln w="15875">
             <a:solidFill>
               <a:srgbClr val="7C3AED"/>
             </a:solidFill>
@@ -4167,202 +7433,692 @@
       </p:sp>
       <p:sp>
         <p:nvSpPr>
-          <p:cNvPr id="6" name="Text 4"/>
-          <p:cNvSpPr/>
-          <p:nvPr/>
-        </p:nvSpPr>
-        <p:spPr>
-          <a:xfrm>
-            <a:off x="8778240" y="393192"/>
-            <a:ext cx="3017520" cy="365760"/>
-          </a:xfrm>
-          <a:prstGeom prst="rect">
-            <a:avLst/>
-          </a:prstGeom>
-          <a:noFill/>
-          <a:ln/>
-        </p:spPr>
-        <p:txBody>
-          <a:bodyPr wrap="square" lIns="0" tIns="0" rIns="0" bIns="0" rtlCol="0" anchor="ctr"/>
-          <a:lstStyle/>
-          <a:p>
-            <a:pPr algn="ctr" indent="0" marL="0">
-              <a:buNone/>
-            </a:pPr>
-            <a:r>
-              <a:rPr lang="en-US" sz="1100" b="1" dirty="0">
-                <a:solidFill>
-                  <a:srgbClr val="7C3AED"/>
-                </a:solidFill>
-                <a:latin typeface="PingFang SC" pitchFamily="34" charset="0"/>
-                <a:ea typeface="PingFang SC" pitchFamily="34" charset="-122"/>
-                <a:cs typeface="PingFang SC" pitchFamily="34" charset="-120"/>
-              </a:rPr>
-              <a:t>模块：IOMMU / SMMU v3</a:t>
-            </a:r>
-            <a:endParaRPr lang="en-US" sz="1100" dirty="0"/>
-          </a:p>
-        </p:txBody>
-      </p:sp>
-      <p:sp>
-        <p:nvSpPr>
-          <p:cNvPr id="7" name="Shape 5"/>
-          <p:cNvSpPr/>
-          <p:nvPr/>
-        </p:nvSpPr>
-        <p:spPr>
-          <a:xfrm>
-            <a:off x="548640" y="1097280"/>
-            <a:ext cx="5303520" cy="2377440"/>
-          </a:xfrm>
-          <a:prstGeom prst="roundRect">
-            <a:avLst>
-              <a:gd name="adj" fmla="val 5769"/>
-            </a:avLst>
+          <p:cNvPr id="77" name="Text 75"/>
+          <p:cNvSpPr/>
+          <p:nvPr/>
+        </p:nvSpPr>
+        <p:spPr>
+          <a:xfrm>
+            <a:off x="484632" y="3246120"/>
+            <a:ext cx="2359152" cy="182880"/>
+          </a:xfrm>
+          <a:prstGeom prst="rect">
+            <a:avLst/>
+          </a:prstGeom>
+          <a:noFill/>
+          <a:ln/>
+        </p:spPr>
+        <p:txBody>
+          <a:bodyPr wrap="square" lIns="0" tIns="0" rIns="0" bIns="0" rtlCol="0" anchor="ctr"/>
+          <a:lstStyle/>
+          <a:p>
+            <a:pPr indent="0" marL="0">
+              <a:buNone/>
+            </a:pPr>
+            <a:r>
+              <a:rPr lang="en-US" sz="950" b="1" dirty="0">
+                <a:solidFill>
+                  <a:srgbClr val="581C87"/>
+                </a:solidFill>
+                <a:latin typeface="PingFang SC" pitchFamily="34" charset="0"/>
+                <a:ea typeface="PingFang SC" pitchFamily="34" charset="-122"/>
+                <a:cs typeface="PingFang SC" pitchFamily="34" charset="-120"/>
+              </a:rPr>
+              <a:t>LLC + 目录 / Snoop Filter</a:t>
+            </a:r>
+            <a:endParaRPr lang="en-US" sz="950" dirty="0"/>
+          </a:p>
+        </p:txBody>
+      </p:sp>
+      <p:sp>
+        <p:nvSpPr>
+          <p:cNvPr id="78" name="Text 76"/>
+          <p:cNvSpPr/>
+          <p:nvPr/>
+        </p:nvSpPr>
+        <p:spPr>
+          <a:xfrm>
+            <a:off x="484632" y="3429000"/>
+            <a:ext cx="2596896" cy="164592"/>
+          </a:xfrm>
+          <a:prstGeom prst="rect">
+            <a:avLst/>
+          </a:prstGeom>
+          <a:noFill/>
+          <a:ln/>
+        </p:spPr>
+        <p:txBody>
+          <a:bodyPr wrap="square" lIns="0" tIns="0" rIns="0" bIns="0" rtlCol="0" anchor="ctr"/>
+          <a:lstStyle/>
+          <a:p>
+            <a:pPr indent="0" marL="0">
+              <a:buNone/>
+            </a:pPr>
+            <a:r>
+              <a:rPr lang="en-US" sz="800" dirty="0">
+                <a:solidFill>
+                  <a:srgbClr val="334155"/>
+                </a:solidFill>
+                <a:latin typeface="PingFang SC" pitchFamily="34" charset="0"/>
+                <a:ea typeface="PingFang SC" pitchFamily="34" charset="-122"/>
+                <a:cs typeface="PingFang SC" pitchFamily="34" charset="-120"/>
+              </a:rPr>
+              <a:t>64B 行 · MESI 追踪 · 形式验证</a:t>
+            </a:r>
+            <a:endParaRPr lang="en-US" sz="800" dirty="0"/>
+          </a:p>
+        </p:txBody>
+      </p:sp>
+      <p:sp>
+        <p:nvSpPr>
+          <p:cNvPr id="79" name="Shape 77"/>
+          <p:cNvSpPr/>
+          <p:nvPr/>
+        </p:nvSpPr>
+        <p:spPr>
+          <a:xfrm>
+            <a:off x="2871216" y="3218688"/>
+            <a:ext cx="237744" cy="237744"/>
+          </a:xfrm>
+          <a:prstGeom prst="ellipse">
+            <a:avLst/>
           </a:prstGeom>
           <a:solidFill>
-            <a:srgbClr val="FEF2F2"/>
+            <a:srgbClr val="0F172A"/>
           </a:solidFill>
           <a:ln w="12700">
             <a:solidFill>
-              <a:srgbClr val="DC2626"/>
+              <a:srgbClr val="333333"/>
             </a:solidFill>
             <a:prstDash val="solid"/>
           </a:ln>
-          <a:effectLst>
-            <a:outerShdw sx="100000" sy="100000" kx="0" ky="0" algn="bl" rotWithShape="0" blurRad="101600" dist="38100" dir="5400000">
-              <a:srgbClr val="000000">
-                <a:alpha val="12000"/>
-              </a:srgbClr>
-            </a:outerShdw>
-          </a:effectLst>
-        </p:spPr>
-      </p:sp>
-      <p:sp>
-        <p:nvSpPr>
-          <p:cNvPr id="8" name="Text 6"/>
-          <p:cNvSpPr/>
-          <p:nvPr/>
-        </p:nvSpPr>
-        <p:spPr>
-          <a:xfrm>
-            <a:off x="777240" y="1234440"/>
-            <a:ext cx="4846320" cy="402336"/>
-          </a:xfrm>
-          <a:prstGeom prst="rect">
-            <a:avLst/>
-          </a:prstGeom>
-          <a:noFill/>
-          <a:ln/>
-        </p:spPr>
-        <p:txBody>
-          <a:bodyPr wrap="square" lIns="0" tIns="0" rIns="0" bIns="0" rtlCol="0" anchor="ctr"/>
-          <a:lstStyle/>
-          <a:p>
-            <a:pPr indent="0" marL="0">
-              <a:buNone/>
-            </a:pPr>
-            <a:r>
-              <a:rPr lang="en-US" sz="1800" b="1" dirty="0">
-                <a:solidFill>
-                  <a:srgbClr val="DC2626"/>
-                </a:solidFill>
-                <a:latin typeface="PingFang SC" pitchFamily="34" charset="0"/>
-                <a:ea typeface="PingFang SC" pitchFamily="34" charset="-122"/>
-                <a:cs typeface="PingFang SC" pitchFamily="34" charset="-120"/>
-              </a:rPr>
-              <a:t>面临的问题</a:t>
-            </a:r>
-            <a:endParaRPr lang="en-US" sz="1800" dirty="0"/>
-          </a:p>
-        </p:txBody>
-      </p:sp>
-      <p:sp>
-        <p:nvSpPr>
-          <p:cNvPr id="9" name="Text 7"/>
-          <p:cNvSpPr/>
-          <p:nvPr/>
-        </p:nvSpPr>
-        <p:spPr>
-          <a:xfrm>
-            <a:off x="777240" y="1691640"/>
-            <a:ext cx="4846320" cy="1645920"/>
-          </a:xfrm>
-          <a:prstGeom prst="rect">
-            <a:avLst/>
-          </a:prstGeom>
-          <a:noFill/>
-          <a:ln/>
-        </p:spPr>
-        <p:txBody>
-          <a:bodyPr wrap="square" lIns="0" tIns="0" rIns="0" bIns="0" rtlCol="0" anchor="t"/>
-          <a:lstStyle/>
-          <a:p>
-            <a:pPr indent="0" marL="0">
-              <a:lnSpc>
-                <a:spcPct val="130000"/>
-              </a:lnSpc>
-              <a:buNone/>
-            </a:pPr>
-            <a:r>
-              <a:rPr lang="en-US" sz="1500" dirty="0">
-                <a:solidFill>
-                  <a:srgbClr val="334155"/>
-                </a:solidFill>
-                <a:latin typeface="PingFang SC" pitchFamily="34" charset="0"/>
-                <a:ea typeface="PingFang SC" pitchFamily="34" charset="-122"/>
-                <a:cs typeface="PingFang SC" pitchFamily="34" charset="-120"/>
-              </a:rPr>
-              <a:t>传统 DMA 全程锁定设备缓冲区——单 GPU/NPU 锁住 2–6 GB 物理页，严重压缩可用内存；bounce buffer 显式拷贝使带宽翻倍浪费。</a:t>
-            </a:r>
-            <a:endParaRPr lang="en-US" sz="1500" dirty="0"/>
-          </a:p>
-        </p:txBody>
-      </p:sp>
-      <p:sp>
-        <p:nvSpPr>
-          <p:cNvPr id="10" name="Shape 8"/>
-          <p:cNvSpPr/>
-          <p:nvPr/>
-        </p:nvSpPr>
-        <p:spPr>
-          <a:xfrm>
-            <a:off x="6126480" y="1097280"/>
-            <a:ext cx="5486400" cy="2377440"/>
+        </p:spPr>
+      </p:sp>
+      <p:sp>
+        <p:nvSpPr>
+          <p:cNvPr id="80" name="Text 78"/>
+          <p:cNvSpPr/>
+          <p:nvPr/>
+        </p:nvSpPr>
+        <p:spPr>
+          <a:xfrm>
+            <a:off x="2871216" y="3218688"/>
+            <a:ext cx="237744" cy="237744"/>
+          </a:xfrm>
+          <a:prstGeom prst="rect">
+            <a:avLst/>
+          </a:prstGeom>
+          <a:noFill/>
+          <a:ln/>
+        </p:spPr>
+        <p:txBody>
+          <a:bodyPr wrap="square" lIns="0" tIns="0" rIns="0" bIns="0" rtlCol="0" anchor="ctr"/>
+          <a:lstStyle/>
+          <a:p>
+            <a:pPr algn="ctr" indent="0" marL="0">
+              <a:buNone/>
+            </a:pPr>
+            <a:r>
+              <a:rPr lang="en-US" sz="1100" b="1" dirty="0">
+                <a:solidFill>
+                  <a:srgbClr val="FFFFFF"/>
+                </a:solidFill>
+                <a:latin typeface="PingFang SC" pitchFamily="34" charset="0"/>
+                <a:ea typeface="PingFang SC" pitchFamily="34" charset="-122"/>
+                <a:cs typeface="PingFang SC" pitchFamily="34" charset="-120"/>
+              </a:rPr>
+              <a:t>5</a:t>
+            </a:r>
+            <a:endParaRPr lang="en-US" sz="1100" dirty="0"/>
+          </a:p>
+        </p:txBody>
+      </p:sp>
+      <p:sp>
+        <p:nvSpPr>
+          <p:cNvPr id="81" name="Shape 79"/>
+          <p:cNvSpPr/>
+          <p:nvPr/>
+        </p:nvSpPr>
+        <p:spPr>
+          <a:xfrm>
+            <a:off x="3264408" y="3218688"/>
+            <a:ext cx="2743200" cy="420624"/>
           </a:xfrm>
           <a:prstGeom prst="roundRect">
             <a:avLst>
-              <a:gd name="adj" fmla="val 5769"/>
+              <a:gd name="adj" fmla="val 13043"/>
             </a:avLst>
           </a:prstGeom>
           <a:solidFill>
-            <a:srgbClr val="F0FDF4"/>
+            <a:srgbClr val="FFFFFF"/>
+          </a:solidFill>
+          <a:ln w="15875">
+            <a:solidFill>
+              <a:srgbClr val="7C3AED"/>
+            </a:solidFill>
+            <a:prstDash val="solid"/>
+          </a:ln>
+        </p:spPr>
+      </p:sp>
+      <p:sp>
+        <p:nvSpPr>
+          <p:cNvPr id="82" name="Text 80"/>
+          <p:cNvSpPr/>
+          <p:nvPr/>
+        </p:nvSpPr>
+        <p:spPr>
+          <a:xfrm>
+            <a:off x="3337560" y="3246120"/>
+            <a:ext cx="2359152" cy="182880"/>
+          </a:xfrm>
+          <a:prstGeom prst="rect">
+            <a:avLst/>
+          </a:prstGeom>
+          <a:noFill/>
+          <a:ln/>
+        </p:spPr>
+        <p:txBody>
+          <a:bodyPr wrap="square" lIns="0" tIns="0" rIns="0" bIns="0" rtlCol="0" anchor="ctr"/>
+          <a:lstStyle/>
+          <a:p>
+            <a:pPr indent="0" marL="0">
+              <a:buNone/>
+            </a:pPr>
+            <a:r>
+              <a:rPr lang="en-US" sz="950" b="1" dirty="0">
+                <a:solidFill>
+                  <a:srgbClr val="581C87"/>
+                </a:solidFill>
+                <a:latin typeface="PingFang SC" pitchFamily="34" charset="0"/>
+                <a:ea typeface="PingFang SC" pitchFamily="34" charset="-122"/>
+                <a:cs typeface="PingFang SC" pitchFamily="34" charset="-120"/>
+              </a:rPr>
+              <a:t>FCS 细粒度一致性特化</a:t>
+            </a:r>
+            <a:endParaRPr lang="en-US" sz="950" dirty="0"/>
+          </a:p>
+        </p:txBody>
+      </p:sp>
+      <p:sp>
+        <p:nvSpPr>
+          <p:cNvPr id="83" name="Text 81"/>
+          <p:cNvSpPr/>
+          <p:nvPr/>
+        </p:nvSpPr>
+        <p:spPr>
+          <a:xfrm>
+            <a:off x="3337560" y="3429000"/>
+            <a:ext cx="2596896" cy="164592"/>
+          </a:xfrm>
+          <a:prstGeom prst="rect">
+            <a:avLst/>
+          </a:prstGeom>
+          <a:noFill/>
+          <a:ln/>
+        </p:spPr>
+        <p:txBody>
+          <a:bodyPr wrap="square" lIns="0" tIns="0" rIns="0" bIns="0" rtlCol="0" anchor="ctr"/>
+          <a:lstStyle/>
+          <a:p>
+            <a:pPr indent="0" marL="0">
+              <a:buNone/>
+            </a:pPr>
+            <a:r>
+              <a:rPr lang="en-US" sz="800" dirty="0">
+                <a:solidFill>
+                  <a:srgbClr val="334155"/>
+                </a:solidFill>
+                <a:latin typeface="PingFang SC" pitchFamily="34" charset="0"/>
+                <a:ea typeface="PingFang SC" pitchFamily="34" charset="-122"/>
+                <a:cs typeface="PingFang SC" pitchFamily="34" charset="-120"/>
+              </a:rPr>
+              <a:t>每请求选 ReqV/ReqO/Req2/ReqS</a:t>
+            </a:r>
+            <a:endParaRPr lang="en-US" sz="800" dirty="0"/>
+          </a:p>
+        </p:txBody>
+      </p:sp>
+      <p:sp>
+        <p:nvSpPr>
+          <p:cNvPr id="84" name="Shape 82"/>
+          <p:cNvSpPr/>
+          <p:nvPr/>
+        </p:nvSpPr>
+        <p:spPr>
+          <a:xfrm>
+            <a:off x="5724144" y="3218688"/>
+            <a:ext cx="237744" cy="237744"/>
+          </a:xfrm>
+          <a:prstGeom prst="ellipse">
+            <a:avLst/>
+          </a:prstGeom>
+          <a:solidFill>
+            <a:srgbClr val="0F172A"/>
           </a:solidFill>
           <a:ln w="12700">
+            <a:solidFill>
+              <a:srgbClr val="333333"/>
+            </a:solidFill>
+            <a:prstDash val="solid"/>
+          </a:ln>
+        </p:spPr>
+      </p:sp>
+      <p:sp>
+        <p:nvSpPr>
+          <p:cNvPr id="85" name="Text 83"/>
+          <p:cNvSpPr/>
+          <p:nvPr/>
+        </p:nvSpPr>
+        <p:spPr>
+          <a:xfrm>
+            <a:off x="5724144" y="3218688"/>
+            <a:ext cx="237744" cy="237744"/>
+          </a:xfrm>
+          <a:prstGeom prst="rect">
+            <a:avLst/>
+          </a:prstGeom>
+          <a:noFill/>
+          <a:ln/>
+        </p:spPr>
+        <p:txBody>
+          <a:bodyPr wrap="square" lIns="0" tIns="0" rIns="0" bIns="0" rtlCol="0" anchor="ctr"/>
+          <a:lstStyle/>
+          <a:p>
+            <a:pPr algn="ctr" indent="0" marL="0">
+              <a:buNone/>
+            </a:pPr>
+            <a:r>
+              <a:rPr lang="en-US" sz="1100" b="1" dirty="0">
+                <a:solidFill>
+                  <a:srgbClr val="FFFFFF"/>
+                </a:solidFill>
+                <a:latin typeface="PingFang SC" pitchFamily="34" charset="0"/>
+                <a:ea typeface="PingFang SC" pitchFamily="34" charset="-122"/>
+                <a:cs typeface="PingFang SC" pitchFamily="34" charset="-120"/>
+              </a:rPr>
+              <a:t>6</a:t>
+            </a:r>
+            <a:endParaRPr lang="en-US" sz="1100" dirty="0"/>
+          </a:p>
+        </p:txBody>
+      </p:sp>
+      <p:sp>
+        <p:nvSpPr>
+          <p:cNvPr id="86" name="Shape 84"/>
+          <p:cNvSpPr/>
+          <p:nvPr/>
+        </p:nvSpPr>
+        <p:spPr>
+          <a:xfrm>
+            <a:off x="6117336" y="3218688"/>
+            <a:ext cx="2743200" cy="420624"/>
+          </a:xfrm>
+          <a:prstGeom prst="roundRect">
+            <a:avLst>
+              <a:gd name="adj" fmla="val 13043"/>
+            </a:avLst>
+          </a:prstGeom>
+          <a:solidFill>
+            <a:srgbClr val="FFFFFF"/>
+          </a:solidFill>
+          <a:ln w="15875">
+            <a:solidFill>
+              <a:srgbClr val="7C3AED"/>
+            </a:solidFill>
+            <a:prstDash val="dash"/>
+          </a:ln>
+        </p:spPr>
+      </p:sp>
+      <p:sp>
+        <p:nvSpPr>
+          <p:cNvPr id="87" name="Text 85"/>
+          <p:cNvSpPr/>
+          <p:nvPr/>
+        </p:nvSpPr>
+        <p:spPr>
+          <a:xfrm>
+            <a:off x="6190488" y="3246120"/>
+            <a:ext cx="2359152" cy="182880"/>
+          </a:xfrm>
+          <a:prstGeom prst="rect">
+            <a:avLst/>
+          </a:prstGeom>
+          <a:noFill/>
+          <a:ln/>
+        </p:spPr>
+        <p:txBody>
+          <a:bodyPr wrap="square" lIns="0" tIns="0" rIns="0" bIns="0" rtlCol="0" anchor="ctr"/>
+          <a:lstStyle/>
+          <a:p>
+            <a:pPr indent="0" marL="0">
+              <a:buNone/>
+            </a:pPr>
+            <a:r>
+              <a:rPr lang="en-US" sz="950" b="1" dirty="0">
+                <a:solidFill>
+                  <a:srgbClr val="581C87"/>
+                </a:solidFill>
+                <a:latin typeface="PingFang SC" pitchFamily="34" charset="0"/>
+                <a:ea typeface="PingFang SC" pitchFamily="34" charset="-122"/>
+                <a:cs typeface="PingFang SC" pitchFamily="34" charset="-120"/>
+              </a:rPr>
+              <a:t>CHI C2C 跨芯粒一致性端口</a:t>
+            </a:r>
+            <a:endParaRPr lang="en-US" sz="950" dirty="0"/>
+          </a:p>
+        </p:txBody>
+      </p:sp>
+      <p:sp>
+        <p:nvSpPr>
+          <p:cNvPr id="88" name="Text 86"/>
+          <p:cNvSpPr/>
+          <p:nvPr/>
+        </p:nvSpPr>
+        <p:spPr>
+          <a:xfrm>
+            <a:off x="6190488" y="3429000"/>
+            <a:ext cx="2596896" cy="164592"/>
+          </a:xfrm>
+          <a:prstGeom prst="rect">
+            <a:avLst/>
+          </a:prstGeom>
+          <a:noFill/>
+          <a:ln/>
+        </p:spPr>
+        <p:txBody>
+          <a:bodyPr wrap="square" lIns="0" tIns="0" rIns="0" bIns="0" rtlCol="0" anchor="ctr"/>
+          <a:lstStyle/>
+          <a:p>
+            <a:pPr indent="0" marL="0">
+              <a:buNone/>
+            </a:pPr>
+            <a:r>
+              <a:rPr lang="en-US" sz="800" dirty="0">
+                <a:solidFill>
+                  <a:srgbClr val="334155"/>
+                </a:solidFill>
+                <a:latin typeface="PingFang SC" pitchFamily="34" charset="0"/>
+                <a:ea typeface="PingFang SC" pitchFamily="34" charset="-122"/>
+                <a:cs typeface="PingFang SC" pitchFamily="34" charset="-120"/>
+              </a:rPr>
+              <a:t>UCIe 物理层 · Realm · ~20 ns</a:t>
+            </a:r>
+            <a:endParaRPr lang="en-US" sz="800" dirty="0"/>
+          </a:p>
+        </p:txBody>
+      </p:sp>
+      <p:sp>
+        <p:nvSpPr>
+          <p:cNvPr id="89" name="Shape 87"/>
+          <p:cNvSpPr/>
+          <p:nvPr/>
+        </p:nvSpPr>
+        <p:spPr>
+          <a:xfrm>
+            <a:off x="8577072" y="3218688"/>
+            <a:ext cx="237744" cy="237744"/>
+          </a:xfrm>
+          <a:prstGeom prst="ellipse">
+            <a:avLst/>
+          </a:prstGeom>
+          <a:solidFill>
+            <a:srgbClr val="0F172A"/>
+          </a:solidFill>
+          <a:ln w="12700">
+            <a:solidFill>
+              <a:srgbClr val="333333"/>
+            </a:solidFill>
+            <a:prstDash val="solid"/>
+          </a:ln>
+        </p:spPr>
+      </p:sp>
+      <p:sp>
+        <p:nvSpPr>
+          <p:cNvPr id="90" name="Text 88"/>
+          <p:cNvSpPr/>
+          <p:nvPr/>
+        </p:nvSpPr>
+        <p:spPr>
+          <a:xfrm>
+            <a:off x="8577072" y="3218688"/>
+            <a:ext cx="237744" cy="237744"/>
+          </a:xfrm>
+          <a:prstGeom prst="rect">
+            <a:avLst/>
+          </a:prstGeom>
+          <a:noFill/>
+          <a:ln/>
+        </p:spPr>
+        <p:txBody>
+          <a:bodyPr wrap="square" lIns="0" tIns="0" rIns="0" bIns="0" rtlCol="0" anchor="ctr"/>
+          <a:lstStyle/>
+          <a:p>
+            <a:pPr algn="ctr" indent="0" marL="0">
+              <a:buNone/>
+            </a:pPr>
+            <a:r>
+              <a:rPr lang="en-US" sz="1100" b="1" dirty="0">
+                <a:solidFill>
+                  <a:srgbClr val="FFFFFF"/>
+                </a:solidFill>
+                <a:latin typeface="PingFang SC" pitchFamily="34" charset="0"/>
+                <a:ea typeface="PingFang SC" pitchFamily="34" charset="-122"/>
+                <a:cs typeface="PingFang SC" pitchFamily="34" charset="-120"/>
+              </a:rPr>
+              <a:t>4</a:t>
+            </a:r>
+            <a:endParaRPr lang="en-US" sz="1100" dirty="0"/>
+          </a:p>
+        </p:txBody>
+      </p:sp>
+      <p:sp>
+        <p:nvSpPr>
+          <p:cNvPr id="91" name="Shape 89"/>
+          <p:cNvSpPr/>
+          <p:nvPr/>
+        </p:nvSpPr>
+        <p:spPr>
+          <a:xfrm>
+            <a:off x="8970264" y="3218688"/>
+            <a:ext cx="2743200" cy="420624"/>
+          </a:xfrm>
+          <a:prstGeom prst="roundRect">
+            <a:avLst>
+              <a:gd name="adj" fmla="val 13043"/>
+            </a:avLst>
+          </a:prstGeom>
+          <a:solidFill>
+            <a:srgbClr val="FFFFFF"/>
+          </a:solidFill>
+          <a:ln w="15875">
+            <a:solidFill>
+              <a:srgbClr val="7C3AED"/>
+            </a:solidFill>
+            <a:prstDash val="solid"/>
+          </a:ln>
+        </p:spPr>
+      </p:sp>
+      <p:sp>
+        <p:nvSpPr>
+          <p:cNvPr id="92" name="Text 90"/>
+          <p:cNvSpPr/>
+          <p:nvPr/>
+        </p:nvSpPr>
+        <p:spPr>
+          <a:xfrm>
+            <a:off x="9043416" y="3246120"/>
+            <a:ext cx="2359152" cy="182880"/>
+          </a:xfrm>
+          <a:prstGeom prst="rect">
+            <a:avLst/>
+          </a:prstGeom>
+          <a:noFill/>
+          <a:ln/>
+        </p:spPr>
+        <p:txBody>
+          <a:bodyPr wrap="square" lIns="0" tIns="0" rIns="0" bIns="0" rtlCol="0" anchor="ctr"/>
+          <a:lstStyle/>
+          <a:p>
+            <a:pPr indent="0" marL="0">
+              <a:buNone/>
+            </a:pPr>
+            <a:r>
+              <a:rPr lang="en-US" sz="950" b="1" dirty="0">
+                <a:solidFill>
+                  <a:srgbClr val="581C87"/>
+                </a:solidFill>
+                <a:latin typeface="PingFang SC" pitchFamily="34" charset="0"/>
+                <a:ea typeface="PingFang SC" pitchFamily="34" charset="-122"/>
+                <a:cs typeface="PingFang SC" pitchFamily="34" charset="-120"/>
+              </a:rPr>
+              <a:t>I/O 一致性端口</a:t>
+            </a:r>
+            <a:endParaRPr lang="en-US" sz="950" dirty="0"/>
+          </a:p>
+        </p:txBody>
+      </p:sp>
+      <p:sp>
+        <p:nvSpPr>
+          <p:cNvPr id="93" name="Text 91"/>
+          <p:cNvSpPr/>
+          <p:nvPr/>
+        </p:nvSpPr>
+        <p:spPr>
+          <a:xfrm>
+            <a:off x="9043416" y="3429000"/>
+            <a:ext cx="2596896" cy="164592"/>
+          </a:xfrm>
+          <a:prstGeom prst="rect">
+            <a:avLst/>
+          </a:prstGeom>
+          <a:noFill/>
+          <a:ln/>
+        </p:spPr>
+        <p:txBody>
+          <a:bodyPr wrap="square" lIns="0" tIns="0" rIns="0" bIns="0" rtlCol="0" anchor="ctr"/>
+          <a:lstStyle/>
+          <a:p>
+            <a:pPr indent="0" marL="0">
+              <a:buNone/>
+            </a:pPr>
+            <a:r>
+              <a:rPr lang="en-US" sz="800" dirty="0">
+                <a:solidFill>
+                  <a:srgbClr val="334155"/>
+                </a:solidFill>
+                <a:latin typeface="PingFang SC" pitchFamily="34" charset="0"/>
+                <a:ea typeface="PingFang SC" pitchFamily="34" charset="-122"/>
+                <a:cs typeface="PingFang SC" pitchFamily="34" charset="-120"/>
+              </a:rPr>
+              <a:t>IOMMU · 外设 DMA · 加速器接入</a:t>
+            </a:r>
+            <a:endParaRPr lang="en-US" sz="800" dirty="0"/>
+          </a:p>
+        </p:txBody>
+      </p:sp>
+      <p:sp>
+        <p:nvSpPr>
+          <p:cNvPr id="94" name="Shape 92"/>
+          <p:cNvSpPr/>
+          <p:nvPr/>
+        </p:nvSpPr>
+        <p:spPr>
+          <a:xfrm>
+            <a:off x="1005840" y="3913632"/>
+            <a:ext cx="10177272" cy="365760"/>
+          </a:xfrm>
+          <a:prstGeom prst="roundRect">
+            <a:avLst>
+              <a:gd name="adj" fmla="val 15000"/>
+            </a:avLst>
+          </a:prstGeom>
+          <a:solidFill>
+            <a:srgbClr val="E0E7FF"/>
+          </a:solidFill>
+          <a:ln w="15875">
+            <a:solidFill>
+              <a:srgbClr val="4F46E5"/>
+            </a:solidFill>
+            <a:prstDash val="solid"/>
+          </a:ln>
+        </p:spPr>
+      </p:sp>
+      <p:sp>
+        <p:nvSpPr>
+          <p:cNvPr id="95" name="Text 93"/>
+          <p:cNvSpPr/>
+          <p:nvPr/>
+        </p:nvSpPr>
+        <p:spPr>
+          <a:xfrm>
+            <a:off x="1005840" y="3913632"/>
+            <a:ext cx="10177272" cy="365760"/>
+          </a:xfrm>
+          <a:prstGeom prst="rect">
+            <a:avLst/>
+          </a:prstGeom>
+          <a:noFill/>
+          <a:ln/>
+        </p:spPr>
+        <p:txBody>
+          <a:bodyPr wrap="square" lIns="0" tIns="0" rIns="0" bIns="0" rtlCol="0" anchor="ctr"/>
+          <a:lstStyle/>
+          <a:p>
+            <a:pPr algn="ctr" indent="0" marL="0">
+              <a:buNone/>
+            </a:pPr>
+            <a:r>
+              <a:rPr lang="en-US" sz="1300" b="1" dirty="0">
+                <a:solidFill>
+                  <a:srgbClr val="312E81"/>
+                </a:solidFill>
+                <a:latin typeface="PingFang SC" pitchFamily="34" charset="0"/>
+                <a:ea typeface="PingFang SC" pitchFamily="34" charset="-122"/>
+                <a:cs typeface="PingFang SC" pitchFamily="34" charset="-120"/>
+              </a:rPr>
+              <a:t>System Level Cache（SLC）· 8–32 MB · CPU / GPU / NPU / ISP / Media 全 IP 共享</a:t>
+            </a:r>
+            <a:endParaRPr lang="en-US" sz="1300" dirty="0"/>
+          </a:p>
+        </p:txBody>
+      </p:sp>
+      <p:sp>
+        <p:nvSpPr>
+          <p:cNvPr id="96" name="Shape 94"/>
+          <p:cNvSpPr/>
+          <p:nvPr/>
+        </p:nvSpPr>
+        <p:spPr>
+          <a:xfrm>
+            <a:off x="274320" y="4535424"/>
+            <a:ext cx="11640312" cy="621792"/>
+          </a:xfrm>
+          <a:prstGeom prst="roundRect">
+            <a:avLst>
+              <a:gd name="adj" fmla="val 8824"/>
+            </a:avLst>
+          </a:prstGeom>
+          <a:solidFill>
+            <a:srgbClr val="DCFCE7"/>
+          </a:solidFill>
+          <a:ln w="15875">
             <a:solidFill>
               <a:srgbClr val="16A34A"/>
             </a:solidFill>
             <a:prstDash val="solid"/>
           </a:ln>
-          <a:effectLst>
-            <a:outerShdw sx="100000" sy="100000" kx="0" ky="0" algn="bl" rotWithShape="0" blurRad="101600" dist="38100" dir="5400000">
-              <a:srgbClr val="000000">
-                <a:alpha val="12000"/>
-              </a:srgbClr>
-            </a:outerShdw>
-          </a:effectLst>
-        </p:spPr>
-      </p:sp>
-      <p:sp>
-        <p:nvSpPr>
-          <p:cNvPr id="11" name="Text 9"/>
-          <p:cNvSpPr/>
-          <p:nvPr/>
-        </p:nvSpPr>
-        <p:spPr>
-          <a:xfrm>
-            <a:off x="6355080" y="1234440"/>
-            <a:ext cx="5029200" cy="402336"/>
+        </p:spPr>
+      </p:sp>
+      <p:sp>
+        <p:nvSpPr>
+          <p:cNvPr id="97" name="Text 95"/>
+          <p:cNvSpPr/>
+          <p:nvPr/>
+        </p:nvSpPr>
+        <p:spPr>
+          <a:xfrm>
+            <a:off x="411480" y="4572000"/>
+            <a:ext cx="1828800" cy="201168"/>
           </a:xfrm>
           <a:prstGeom prst="rect">
             <a:avLst/>
@@ -4378,84 +8134,448 @@
               <a:buNone/>
             </a:pPr>
             <a:r>
-              <a:rPr lang="en-US" sz="1800" b="1" dirty="0">
-                <a:solidFill>
-                  <a:srgbClr val="16A34A"/>
-                </a:solidFill>
-                <a:latin typeface="PingFang SC" pitchFamily="34" charset="0"/>
-                <a:ea typeface="PingFang SC" pitchFamily="34" charset="-122"/>
-                <a:cs typeface="PingFang SC" pitchFamily="34" charset="-120"/>
-              </a:rPr>
-              <a:t>我们的洞察怎么解</a:t>
-            </a:r>
-            <a:endParaRPr lang="en-US" sz="1800" dirty="0"/>
-          </a:p>
-        </p:txBody>
-      </p:sp>
-      <p:sp>
-        <p:nvSpPr>
-          <p:cNvPr id="12" name="Text 10"/>
-          <p:cNvSpPr/>
-          <p:nvPr/>
-        </p:nvSpPr>
-        <p:spPr>
-          <a:xfrm>
-            <a:off x="6355080" y="1691640"/>
-            <a:ext cx="5029200" cy="1645920"/>
-          </a:xfrm>
-          <a:prstGeom prst="rect">
-            <a:avLst/>
-          </a:prstGeom>
-          <a:noFill/>
-          <a:ln/>
-        </p:spPr>
-        <p:txBody>
-          <a:bodyPr wrap="square" lIns="0" tIns="0" rIns="0" bIns="0" rtlCol="0" anchor="t"/>
-          <a:lstStyle/>
-          <a:p>
-            <a:pPr indent="0" marL="0">
-              <a:lnSpc>
-                <a:spcPct val="130000"/>
-              </a:lnSpc>
-              <a:buNone/>
-            </a:pPr>
-            <a:r>
-              <a:rPr lang="en-US" sz="1500" dirty="0">
-                <a:solidFill>
-                  <a:srgbClr val="334155"/>
-                </a:solidFill>
-                <a:latin typeface="PingFang SC" pitchFamily="34" charset="0"/>
-                <a:ea typeface="PingFang SC" pitchFamily="34" charset="-122"/>
-                <a:cs typeface="PingFang SC" pitchFamily="34" charset="-120"/>
-              </a:rPr>
-              <a:t>SMMU v3 引入 stall 模型 + IOPF 框架，配合 ATS/PRI 与 PASID，设备共享进程虚拟地址、按需调页，彻底消除锁页与 bounce buffer。</a:t>
-            </a:r>
-            <a:endParaRPr lang="en-US" sz="1500" dirty="0"/>
-          </a:p>
-        </p:txBody>
-      </p:sp>
-      <p:sp>
-        <p:nvSpPr>
-          <p:cNvPr id="13" name="Shape 11"/>
-          <p:cNvSpPr/>
-          <p:nvPr/>
-        </p:nvSpPr>
-        <p:spPr>
-          <a:xfrm>
-            <a:off x="548640" y="3749040"/>
-            <a:ext cx="11064240" cy="548640"/>
+              <a:rPr lang="en-US" sz="1200" b="1" dirty="0">
+                <a:solidFill>
+                  <a:srgbClr val="14532D"/>
+                </a:solidFill>
+                <a:latin typeface="PingFang SC" pitchFamily="34" charset="0"/>
+                <a:ea typeface="PingFang SC" pitchFamily="34" charset="-122"/>
+                <a:cs typeface="PingFang SC" pitchFamily="34" charset="-120"/>
+              </a:rPr>
+              <a:t>内存控制器</a:t>
+            </a:r>
+            <a:endParaRPr lang="en-US" sz="1200" dirty="0"/>
+          </a:p>
+        </p:txBody>
+      </p:sp>
+      <p:sp>
+        <p:nvSpPr>
+          <p:cNvPr id="98" name="Shape 96"/>
+          <p:cNvSpPr/>
+          <p:nvPr/>
+        </p:nvSpPr>
+        <p:spPr>
+          <a:xfrm>
+            <a:off x="411480" y="4809744"/>
+            <a:ext cx="777240" cy="274320"/>
           </a:xfrm>
           <a:prstGeom prst="roundRect">
             <a:avLst>
-              <a:gd name="adj" fmla="val 16667"/>
+              <a:gd name="adj" fmla="val 10000"/>
             </a:avLst>
           </a:prstGeom>
           <a:solidFill>
-            <a:srgbClr val="F8FAFC"/>
+            <a:srgbClr val="FFFFFF"/>
+          </a:solidFill>
+          <a:ln w="9525">
+            <a:solidFill>
+              <a:srgbClr val="14532D"/>
+            </a:solidFill>
+            <a:prstDash val="solid"/>
+          </a:ln>
+        </p:spPr>
+      </p:sp>
+      <p:sp>
+        <p:nvSpPr>
+          <p:cNvPr id="99" name="Text 97"/>
+          <p:cNvSpPr/>
+          <p:nvPr/>
+        </p:nvSpPr>
+        <p:spPr>
+          <a:xfrm>
+            <a:off x="411480" y="4809744"/>
+            <a:ext cx="777240" cy="274320"/>
+          </a:xfrm>
+          <a:prstGeom prst="rect">
+            <a:avLst/>
+          </a:prstGeom>
+          <a:noFill/>
+          <a:ln/>
+        </p:spPr>
+        <p:txBody>
+          <a:bodyPr wrap="square" lIns="0" tIns="0" rIns="0" bIns="0" rtlCol="0" anchor="ctr"/>
+          <a:lstStyle/>
+          <a:p>
+            <a:pPr algn="ctr" indent="0" marL="0">
+              <a:buNone/>
+            </a:pPr>
+            <a:r>
+              <a:rPr lang="en-US" sz="800" dirty="0">
+                <a:solidFill>
+                  <a:srgbClr val="14532D"/>
+                </a:solidFill>
+                <a:latin typeface="PingFang SC" pitchFamily="34" charset="0"/>
+                <a:ea typeface="PingFang SC" pitchFamily="34" charset="-122"/>
+                <a:cs typeface="PingFang SC" pitchFamily="34" charset="-120"/>
+              </a:rPr>
+              <a:t>MC 0</a:t>
+            </a:r>
+            <a:endParaRPr lang="en-US" sz="800" dirty="0"/>
+          </a:p>
+        </p:txBody>
+      </p:sp>
+      <p:sp>
+        <p:nvSpPr>
+          <p:cNvPr id="100" name="Shape 98"/>
+          <p:cNvSpPr/>
+          <p:nvPr/>
+        </p:nvSpPr>
+        <p:spPr>
+          <a:xfrm>
+            <a:off x="1280160" y="4809744"/>
+            <a:ext cx="777240" cy="274320"/>
+          </a:xfrm>
+          <a:prstGeom prst="roundRect">
+            <a:avLst>
+              <a:gd name="adj" fmla="val 10000"/>
+            </a:avLst>
+          </a:prstGeom>
+          <a:solidFill>
+            <a:srgbClr val="FFFFFF"/>
+          </a:solidFill>
+          <a:ln w="9525">
+            <a:solidFill>
+              <a:srgbClr val="14532D"/>
+            </a:solidFill>
+            <a:prstDash val="solid"/>
+          </a:ln>
+        </p:spPr>
+      </p:sp>
+      <p:sp>
+        <p:nvSpPr>
+          <p:cNvPr id="101" name="Text 99"/>
+          <p:cNvSpPr/>
+          <p:nvPr/>
+        </p:nvSpPr>
+        <p:spPr>
+          <a:xfrm>
+            <a:off x="1280160" y="4809744"/>
+            <a:ext cx="777240" cy="274320"/>
+          </a:xfrm>
+          <a:prstGeom prst="rect">
+            <a:avLst/>
+          </a:prstGeom>
+          <a:noFill/>
+          <a:ln/>
+        </p:spPr>
+        <p:txBody>
+          <a:bodyPr wrap="square" lIns="0" tIns="0" rIns="0" bIns="0" rtlCol="0" anchor="ctr"/>
+          <a:lstStyle/>
+          <a:p>
+            <a:pPr algn="ctr" indent="0" marL="0">
+              <a:buNone/>
+            </a:pPr>
+            <a:r>
+              <a:rPr lang="en-US" sz="800" dirty="0">
+                <a:solidFill>
+                  <a:srgbClr val="14532D"/>
+                </a:solidFill>
+                <a:latin typeface="PingFang SC" pitchFamily="34" charset="0"/>
+                <a:ea typeface="PingFang SC" pitchFamily="34" charset="-122"/>
+                <a:cs typeface="PingFang SC" pitchFamily="34" charset="-120"/>
+              </a:rPr>
+              <a:t>MC 1</a:t>
+            </a:r>
+            <a:endParaRPr lang="en-US" sz="800" dirty="0"/>
+          </a:p>
+        </p:txBody>
+      </p:sp>
+      <p:sp>
+        <p:nvSpPr>
+          <p:cNvPr id="102" name="Shape 100"/>
+          <p:cNvSpPr/>
+          <p:nvPr/>
+        </p:nvSpPr>
+        <p:spPr>
+          <a:xfrm>
+            <a:off x="2148840" y="4809744"/>
+            <a:ext cx="777240" cy="274320"/>
+          </a:xfrm>
+          <a:prstGeom prst="roundRect">
+            <a:avLst>
+              <a:gd name="adj" fmla="val 10000"/>
+            </a:avLst>
+          </a:prstGeom>
+          <a:solidFill>
+            <a:srgbClr val="FFFFFF"/>
+          </a:solidFill>
+          <a:ln w="9525">
+            <a:solidFill>
+              <a:srgbClr val="14532D"/>
+            </a:solidFill>
+            <a:prstDash val="solid"/>
+          </a:ln>
+        </p:spPr>
+      </p:sp>
+      <p:sp>
+        <p:nvSpPr>
+          <p:cNvPr id="103" name="Text 101"/>
+          <p:cNvSpPr/>
+          <p:nvPr/>
+        </p:nvSpPr>
+        <p:spPr>
+          <a:xfrm>
+            <a:off x="2148840" y="4809744"/>
+            <a:ext cx="777240" cy="274320"/>
+          </a:xfrm>
+          <a:prstGeom prst="rect">
+            <a:avLst/>
+          </a:prstGeom>
+          <a:noFill/>
+          <a:ln/>
+        </p:spPr>
+        <p:txBody>
+          <a:bodyPr wrap="square" lIns="0" tIns="0" rIns="0" bIns="0" rtlCol="0" anchor="ctr"/>
+          <a:lstStyle/>
+          <a:p>
+            <a:pPr algn="ctr" indent="0" marL="0">
+              <a:buNone/>
+            </a:pPr>
+            <a:r>
+              <a:rPr lang="en-US" sz="800" dirty="0">
+                <a:solidFill>
+                  <a:srgbClr val="14532D"/>
+                </a:solidFill>
+                <a:latin typeface="PingFang SC" pitchFamily="34" charset="0"/>
+                <a:ea typeface="PingFang SC" pitchFamily="34" charset="-122"/>
+                <a:cs typeface="PingFang SC" pitchFamily="34" charset="-120"/>
+              </a:rPr>
+              <a:t>MC 2</a:t>
+            </a:r>
+            <a:endParaRPr lang="en-US" sz="800" dirty="0"/>
+          </a:p>
+        </p:txBody>
+      </p:sp>
+      <p:sp>
+        <p:nvSpPr>
+          <p:cNvPr id="104" name="Shape 102"/>
+          <p:cNvSpPr/>
+          <p:nvPr/>
+        </p:nvSpPr>
+        <p:spPr>
+          <a:xfrm>
+            <a:off x="3017520" y="4809744"/>
+            <a:ext cx="777240" cy="274320"/>
+          </a:xfrm>
+          <a:prstGeom prst="roundRect">
+            <a:avLst>
+              <a:gd name="adj" fmla="val 10000"/>
+            </a:avLst>
+          </a:prstGeom>
+          <a:solidFill>
+            <a:srgbClr val="FFFFFF"/>
+          </a:solidFill>
+          <a:ln w="9525">
+            <a:solidFill>
+              <a:srgbClr val="14532D"/>
+            </a:solidFill>
+            <a:prstDash val="solid"/>
+          </a:ln>
+        </p:spPr>
+      </p:sp>
+      <p:sp>
+        <p:nvSpPr>
+          <p:cNvPr id="105" name="Text 103"/>
+          <p:cNvSpPr/>
+          <p:nvPr/>
+        </p:nvSpPr>
+        <p:spPr>
+          <a:xfrm>
+            <a:off x="3017520" y="4809744"/>
+            <a:ext cx="777240" cy="274320"/>
+          </a:xfrm>
+          <a:prstGeom prst="rect">
+            <a:avLst/>
+          </a:prstGeom>
+          <a:noFill/>
+          <a:ln/>
+        </p:spPr>
+        <p:txBody>
+          <a:bodyPr wrap="square" lIns="0" tIns="0" rIns="0" bIns="0" rtlCol="0" anchor="ctr"/>
+          <a:lstStyle/>
+          <a:p>
+            <a:pPr algn="ctr" indent="0" marL="0">
+              <a:buNone/>
+            </a:pPr>
+            <a:r>
+              <a:rPr lang="en-US" sz="800" dirty="0">
+                <a:solidFill>
+                  <a:srgbClr val="14532D"/>
+                </a:solidFill>
+                <a:latin typeface="PingFang SC" pitchFamily="34" charset="0"/>
+                <a:ea typeface="PingFang SC" pitchFamily="34" charset="-122"/>
+                <a:cs typeface="PingFang SC" pitchFamily="34" charset="-120"/>
+              </a:rPr>
+              <a:t>MC 3</a:t>
+            </a:r>
+            <a:endParaRPr lang="en-US" sz="800" dirty="0"/>
+          </a:p>
+        </p:txBody>
+      </p:sp>
+      <p:sp>
+        <p:nvSpPr>
+          <p:cNvPr id="106" name="Text 104"/>
+          <p:cNvSpPr/>
+          <p:nvPr/>
+        </p:nvSpPr>
+        <p:spPr>
+          <a:xfrm>
+            <a:off x="3931920" y="4809744"/>
+            <a:ext cx="1463040" cy="274320"/>
+          </a:xfrm>
+          <a:prstGeom prst="rect">
+            <a:avLst/>
+          </a:prstGeom>
+          <a:noFill/>
+          <a:ln/>
+        </p:spPr>
+        <p:txBody>
+          <a:bodyPr wrap="square" lIns="0" tIns="0" rIns="0" bIns="0" rtlCol="0" anchor="ctr"/>
+          <a:lstStyle/>
+          <a:p>
+            <a:pPr indent="0" marL="0">
+              <a:buNone/>
+            </a:pPr>
+            <a:r>
+              <a:rPr lang="en-US" sz="1100" dirty="0">
+                <a:solidFill>
+                  <a:srgbClr val="14532D"/>
+                </a:solidFill>
+                <a:latin typeface="PingFang SC" pitchFamily="34" charset="0"/>
+                <a:ea typeface="PingFang SC" pitchFamily="34" charset="-122"/>
+                <a:cs typeface="PingFang SC" pitchFamily="34" charset="-120"/>
+              </a:rPr>
+              <a:t>⋯（×8 通道）</a:t>
+            </a:r>
+            <a:endParaRPr lang="en-US" sz="1100" dirty="0"/>
+          </a:p>
+        </p:txBody>
+      </p:sp>
+      <p:sp>
+        <p:nvSpPr>
+          <p:cNvPr id="107" name="Shape 105"/>
+          <p:cNvSpPr/>
+          <p:nvPr/>
+        </p:nvSpPr>
+        <p:spPr>
+          <a:xfrm>
+            <a:off x="5989320" y="4617720"/>
+            <a:ext cx="5715000" cy="457200"/>
+          </a:xfrm>
+          <a:prstGeom prst="roundRect">
+            <a:avLst>
+              <a:gd name="adj" fmla="val 12000"/>
+            </a:avLst>
+          </a:prstGeom>
+          <a:solidFill>
+            <a:srgbClr val="FFF7ED"/>
+          </a:solidFill>
+          <a:ln w="15875">
+            <a:solidFill>
+              <a:srgbClr val="EA580C"/>
+            </a:solidFill>
+            <a:prstDash val="solid"/>
+          </a:ln>
+        </p:spPr>
+      </p:sp>
+      <p:sp>
+        <p:nvSpPr>
+          <p:cNvPr id="108" name="Text 106"/>
+          <p:cNvSpPr/>
+          <p:nvPr/>
+        </p:nvSpPr>
+        <p:spPr>
+          <a:xfrm>
+            <a:off x="6108192" y="4636008"/>
+            <a:ext cx="5029200" cy="201168"/>
+          </a:xfrm>
+          <a:prstGeom prst="rect">
+            <a:avLst/>
+          </a:prstGeom>
+          <a:noFill/>
+          <a:ln/>
+        </p:spPr>
+        <p:txBody>
+          <a:bodyPr wrap="square" lIns="0" tIns="0" rIns="0" bIns="0" rtlCol="0" anchor="ctr"/>
+          <a:lstStyle/>
+          <a:p>
+            <a:pPr indent="0" marL="0">
+              <a:buNone/>
+            </a:pPr>
+            <a:r>
+              <a:rPr lang="en-US" sz="1100" b="1" dirty="0">
+                <a:solidFill>
+                  <a:srgbClr val="7C2D12"/>
+                </a:solidFill>
+                <a:latin typeface="PingFang SC" pitchFamily="34" charset="0"/>
+                <a:ea typeface="PingFang SC" pitchFamily="34" charset="-122"/>
+                <a:cs typeface="PingFang SC" pitchFamily="34" charset="-120"/>
+              </a:rPr>
+              <a:t>内存压缩引擎（MFC）· 近数据处理</a:t>
+            </a:r>
+            <a:endParaRPr lang="en-US" sz="1100" dirty="0"/>
+          </a:p>
+        </p:txBody>
+      </p:sp>
+      <p:sp>
+        <p:nvSpPr>
+          <p:cNvPr id="109" name="Text 107"/>
+          <p:cNvSpPr/>
+          <p:nvPr/>
+        </p:nvSpPr>
+        <p:spPr>
+          <a:xfrm>
+            <a:off x="6108192" y="4837176"/>
+            <a:ext cx="5394960" cy="164592"/>
+          </a:xfrm>
+          <a:prstGeom prst="rect">
+            <a:avLst/>
+          </a:prstGeom>
+          <a:noFill/>
+          <a:ln/>
+        </p:spPr>
+        <p:txBody>
+          <a:bodyPr wrap="square" lIns="0" tIns="0" rIns="0" bIns="0" rtlCol="0" anchor="ctr"/>
+          <a:lstStyle/>
+          <a:p>
+            <a:pPr indent="0" marL="0">
+              <a:buNone/>
+            </a:pPr>
+            <a:r>
+              <a:rPr lang="en-US" sz="850" dirty="0">
+                <a:solidFill>
+                  <a:srgbClr val="334155"/>
+                </a:solidFill>
+                <a:latin typeface="PingFang SC" pitchFamily="34" charset="0"/>
+                <a:ea typeface="PingFang SC" pitchFamily="34" charset="-122"/>
+                <a:cs typeface="PingFang SC" pitchFamily="34" charset="-120"/>
+              </a:rPr>
+              <a:t>带宽压缩 · 位平面重组 · 数据过滤 / 选择性读取 · 透明带宽放大</a:t>
+            </a:r>
+            <a:endParaRPr lang="en-US" sz="850" dirty="0"/>
+          </a:p>
+        </p:txBody>
+      </p:sp>
+      <p:sp>
+        <p:nvSpPr>
+          <p:cNvPr id="110" name="Shape 108"/>
+          <p:cNvSpPr/>
+          <p:nvPr/>
+        </p:nvSpPr>
+        <p:spPr>
+          <a:xfrm>
+            <a:off x="11420856" y="4608576"/>
+            <a:ext cx="237744" cy="237744"/>
+          </a:xfrm>
+          <a:prstGeom prst="ellipse">
+            <a:avLst/>
+          </a:prstGeom>
+          <a:solidFill>
+            <a:srgbClr val="0F172A"/>
           </a:solidFill>
           <a:ln w="12700">
             <a:solidFill>
-              <a:srgbClr val="E2E8F0"/>
+              <a:srgbClr val="333333"/>
             </a:solidFill>
             <a:prstDash val="solid"/>
           </a:ln>
@@ -4463,87 +8583,288 @@
       </p:sp>
       <p:sp>
         <p:nvSpPr>
-          <p:cNvPr id="14" name="Text 12"/>
-          <p:cNvSpPr/>
-          <p:nvPr/>
-        </p:nvSpPr>
-        <p:spPr>
-          <a:xfrm>
-            <a:off x="777240" y="3749040"/>
-            <a:ext cx="10607040" cy="548640"/>
-          </a:xfrm>
-          <a:prstGeom prst="rect">
-            <a:avLst/>
-          </a:prstGeom>
-          <a:noFill/>
-          <a:ln/>
-        </p:spPr>
-        <p:txBody>
-          <a:bodyPr wrap="square" lIns="0" tIns="0" rIns="0" bIns="0" rtlCol="0" anchor="ctr"/>
-          <a:lstStyle/>
-          <a:p>
-            <a:pPr indent="0" marL="0">
-              <a:buNone/>
-            </a:pPr>
-            <a:r>
-              <a:rPr lang="en-US" sz="1400" dirty="0">
-                <a:solidFill>
-                  <a:srgbClr val="0F172A"/>
-                </a:solidFill>
-                <a:latin typeface="PingFang SC" pitchFamily="34" charset="0"/>
-                <a:ea typeface="PingFang SC" pitchFamily="34" charset="-122"/>
-                <a:cs typeface="PingFang SC" pitchFamily="34" charset="-120"/>
-              </a:rPr>
-              <a:t>一句话：「全程锁页 + bounce 拷贝」→「共享虚拟地址 + 按需调页」</a:t>
-            </a:r>
-            <a:endParaRPr lang="en-US" sz="1400" dirty="0"/>
-          </a:p>
-        </p:txBody>
-      </p:sp>
-      <p:sp>
-        <p:nvSpPr>
-          <p:cNvPr id="15" name="Shape 13"/>
-          <p:cNvSpPr/>
-          <p:nvPr/>
-        </p:nvSpPr>
-        <p:spPr>
-          <a:xfrm>
-            <a:off x="1828800" y="4572000"/>
-            <a:ext cx="3657600" cy="1463040"/>
+          <p:cNvPr id="111" name="Text 109"/>
+          <p:cNvSpPr/>
+          <p:nvPr/>
+        </p:nvSpPr>
+        <p:spPr>
+          <a:xfrm>
+            <a:off x="11420856" y="4608576"/>
+            <a:ext cx="237744" cy="237744"/>
+          </a:xfrm>
+          <a:prstGeom prst="rect">
+            <a:avLst/>
+          </a:prstGeom>
+          <a:noFill/>
+          <a:ln/>
+        </p:spPr>
+        <p:txBody>
+          <a:bodyPr wrap="square" lIns="0" tIns="0" rIns="0" bIns="0" rtlCol="0" anchor="ctr"/>
+          <a:lstStyle/>
+          <a:p>
+            <a:pPr algn="ctr" indent="0" marL="0">
+              <a:buNone/>
+            </a:pPr>
+            <a:r>
+              <a:rPr lang="en-US" sz="1100" b="1" dirty="0">
+                <a:solidFill>
+                  <a:srgbClr val="FFFFFF"/>
+                </a:solidFill>
+                <a:latin typeface="PingFang SC" pitchFamily="34" charset="0"/>
+                <a:ea typeface="PingFang SC" pitchFamily="34" charset="-122"/>
+                <a:cs typeface="PingFang SC" pitchFamily="34" charset="-120"/>
+              </a:rPr>
+              <a:t>3</a:t>
+            </a:r>
+            <a:endParaRPr lang="en-US" sz="1100" dirty="0"/>
+          </a:p>
+        </p:txBody>
+      </p:sp>
+      <p:sp>
+        <p:nvSpPr>
+          <p:cNvPr id="112" name="Shape 110"/>
+          <p:cNvSpPr/>
+          <p:nvPr/>
+        </p:nvSpPr>
+        <p:spPr>
+          <a:xfrm>
+            <a:off x="274320" y="5358384"/>
+            <a:ext cx="11640312" cy="914400"/>
           </a:xfrm>
           <a:prstGeom prst="roundRect">
             <a:avLst>
-              <a:gd name="adj" fmla="val 9375"/>
+              <a:gd name="adj" fmla="val 6000"/>
             </a:avLst>
           </a:prstGeom>
           <a:solidFill>
-            <a:srgbClr val="F5F3FF"/>
+            <a:srgbClr val="DCFCE7"/>
+          </a:solidFill>
+          <a:ln w="15875">
+            <a:solidFill>
+              <a:srgbClr val="16A34A"/>
+            </a:solidFill>
+            <a:prstDash val="solid"/>
+          </a:ln>
+        </p:spPr>
+      </p:sp>
+      <p:sp>
+        <p:nvSpPr>
+          <p:cNvPr id="113" name="Text 111"/>
+          <p:cNvSpPr/>
+          <p:nvPr/>
+        </p:nvSpPr>
+        <p:spPr>
+          <a:xfrm>
+            <a:off x="411480" y="5404104"/>
+            <a:ext cx="3291840" cy="219456"/>
+          </a:xfrm>
+          <a:prstGeom prst="rect">
+            <a:avLst/>
+          </a:prstGeom>
+          <a:noFill/>
+          <a:ln/>
+        </p:spPr>
+        <p:txBody>
+          <a:bodyPr wrap="square" lIns="0" tIns="0" rIns="0" bIns="0" rtlCol="0" anchor="ctr"/>
+          <a:lstStyle/>
+          <a:p>
+            <a:pPr indent="0" marL="0">
+              <a:buNone/>
+            </a:pPr>
+            <a:r>
+              <a:rPr lang="en-US" sz="1300" b="1" dirty="0">
+                <a:solidFill>
+                  <a:srgbClr val="14532D"/>
+                </a:solidFill>
+                <a:latin typeface="PingFang SC" pitchFamily="34" charset="0"/>
+                <a:ea typeface="PingFang SC" pitchFamily="34" charset="-122"/>
+                <a:cs typeface="PingFang SC" pitchFamily="34" charset="-120"/>
+              </a:rPr>
+              <a:t>LPDDR5X / LPDDR5 统一内存</a:t>
+            </a:r>
+            <a:endParaRPr lang="en-US" sz="1300" dirty="0"/>
+          </a:p>
+        </p:txBody>
+      </p:sp>
+      <p:sp>
+        <p:nvSpPr>
+          <p:cNvPr id="114" name="Text 112"/>
+          <p:cNvSpPr/>
+          <p:nvPr/>
+        </p:nvSpPr>
+        <p:spPr>
+          <a:xfrm>
+            <a:off x="3840480" y="5413248"/>
+            <a:ext cx="7680960" cy="201168"/>
+          </a:xfrm>
+          <a:prstGeom prst="rect">
+            <a:avLst/>
+          </a:prstGeom>
+          <a:noFill/>
+          <a:ln/>
+        </p:spPr>
+        <p:txBody>
+          <a:bodyPr wrap="square" lIns="0" tIns="0" rIns="0" bIns="0" rtlCol="0" anchor="ctr"/>
+          <a:lstStyle/>
+          <a:p>
+            <a:pPr indent="0" marL="0">
+              <a:buNone/>
+            </a:pPr>
+            <a:r>
+              <a:rPr lang="en-US" sz="950" dirty="0">
+                <a:solidFill>
+                  <a:srgbClr val="334155"/>
+                </a:solidFill>
+                <a:latin typeface="PingFang SC" pitchFamily="34" charset="0"/>
+                <a:ea typeface="PingFang SC" pitchFamily="34" charset="-122"/>
+                <a:cs typeface="PingFang SC" pitchFamily="34" charset="-120"/>
+              </a:rPr>
+              <a:t>8×16-bit = 128-bit · ~68 GB/s · 10.7 Gbps/pin · 统一架构（无独立显存）</a:t>
+            </a:r>
+            <a:endParaRPr lang="en-US" sz="950" dirty="0"/>
+          </a:p>
+        </p:txBody>
+      </p:sp>
+      <p:sp>
+        <p:nvSpPr>
+          <p:cNvPr id="115" name="Shape 113"/>
+          <p:cNvSpPr/>
+          <p:nvPr/>
+        </p:nvSpPr>
+        <p:spPr>
+          <a:xfrm>
+            <a:off x="411480" y="5669280"/>
+            <a:ext cx="5440680" cy="512064"/>
+          </a:xfrm>
+          <a:prstGeom prst="roundRect">
+            <a:avLst>
+              <a:gd name="adj" fmla="val 10714"/>
+            </a:avLst>
+          </a:prstGeom>
+          <a:solidFill>
+            <a:srgbClr val="FFFFFF"/>
+          </a:solidFill>
+          <a:ln w="15875">
+            <a:solidFill>
+              <a:srgbClr val="16A34A"/>
+            </a:solidFill>
+            <a:prstDash val="solid"/>
+          </a:ln>
+        </p:spPr>
+      </p:sp>
+      <p:sp>
+        <p:nvSpPr>
+          <p:cNvPr id="116" name="Text 114"/>
+          <p:cNvSpPr/>
+          <p:nvPr/>
+        </p:nvSpPr>
+        <p:spPr>
+          <a:xfrm>
+            <a:off x="530352" y="5696712"/>
+            <a:ext cx="4846320" cy="201168"/>
+          </a:xfrm>
+          <a:prstGeom prst="rect">
+            <a:avLst/>
+          </a:prstGeom>
+          <a:noFill/>
+          <a:ln/>
+        </p:spPr>
+        <p:txBody>
+          <a:bodyPr wrap="square" lIns="0" tIns="0" rIns="0" bIns="0" rtlCol="0" anchor="ctr"/>
+          <a:lstStyle/>
+          <a:p>
+            <a:pPr indent="0" marL="0">
+              <a:buNone/>
+            </a:pPr>
+            <a:r>
+              <a:rPr lang="en-US" sz="1000" b="1" dirty="0">
+                <a:solidFill>
+                  <a:srgbClr val="14532D"/>
+                </a:solidFill>
+                <a:latin typeface="PingFang SC" pitchFamily="34" charset="0"/>
+                <a:ea typeface="PingFang SC" pitchFamily="34" charset="-122"/>
+                <a:cs typeface="PingFang SC" pitchFamily="34" charset="-120"/>
+              </a:rPr>
+              <a:t>Bank 级 PIM：SIMD/MAC 计算单元</a:t>
+            </a:r>
+            <a:endParaRPr lang="en-US" sz="1000" dirty="0"/>
+          </a:p>
+        </p:txBody>
+      </p:sp>
+      <p:sp>
+        <p:nvSpPr>
+          <p:cNvPr id="117" name="Text 115"/>
+          <p:cNvSpPr/>
+          <p:nvPr/>
+        </p:nvSpPr>
+        <p:spPr>
+          <a:xfrm>
+            <a:off x="530352" y="5897880"/>
+            <a:ext cx="5120640" cy="164592"/>
+          </a:xfrm>
+          <a:prstGeom prst="rect">
+            <a:avLst/>
+          </a:prstGeom>
+          <a:noFill/>
+          <a:ln/>
+        </p:spPr>
+        <p:txBody>
+          <a:bodyPr wrap="square" lIns="0" tIns="0" rIns="0" bIns="0" rtlCol="0" anchor="ctr"/>
+          <a:lstStyle/>
+          <a:p>
+            <a:pPr indent="0" marL="0">
+              <a:buNone/>
+            </a:pPr>
+            <a:r>
+              <a:rPr lang="en-US" sz="850" dirty="0">
+                <a:solidFill>
+                  <a:srgbClr val="334155"/>
+                </a:solidFill>
+                <a:latin typeface="PingFang SC" pitchFamily="34" charset="0"/>
+                <a:ea typeface="PingFang SC" pitchFamily="34" charset="-122"/>
+                <a:cs typeface="PingFang SC" pitchFamily="34" charset="-120"/>
+              </a:rPr>
+              <a:t>NMC 动态分配 · 内部带宽 409.6 GB/s（外部 8×）· 能耗 ~3 pJ/bit</a:t>
+            </a:r>
+            <a:endParaRPr lang="en-US" sz="850" dirty="0"/>
+          </a:p>
+        </p:txBody>
+      </p:sp>
+      <p:sp>
+        <p:nvSpPr>
+          <p:cNvPr id="118" name="Shape 116"/>
+          <p:cNvSpPr/>
+          <p:nvPr/>
+        </p:nvSpPr>
+        <p:spPr>
+          <a:xfrm>
+            <a:off x="5568696" y="5678424"/>
+            <a:ext cx="237744" cy="237744"/>
+          </a:xfrm>
+          <a:prstGeom prst="ellipse">
+            <a:avLst/>
+          </a:prstGeom>
+          <a:solidFill>
+            <a:srgbClr val="0F172A"/>
           </a:solidFill>
           <a:ln w="12700">
             <a:solidFill>
-              <a:srgbClr val="7C3AED"/>
+              <a:srgbClr val="333333"/>
             </a:solidFill>
             <a:prstDash val="solid"/>
           </a:ln>
-          <a:effectLst>
-            <a:outerShdw sx="100000" sy="100000" kx="0" ky="0" algn="bl" rotWithShape="0" blurRad="101600" dist="38100" dir="5400000">
-              <a:srgbClr val="000000">
-                <a:alpha val="12000"/>
-              </a:srgbClr>
-            </a:outerShdw>
-          </a:effectLst>
-        </p:spPr>
-      </p:sp>
-      <p:sp>
-        <p:nvSpPr>
-          <p:cNvPr id="16" name="Text 14"/>
-          <p:cNvSpPr/>
-          <p:nvPr/>
-        </p:nvSpPr>
-        <p:spPr>
-          <a:xfrm>
-            <a:off x="1828800" y="4709160"/>
-            <a:ext cx="3657600" cy="731520"/>
+        </p:spPr>
+      </p:sp>
+      <p:sp>
+        <p:nvSpPr>
+          <p:cNvPr id="119" name="Text 117"/>
+          <p:cNvSpPr/>
+          <p:nvPr/>
+        </p:nvSpPr>
+        <p:spPr>
+          <a:xfrm>
+            <a:off x="5568696" y="5678424"/>
+            <a:ext cx="237744" cy="237744"/>
           </a:xfrm>
           <a:prstGeom prst="rect">
             <a:avLst/>
@@ -4559,103 +8880,160 @@
               <a:buNone/>
             </a:pPr>
             <a:r>
-              <a:rPr lang="en-US" sz="4400" b="1" dirty="0">
-                <a:solidFill>
-                  <a:srgbClr val="7C3AED"/>
-                </a:solidFill>
-                <a:latin typeface="PingFang SC" pitchFamily="34" charset="0"/>
-                <a:ea typeface="PingFang SC" pitchFamily="34" charset="-122"/>
-                <a:cs typeface="PingFang SC" pitchFamily="34" charset="-120"/>
-              </a:rPr>
-              <a:t>−60~80%</a:t>
-            </a:r>
-            <a:endParaRPr lang="en-US" sz="4400" dirty="0"/>
-          </a:p>
-        </p:txBody>
-      </p:sp>
-      <p:sp>
-        <p:nvSpPr>
-          <p:cNvPr id="17" name="Text 15"/>
-          <p:cNvSpPr/>
-          <p:nvPr/>
-        </p:nvSpPr>
-        <p:spPr>
-          <a:xfrm>
-            <a:off x="1828800" y="5486400"/>
-            <a:ext cx="3657600" cy="365760"/>
-          </a:xfrm>
-          <a:prstGeom prst="rect">
-            <a:avLst/>
-          </a:prstGeom>
-          <a:noFill/>
-          <a:ln/>
-        </p:spPr>
-        <p:txBody>
-          <a:bodyPr wrap="square" lIns="0" tIns="0" rIns="0" bIns="0" rtlCol="0" anchor="ctr"/>
-          <a:lstStyle/>
-          <a:p>
-            <a:pPr algn="ctr" indent="0" marL="0">
-              <a:buNone/>
-            </a:pPr>
-            <a:r>
-              <a:rPr lang="en-US" sz="1400" dirty="0">
-                <a:solidFill>
-                  <a:srgbClr val="64748B"/>
-                </a:solidFill>
-                <a:latin typeface="PingFang SC" pitchFamily="34" charset="0"/>
-                <a:ea typeface="PingFang SC" pitchFamily="34" charset="-122"/>
-                <a:cs typeface="PingFang SC" pitchFamily="34" charset="-120"/>
-              </a:rPr>
-              <a:t>锁页减少</a:t>
-            </a:r>
-            <a:endParaRPr lang="en-US" sz="1400" dirty="0"/>
-          </a:p>
-        </p:txBody>
-      </p:sp>
-      <p:sp>
-        <p:nvSpPr>
-          <p:cNvPr id="18" name="Shape 16"/>
-          <p:cNvSpPr/>
-          <p:nvPr/>
-        </p:nvSpPr>
-        <p:spPr>
-          <a:xfrm>
-            <a:off x="6675120" y="4572000"/>
-            <a:ext cx="3657600" cy="1463040"/>
+              <a:rPr lang="en-US" sz="1100" b="1" dirty="0">
+                <a:solidFill>
+                  <a:srgbClr val="FFFFFF"/>
+                </a:solidFill>
+                <a:latin typeface="PingFang SC" pitchFamily="34" charset="0"/>
+                <a:ea typeface="PingFang SC" pitchFamily="34" charset="-122"/>
+                <a:cs typeface="PingFang SC" pitchFamily="34" charset="-120"/>
+              </a:rPr>
+              <a:t>2</a:t>
+            </a:r>
+            <a:endParaRPr lang="en-US" sz="1100" dirty="0"/>
+          </a:p>
+        </p:txBody>
+      </p:sp>
+      <p:sp>
+        <p:nvSpPr>
+          <p:cNvPr id="120" name="Shape 118"/>
+          <p:cNvSpPr/>
+          <p:nvPr/>
+        </p:nvSpPr>
+        <p:spPr>
+          <a:xfrm>
+            <a:off x="6035040" y="5669280"/>
+            <a:ext cx="5669280" cy="512064"/>
           </a:xfrm>
           <a:prstGeom prst="roundRect">
             <a:avLst>
-              <a:gd name="adj" fmla="val 9375"/>
+              <a:gd name="adj" fmla="val 10714"/>
             </a:avLst>
           </a:prstGeom>
           <a:solidFill>
-            <a:srgbClr val="F5F3FF"/>
+            <a:srgbClr val="FFFFFF"/>
+          </a:solidFill>
+          <a:ln w="15875">
+            <a:solidFill>
+              <a:srgbClr val="16A34A"/>
+            </a:solidFill>
+            <a:prstDash val="solid"/>
+          </a:ln>
+        </p:spPr>
+      </p:sp>
+      <p:sp>
+        <p:nvSpPr>
+          <p:cNvPr id="121" name="Text 119"/>
+          <p:cNvSpPr/>
+          <p:nvPr/>
+        </p:nvSpPr>
+        <p:spPr>
+          <a:xfrm>
+            <a:off x="6153912" y="5696712"/>
+            <a:ext cx="5120640" cy="201168"/>
+          </a:xfrm>
+          <a:prstGeom prst="rect">
+            <a:avLst/>
+          </a:prstGeom>
+          <a:noFill/>
+          <a:ln/>
+        </p:spPr>
+        <p:txBody>
+          <a:bodyPr wrap="square" lIns="0" tIns="0" rIns="0" bIns="0" rtlCol="0" anchor="ctr"/>
+          <a:lstStyle/>
+          <a:p>
+            <a:pPr indent="0" marL="0">
+              <a:buNone/>
+            </a:pPr>
+            <a:r>
+              <a:rPr lang="en-US" sz="1000" b="1" dirty="0">
+                <a:solidFill>
+                  <a:srgbClr val="14532D"/>
+                </a:solidFill>
+                <a:latin typeface="PingFang SC" pitchFamily="34" charset="0"/>
+                <a:ea typeface="PingFang SC" pitchFamily="34" charset="-122"/>
+                <a:cs typeface="PingFang SC" pitchFamily="34" charset="-120"/>
+              </a:rPr>
+              <a:t>子阵列级 PuD（Proteus）：位线电荷共享</a:t>
+            </a:r>
+            <a:endParaRPr lang="en-US" sz="1000" dirty="0"/>
+          </a:p>
+        </p:txBody>
+      </p:sp>
+      <p:sp>
+        <p:nvSpPr>
+          <p:cNvPr id="122" name="Text 120"/>
+          <p:cNvSpPr/>
+          <p:nvPr/>
+        </p:nvSpPr>
+        <p:spPr>
+          <a:xfrm>
+            <a:off x="6153912" y="5897880"/>
+            <a:ext cx="5394960" cy="164592"/>
+          </a:xfrm>
+          <a:prstGeom prst="rect">
+            <a:avLst/>
+          </a:prstGeom>
+          <a:noFill/>
+          <a:ln/>
+        </p:spPr>
+        <p:txBody>
+          <a:bodyPr wrap="square" lIns="0" tIns="0" rIns="0" bIns="0" rtlCol="0" anchor="ctr"/>
+          <a:lstStyle/>
+          <a:p>
+            <a:pPr indent="0" marL="0">
+              <a:buNone/>
+            </a:pPr>
+            <a:r>
+              <a:rPr lang="en-US" sz="850" dirty="0">
+                <a:solidFill>
+                  <a:srgbClr val="334155"/>
+                </a:solidFill>
+                <a:latin typeface="PingFang SC" pitchFamily="34" charset="0"/>
+                <a:ea typeface="PingFang SC" pitchFamily="34" charset="-122"/>
+                <a:cs typeface="PingFang SC" pitchFamily="34" charset="-120"/>
+              </a:rPr>
+              <a:t>按有效精度动态压缩位宽 · 多阵列并行 · 吞吐 88× vs CPU</a:t>
+            </a:r>
+            <a:endParaRPr lang="en-US" sz="850" dirty="0"/>
+          </a:p>
+        </p:txBody>
+      </p:sp>
+      <p:sp>
+        <p:nvSpPr>
+          <p:cNvPr id="123" name="Shape 121"/>
+          <p:cNvSpPr/>
+          <p:nvPr/>
+        </p:nvSpPr>
+        <p:spPr>
+          <a:xfrm>
+            <a:off x="11420856" y="5678424"/>
+            <a:ext cx="237744" cy="237744"/>
+          </a:xfrm>
+          <a:prstGeom prst="ellipse">
+            <a:avLst/>
+          </a:prstGeom>
+          <a:solidFill>
+            <a:srgbClr val="0F172A"/>
           </a:solidFill>
           <a:ln w="12700">
             <a:solidFill>
-              <a:srgbClr val="7C3AED"/>
+              <a:srgbClr val="333333"/>
             </a:solidFill>
             <a:prstDash val="solid"/>
           </a:ln>
-          <a:effectLst>
-            <a:outerShdw sx="100000" sy="100000" kx="0" ky="0" algn="bl" rotWithShape="0" blurRad="101600" dist="38100" dir="5400000">
-              <a:srgbClr val="000000">
-                <a:alpha val="12000"/>
-              </a:srgbClr>
-            </a:outerShdw>
-          </a:effectLst>
-        </p:spPr>
-      </p:sp>
-      <p:sp>
-        <p:nvSpPr>
-          <p:cNvPr id="19" name="Text 17"/>
-          <p:cNvSpPr/>
-          <p:nvPr/>
-        </p:nvSpPr>
-        <p:spPr>
-          <a:xfrm>
-            <a:off x="6675120" y="4709160"/>
-            <a:ext cx="3657600" cy="731520"/>
+        </p:spPr>
+      </p:sp>
+      <p:sp>
+        <p:nvSpPr>
+          <p:cNvPr id="124" name="Text 122"/>
+          <p:cNvSpPr/>
+          <p:nvPr/>
+        </p:nvSpPr>
+        <p:spPr>
+          <a:xfrm>
+            <a:off x="11420856" y="5678424"/>
+            <a:ext cx="237744" cy="237744"/>
           </a:xfrm>
           <a:prstGeom prst="rect">
             <a:avLst/>
@@ -4671,7 +9049,316 @@
               <a:buNone/>
             </a:pPr>
             <a:r>
-              <a:rPr lang="en-US" sz="4400" b="1" dirty="0">
+              <a:rPr lang="en-US" sz="1100" b="1" dirty="0">
+                <a:solidFill>
+                  <a:srgbClr val="FFFFFF"/>
+                </a:solidFill>
+                <a:latin typeface="PingFang SC" pitchFamily="34" charset="0"/>
+                <a:ea typeface="PingFang SC" pitchFamily="34" charset="-122"/>
+                <a:cs typeface="PingFang SC" pitchFamily="34" charset="-120"/>
+              </a:rPr>
+              <a:t>7</a:t>
+            </a:r>
+            <a:endParaRPr lang="en-US" sz="1100" dirty="0"/>
+          </a:p>
+        </p:txBody>
+      </p:sp>
+      <p:sp>
+        <p:nvSpPr>
+          <p:cNvPr id="125" name="Shape 123"/>
+          <p:cNvSpPr/>
+          <p:nvPr/>
+        </p:nvSpPr>
+        <p:spPr>
+          <a:xfrm>
+            <a:off x="1244498" y="2029968"/>
+            <a:ext cx="0" cy="877824"/>
+          </a:xfrm>
+          <a:prstGeom prst="line">
+            <a:avLst/>
+          </a:prstGeom>
+          <a:noFill/>
+          <a:ln w="19050">
+            <a:solidFill>
+              <a:srgbClr val="2563EB"/>
+            </a:solidFill>
+            <a:prstDash val="solid"/>
+            <a:tailEnd type="triangle"/>
+          </a:ln>
+        </p:spPr>
+      </p:sp>
+      <p:sp>
+        <p:nvSpPr>
+          <p:cNvPr id="126" name="Text 124"/>
+          <p:cNvSpPr/>
+          <p:nvPr/>
+        </p:nvSpPr>
+        <p:spPr>
+          <a:xfrm>
+            <a:off x="1298448" y="2377440"/>
+            <a:ext cx="1005840" cy="164592"/>
+          </a:xfrm>
+          <a:prstGeom prst="rect">
+            <a:avLst/>
+          </a:prstGeom>
+          <a:noFill/>
+          <a:ln/>
+        </p:spPr>
+        <p:txBody>
+          <a:bodyPr wrap="square" lIns="0" tIns="0" rIns="0" bIns="0" rtlCol="0" anchor="ctr"/>
+          <a:lstStyle/>
+          <a:p>
+            <a:pPr indent="0" marL="0">
+              <a:buNone/>
+            </a:pPr>
+            <a:r>
+              <a:rPr lang="en-US" sz="800" i="1" dirty="0">
+                <a:solidFill>
+                  <a:srgbClr val="2563EB"/>
+                </a:solidFill>
+                <a:latin typeface="PingFang SC" pitchFamily="34" charset="0"/>
+                <a:ea typeface="PingFang SC" pitchFamily="34" charset="-122"/>
+                <a:cs typeface="PingFang SC" pitchFamily="34" charset="-120"/>
+              </a:rPr>
+              <a:t>own MMU</a:t>
+            </a:r>
+            <a:endParaRPr lang="en-US" sz="800" dirty="0"/>
+          </a:p>
+        </p:txBody>
+      </p:sp>
+      <p:sp>
+        <p:nvSpPr>
+          <p:cNvPr id="127" name="Shape 125"/>
+          <p:cNvSpPr/>
+          <p:nvPr/>
+        </p:nvSpPr>
+        <p:spPr>
+          <a:xfrm>
+            <a:off x="3262579" y="2029968"/>
+            <a:ext cx="0" cy="877824"/>
+          </a:xfrm>
+          <a:prstGeom prst="line">
+            <a:avLst/>
+          </a:prstGeom>
+          <a:noFill/>
+          <a:ln w="19050">
+            <a:solidFill>
+              <a:srgbClr val="2563EB"/>
+            </a:solidFill>
+            <a:prstDash val="solid"/>
+            <a:tailEnd type="triangle"/>
+          </a:ln>
+        </p:spPr>
+      </p:sp>
+      <p:sp>
+        <p:nvSpPr>
+          <p:cNvPr id="128" name="Text 126"/>
+          <p:cNvSpPr/>
+          <p:nvPr/>
+        </p:nvSpPr>
+        <p:spPr>
+          <a:xfrm>
+            <a:off x="3319272" y="2377440"/>
+            <a:ext cx="1005840" cy="164592"/>
+          </a:xfrm>
+          <a:prstGeom prst="rect">
+            <a:avLst/>
+          </a:prstGeom>
+          <a:noFill/>
+          <a:ln/>
+        </p:spPr>
+        <p:txBody>
+          <a:bodyPr wrap="square" lIns="0" tIns="0" rIns="0" bIns="0" rtlCol="0" anchor="ctr"/>
+          <a:lstStyle/>
+          <a:p>
+            <a:pPr indent="0" marL="0">
+              <a:buNone/>
+            </a:pPr>
+            <a:r>
+              <a:rPr lang="en-US" sz="800" i="1" dirty="0">
+                <a:solidFill>
+                  <a:srgbClr val="2563EB"/>
+                </a:solidFill>
+                <a:latin typeface="PingFang SC" pitchFamily="34" charset="0"/>
+                <a:ea typeface="PingFang SC" pitchFamily="34" charset="-122"/>
+                <a:cs typeface="PingFang SC" pitchFamily="34" charset="-120"/>
+              </a:rPr>
+              <a:t>own MMU</a:t>
+            </a:r>
+            <a:endParaRPr lang="en-US" sz="800" dirty="0"/>
+          </a:p>
+        </p:txBody>
+      </p:sp>
+      <p:sp>
+        <p:nvSpPr>
+          <p:cNvPr id="129" name="Shape 127"/>
+          <p:cNvSpPr/>
+          <p:nvPr/>
+        </p:nvSpPr>
+        <p:spPr>
+          <a:xfrm>
+            <a:off x="5135270" y="2029968"/>
+            <a:ext cx="0" cy="237744"/>
+          </a:xfrm>
+          <a:prstGeom prst="line">
+            <a:avLst/>
+          </a:prstGeom>
+          <a:noFill/>
+          <a:ln w="19050">
+            <a:solidFill>
+              <a:srgbClr val="475569"/>
+            </a:solidFill>
+            <a:prstDash val="solid"/>
+            <a:tailEnd type="triangle"/>
+          </a:ln>
+        </p:spPr>
+      </p:sp>
+      <p:sp>
+        <p:nvSpPr>
+          <p:cNvPr id="130" name="Shape 128"/>
+          <p:cNvSpPr/>
+          <p:nvPr/>
+        </p:nvSpPr>
+        <p:spPr>
+          <a:xfrm>
+            <a:off x="6788506" y="2029968"/>
+            <a:ext cx="0" cy="237744"/>
+          </a:xfrm>
+          <a:prstGeom prst="line">
+            <a:avLst/>
+          </a:prstGeom>
+          <a:noFill/>
+          <a:ln w="19050">
+            <a:solidFill>
+              <a:srgbClr val="475569"/>
+            </a:solidFill>
+            <a:prstDash val="solid"/>
+            <a:tailEnd type="triangle"/>
+          </a:ln>
+        </p:spPr>
+      </p:sp>
+      <p:sp>
+        <p:nvSpPr>
+          <p:cNvPr id="131" name="Shape 129"/>
+          <p:cNvSpPr/>
+          <p:nvPr/>
+        </p:nvSpPr>
+        <p:spPr>
+          <a:xfrm>
+            <a:off x="8200339" y="2029968"/>
+            <a:ext cx="0" cy="237744"/>
+          </a:xfrm>
+          <a:prstGeom prst="line">
+            <a:avLst/>
+          </a:prstGeom>
+          <a:noFill/>
+          <a:ln w="19050">
+            <a:solidFill>
+              <a:srgbClr val="475569"/>
+            </a:solidFill>
+            <a:prstDash val="solid"/>
+            <a:tailEnd type="triangle"/>
+          </a:ln>
+        </p:spPr>
+      </p:sp>
+      <p:sp>
+        <p:nvSpPr>
+          <p:cNvPr id="132" name="Shape 130"/>
+          <p:cNvSpPr/>
+          <p:nvPr/>
+        </p:nvSpPr>
+        <p:spPr>
+          <a:xfrm>
+            <a:off x="9490558" y="2029968"/>
+            <a:ext cx="0" cy="237744"/>
+          </a:xfrm>
+          <a:prstGeom prst="line">
+            <a:avLst/>
+          </a:prstGeom>
+          <a:noFill/>
+          <a:ln w="19050">
+            <a:solidFill>
+              <a:srgbClr val="475569"/>
+            </a:solidFill>
+            <a:prstDash val="solid"/>
+            <a:tailEnd type="triangle"/>
+          </a:ln>
+        </p:spPr>
+      </p:sp>
+      <p:sp>
+        <p:nvSpPr>
+          <p:cNvPr id="133" name="Shape 131"/>
+          <p:cNvSpPr/>
+          <p:nvPr/>
+        </p:nvSpPr>
+        <p:spPr>
+          <a:xfrm>
+            <a:off x="7215530" y="2724912"/>
+            <a:ext cx="0" cy="182880"/>
+          </a:xfrm>
+          <a:prstGeom prst="line">
+            <a:avLst/>
+          </a:prstGeom>
+          <a:noFill/>
+          <a:ln w="19050">
+            <a:solidFill>
+              <a:srgbClr val="475569"/>
+            </a:solidFill>
+            <a:prstDash val="solid"/>
+            <a:tailEnd type="triangle"/>
+          </a:ln>
+        </p:spPr>
+      </p:sp>
+      <p:sp>
+        <p:nvSpPr>
+          <p:cNvPr id="134" name="Shape 132"/>
+          <p:cNvSpPr/>
+          <p:nvPr/>
+        </p:nvSpPr>
+        <p:spPr>
+          <a:xfrm>
+            <a:off x="11056925" y="2029968"/>
+            <a:ext cx="0" cy="877824"/>
+          </a:xfrm>
+          <a:prstGeom prst="line">
+            <a:avLst/>
+          </a:prstGeom>
+          <a:noFill/>
+          <a:ln w="19050">
+            <a:solidFill>
+              <a:srgbClr val="7C3AED"/>
+            </a:solidFill>
+            <a:prstDash val="dash"/>
+            <a:tailEnd type="triangle"/>
+          </a:ln>
+        </p:spPr>
+      </p:sp>
+      <p:sp>
+        <p:nvSpPr>
+          <p:cNvPr id="135" name="Text 133"/>
+          <p:cNvSpPr/>
+          <p:nvPr/>
+        </p:nvSpPr>
+        <p:spPr>
+          <a:xfrm>
+            <a:off x="10515600" y="2377440"/>
+            <a:ext cx="914400" cy="164592"/>
+          </a:xfrm>
+          <a:prstGeom prst="rect">
+            <a:avLst/>
+          </a:prstGeom>
+          <a:noFill/>
+          <a:ln/>
+        </p:spPr>
+        <p:txBody>
+          <a:bodyPr wrap="square" lIns="0" tIns="0" rIns="0" bIns="0" rtlCol="0" anchor="ctr"/>
+          <a:lstStyle/>
+          <a:p>
+            <a:pPr indent="0" marL="0">
+              <a:buNone/>
+            </a:pPr>
+            <a:r>
+              <a:rPr lang="en-US" sz="800" i="1" dirty="0">
                 <a:solidFill>
                   <a:srgbClr val="7C3AED"/>
                 </a:solidFill>
@@ -4679,38 +9366,348 @@
                 <a:ea typeface="PingFang SC" pitchFamily="34" charset="-122"/>
                 <a:cs typeface="PingFang SC" pitchFamily="34" charset="-120"/>
               </a:rPr>
-              <a:t>−40~60%</a:t>
-            </a:r>
-            <a:endParaRPr lang="en-US" sz="4400" dirty="0"/>
-          </a:p>
-        </p:txBody>
-      </p:sp>
-      <p:sp>
-        <p:nvSpPr>
-          <p:cNvPr id="20" name="Text 18"/>
-          <p:cNvSpPr/>
-          <p:nvPr/>
-        </p:nvSpPr>
-        <p:spPr>
-          <a:xfrm>
-            <a:off x="6675120" y="5486400"/>
-            <a:ext cx="3657600" cy="365760"/>
-          </a:xfrm>
-          <a:prstGeom prst="rect">
-            <a:avLst/>
-          </a:prstGeom>
-          <a:noFill/>
-          <a:ln/>
-        </p:spPr>
-        <p:txBody>
-          <a:bodyPr wrap="square" lIns="0" tIns="0" rIns="0" bIns="0" rtlCol="0" anchor="ctr"/>
-          <a:lstStyle/>
-          <a:p>
-            <a:pPr algn="ctr" indent="0" marL="0">
-              <a:buNone/>
-            </a:pPr>
-            <a:r>
-              <a:rPr lang="en-US" sz="1400" dirty="0">
+              <a:t>CHI C2C</a:t>
+            </a:r>
+            <a:endParaRPr lang="en-US" sz="800" dirty="0"/>
+          </a:p>
+        </p:txBody>
+      </p:sp>
+      <p:sp>
+        <p:nvSpPr>
+          <p:cNvPr id="136" name="Shape 134"/>
+          <p:cNvSpPr/>
+          <p:nvPr/>
+        </p:nvSpPr>
+        <p:spPr>
+          <a:xfrm>
+            <a:off x="6094476" y="3712464"/>
+            <a:ext cx="0" cy="201168"/>
+          </a:xfrm>
+          <a:prstGeom prst="line">
+            <a:avLst/>
+          </a:prstGeom>
+          <a:noFill/>
+          <a:ln w="19050">
+            <a:solidFill>
+              <a:srgbClr val="475569"/>
+            </a:solidFill>
+            <a:prstDash val="solid"/>
+            <a:tailEnd type="triangle"/>
+          </a:ln>
+        </p:spPr>
+      </p:sp>
+      <p:sp>
+        <p:nvSpPr>
+          <p:cNvPr id="137" name="Shape 135"/>
+          <p:cNvSpPr/>
+          <p:nvPr/>
+        </p:nvSpPr>
+        <p:spPr>
+          <a:xfrm>
+            <a:off x="6094476" y="4279392"/>
+            <a:ext cx="0" cy="128016"/>
+          </a:xfrm>
+          <a:prstGeom prst="line">
+            <a:avLst/>
+          </a:prstGeom>
+          <a:noFill/>
+          <a:ln w="19050">
+            <a:solidFill>
+              <a:srgbClr val="475569"/>
+            </a:solidFill>
+            <a:prstDash val="solid"/>
+          </a:ln>
+        </p:spPr>
+      </p:sp>
+      <p:sp>
+        <p:nvSpPr>
+          <p:cNvPr id="138" name="Shape 136"/>
+          <p:cNvSpPr/>
+          <p:nvPr/>
+        </p:nvSpPr>
+        <p:spPr>
+          <a:xfrm>
+            <a:off x="800100" y="4407408"/>
+            <a:ext cx="8046720" cy="0"/>
+          </a:xfrm>
+          <a:prstGeom prst="line">
+            <a:avLst/>
+          </a:prstGeom>
+          <a:noFill/>
+          <a:ln w="19050">
+            <a:solidFill>
+              <a:srgbClr val="475569"/>
+            </a:solidFill>
+            <a:prstDash val="solid"/>
+          </a:ln>
+        </p:spPr>
+      </p:sp>
+      <p:sp>
+        <p:nvSpPr>
+          <p:cNvPr id="139" name="Shape 137"/>
+          <p:cNvSpPr/>
+          <p:nvPr/>
+        </p:nvSpPr>
+        <p:spPr>
+          <a:xfrm>
+            <a:off x="800100" y="4407408"/>
+            <a:ext cx="0" cy="128016"/>
+          </a:xfrm>
+          <a:prstGeom prst="line">
+            <a:avLst/>
+          </a:prstGeom>
+          <a:noFill/>
+          <a:ln w="19050">
+            <a:solidFill>
+              <a:srgbClr val="475569"/>
+            </a:solidFill>
+            <a:prstDash val="solid"/>
+            <a:tailEnd type="triangle"/>
+          </a:ln>
+        </p:spPr>
+      </p:sp>
+      <p:sp>
+        <p:nvSpPr>
+          <p:cNvPr id="140" name="Shape 138"/>
+          <p:cNvSpPr/>
+          <p:nvPr/>
+        </p:nvSpPr>
+        <p:spPr>
+          <a:xfrm>
+            <a:off x="1668780" y="4407408"/>
+            <a:ext cx="0" cy="128016"/>
+          </a:xfrm>
+          <a:prstGeom prst="line">
+            <a:avLst/>
+          </a:prstGeom>
+          <a:noFill/>
+          <a:ln w="19050">
+            <a:solidFill>
+              <a:srgbClr val="475569"/>
+            </a:solidFill>
+            <a:prstDash val="solid"/>
+            <a:tailEnd type="triangle"/>
+          </a:ln>
+        </p:spPr>
+      </p:sp>
+      <p:sp>
+        <p:nvSpPr>
+          <p:cNvPr id="141" name="Shape 139"/>
+          <p:cNvSpPr/>
+          <p:nvPr/>
+        </p:nvSpPr>
+        <p:spPr>
+          <a:xfrm>
+            <a:off x="2537460" y="4407408"/>
+            <a:ext cx="0" cy="128016"/>
+          </a:xfrm>
+          <a:prstGeom prst="line">
+            <a:avLst/>
+          </a:prstGeom>
+          <a:noFill/>
+          <a:ln w="19050">
+            <a:solidFill>
+              <a:srgbClr val="475569"/>
+            </a:solidFill>
+            <a:prstDash val="solid"/>
+            <a:tailEnd type="triangle"/>
+          </a:ln>
+        </p:spPr>
+      </p:sp>
+      <p:sp>
+        <p:nvSpPr>
+          <p:cNvPr id="142" name="Shape 140"/>
+          <p:cNvSpPr/>
+          <p:nvPr/>
+        </p:nvSpPr>
+        <p:spPr>
+          <a:xfrm>
+            <a:off x="3406140" y="4407408"/>
+            <a:ext cx="0" cy="128016"/>
+          </a:xfrm>
+          <a:prstGeom prst="line">
+            <a:avLst/>
+          </a:prstGeom>
+          <a:noFill/>
+          <a:ln w="19050">
+            <a:solidFill>
+              <a:srgbClr val="475569"/>
+            </a:solidFill>
+            <a:prstDash val="solid"/>
+            <a:tailEnd type="triangle"/>
+          </a:ln>
+        </p:spPr>
+      </p:sp>
+      <p:sp>
+        <p:nvSpPr>
+          <p:cNvPr id="143" name="Shape 141"/>
+          <p:cNvSpPr/>
+          <p:nvPr/>
+        </p:nvSpPr>
+        <p:spPr>
+          <a:xfrm>
+            <a:off x="8846820" y="4407408"/>
+            <a:ext cx="0" cy="128016"/>
+          </a:xfrm>
+          <a:prstGeom prst="line">
+            <a:avLst/>
+          </a:prstGeom>
+          <a:noFill/>
+          <a:ln w="19050">
+            <a:solidFill>
+              <a:srgbClr val="475569"/>
+            </a:solidFill>
+            <a:prstDash val="solid"/>
+            <a:tailEnd type="triangle"/>
+          </a:ln>
+        </p:spPr>
+      </p:sp>
+      <p:sp>
+        <p:nvSpPr>
+          <p:cNvPr id="144" name="Shape 142"/>
+          <p:cNvSpPr/>
+          <p:nvPr/>
+        </p:nvSpPr>
+        <p:spPr>
+          <a:xfrm>
+            <a:off x="800100" y="5157216"/>
+            <a:ext cx="0" cy="201168"/>
+          </a:xfrm>
+          <a:prstGeom prst="line">
+            <a:avLst/>
+          </a:prstGeom>
+          <a:noFill/>
+          <a:ln w="19050">
+            <a:solidFill>
+              <a:srgbClr val="475569"/>
+            </a:solidFill>
+            <a:prstDash val="solid"/>
+            <a:tailEnd type="triangle"/>
+          </a:ln>
+        </p:spPr>
+      </p:sp>
+      <p:sp>
+        <p:nvSpPr>
+          <p:cNvPr id="145" name="Shape 143"/>
+          <p:cNvSpPr/>
+          <p:nvPr/>
+        </p:nvSpPr>
+        <p:spPr>
+          <a:xfrm>
+            <a:off x="1668780" y="5157216"/>
+            <a:ext cx="0" cy="201168"/>
+          </a:xfrm>
+          <a:prstGeom prst="line">
+            <a:avLst/>
+          </a:prstGeom>
+          <a:noFill/>
+          <a:ln w="19050">
+            <a:solidFill>
+              <a:srgbClr val="475569"/>
+            </a:solidFill>
+            <a:prstDash val="solid"/>
+            <a:tailEnd type="triangle"/>
+          </a:ln>
+        </p:spPr>
+      </p:sp>
+      <p:sp>
+        <p:nvSpPr>
+          <p:cNvPr id="146" name="Shape 144"/>
+          <p:cNvSpPr/>
+          <p:nvPr/>
+        </p:nvSpPr>
+        <p:spPr>
+          <a:xfrm>
+            <a:off x="2537460" y="5157216"/>
+            <a:ext cx="0" cy="201168"/>
+          </a:xfrm>
+          <a:prstGeom prst="line">
+            <a:avLst/>
+          </a:prstGeom>
+          <a:noFill/>
+          <a:ln w="19050">
+            <a:solidFill>
+              <a:srgbClr val="475569"/>
+            </a:solidFill>
+            <a:prstDash val="solid"/>
+            <a:tailEnd type="triangle"/>
+          </a:ln>
+        </p:spPr>
+      </p:sp>
+      <p:sp>
+        <p:nvSpPr>
+          <p:cNvPr id="147" name="Shape 145"/>
+          <p:cNvSpPr/>
+          <p:nvPr/>
+        </p:nvSpPr>
+        <p:spPr>
+          <a:xfrm>
+            <a:off x="3406140" y="5157216"/>
+            <a:ext cx="0" cy="201168"/>
+          </a:xfrm>
+          <a:prstGeom prst="line">
+            <a:avLst/>
+          </a:prstGeom>
+          <a:noFill/>
+          <a:ln w="19050">
+            <a:solidFill>
+              <a:srgbClr val="475569"/>
+            </a:solidFill>
+            <a:prstDash val="solid"/>
+            <a:tailEnd type="triangle"/>
+          </a:ln>
+        </p:spPr>
+      </p:sp>
+      <p:sp>
+        <p:nvSpPr>
+          <p:cNvPr id="148" name="Shape 146"/>
+          <p:cNvSpPr/>
+          <p:nvPr/>
+        </p:nvSpPr>
+        <p:spPr>
+          <a:xfrm>
+            <a:off x="8846820" y="5157216"/>
+            <a:ext cx="0" cy="201168"/>
+          </a:xfrm>
+          <a:prstGeom prst="line">
+            <a:avLst/>
+          </a:prstGeom>
+          <a:noFill/>
+          <a:ln w="19050">
+            <a:solidFill>
+              <a:srgbClr val="475569"/>
+            </a:solidFill>
+            <a:prstDash val="solid"/>
+            <a:tailEnd type="triangle"/>
+          </a:ln>
+        </p:spPr>
+      </p:sp>
+      <p:sp>
+        <p:nvSpPr>
+          <p:cNvPr id="149" name="Text 147"/>
+          <p:cNvSpPr/>
+          <p:nvPr/>
+        </p:nvSpPr>
+        <p:spPr>
+          <a:xfrm>
+            <a:off x="274320" y="6345936"/>
+            <a:ext cx="11612880" cy="365760"/>
+          </a:xfrm>
+          <a:prstGeom prst="rect">
+            <a:avLst/>
+          </a:prstGeom>
+          <a:noFill/>
+          <a:ln/>
+        </p:spPr>
+        <p:txBody>
+          <a:bodyPr wrap="square" lIns="0" tIns="0" rIns="0" bIns="0" rtlCol="0" anchor="ctr"/>
+          <a:lstStyle/>
+          <a:p>
+            <a:pPr algn="l" indent="0" marL="0">
+              <a:buNone/>
+            </a:pPr>
+            <a:r>
+              <a:rPr lang="en-US" sz="1100" dirty="0">
                 <a:solidFill>
                   <a:srgbClr val="64748B"/>
                 </a:solidFill>
@@ -4718,9 +9715,9 @@
                 <a:ea typeface="PingFang SC" pitchFamily="34" charset="-122"/>
                 <a:cs typeface="PingFang SC" pitchFamily="34" charset="-120"/>
               </a:rPr>
-              <a:t>CPU 拷贝开销</a:t>
-            </a:r>
-            <a:endParaRPr lang="en-US" sz="1400" dirty="0"/>
+              <a:t>本图为原生 PPT 组件，可在 PowerPoint 中直接编辑；编号 ①–⑦ 对应七个洞察。CPU 自带 MMU 直连 NoC，其余 IP 经 IOMMU 做 IOVA→PA 翻译。</a:t>
+            </a:r>
+            <a:endParaRPr lang="en-US" sz="1100" dirty="0"/>
           </a:p>
         </p:txBody>
       </p:sp>
@@ -4814,7 +9811,7 @@
                 <a:ea typeface="PingFang SC" pitchFamily="34" charset="-122"/>
                 <a:cs typeface="PingFang SC" pitchFamily="34" charset="-120"/>
               </a:rPr>
-              <a:t>2</a:t>
+              <a:t>1</a:t>
             </a:r>
             <a:endParaRPr lang="en-US" sz="1800" dirty="0"/>
           </a:p>
@@ -4853,7 +9850,7 @@
                 <a:ea typeface="PingFang SC" pitchFamily="34" charset="-122"/>
                 <a:cs typeface="PingFang SC" pitchFamily="34" charset="-120"/>
               </a:rPr>
-              <a:t>LPDDR 近存计算（PIM）</a:t>
+              <a:t>IOMMU 缺页处理与 SVA 统一地址</a:t>
             </a:r>
             <a:endParaRPr lang="en-US" sz="2600" dirty="0"/>
           </a:p>
@@ -4919,7 +9916,7 @@
                 <a:ea typeface="PingFang SC" pitchFamily="34" charset="-122"/>
                 <a:cs typeface="PingFang SC" pitchFamily="34" charset="-120"/>
               </a:rPr>
-              <a:t>模块：DRAM Bank 内部</a:t>
+              <a:t>模块：IOMMU / SMMU v3</a:t>
             </a:r>
             <a:endParaRPr lang="en-US" sz="1100" dirty="0"/>
           </a:p>
@@ -5034,7 +10031,7 @@
                 <a:ea typeface="PingFang SC" pitchFamily="34" charset="-122"/>
                 <a:cs typeface="PingFang SC" pitchFamily="34" charset="-120"/>
               </a:rPr>
-              <a:t>LLM 解码受冯诺依曼瓶颈——7B INT8 每 token 需读 ~7 GB 权重，LPDDR5 外部 51.2 GB/s 只达 ~137 ms/tok；片外搬运能耗 ~20 pJ/bit 主导总功耗。</a:t>
+              <a:t>传统 DMA 全程锁定设备缓冲区——单 GPU/NPU 锁住 2–6 GB 物理页，严重压缩可用内存；bounce buffer 显式拷贝使带宽翻倍浪费。</a:t>
             </a:r>
             <a:endParaRPr lang="en-US" sz="1500" dirty="0"/>
           </a:p>
@@ -5149,7 +10146,7 @@
                 <a:ea typeface="PingFang SC" pitchFamily="34" charset="-122"/>
                 <a:cs typeface="PingFang SC" pitchFamily="34" charset="-120"/>
               </a:rPr>
-              <a:t>Bank 内/旁嵌入 SIMD/MAC，利用内部全 Bank 带宽 409.6 GB/s（外部 8×），GEMV 就地执行；NMC 动态分配 PIM/传统 Bank。</a:t>
+              <a:t>SMMU v3 引入 stall 模型 + IOPF 框架，配合 ATS/PRI 与 PASID，设备共享进程虚拟地址、按需调页，彻底消除锁页与 bounce buffer。</a:t>
             </a:r>
             <a:endParaRPr lang="en-US" sz="1500" dirty="0"/>
           </a:p>
@@ -5215,7 +10212,7 @@
                 <a:ea typeface="PingFang SC" pitchFamily="34" charset="-122"/>
                 <a:cs typeface="PingFang SC" pitchFamily="34" charset="-120"/>
               </a:rPr>
-              <a:t>一句话：「数据搬到计算」→「计算搬到数据」</a:t>
+              <a:t>一句话：「全程锁页 + bounce 拷贝」→「共享虚拟地址 + 按需调页」</a:t>
             </a:r>
             <a:endParaRPr lang="en-US" sz="1400" dirty="0"/>
           </a:p>
@@ -5288,7 +10285,7 @@
                 <a:ea typeface="PingFang SC" pitchFamily="34" charset="-122"/>
                 <a:cs typeface="PingFang SC" pitchFamily="34" charset="-120"/>
               </a:rPr>
-              <a:t>8×</a:t>
+              <a:t>−60~80%</a:t>
             </a:r>
             <a:endParaRPr lang="en-US" sz="4400" dirty="0"/>
           </a:p>
@@ -5327,7 +10324,7 @@
                 <a:ea typeface="PingFang SC" pitchFamily="34" charset="-122"/>
                 <a:cs typeface="PingFang SC" pitchFamily="34" charset="-120"/>
               </a:rPr>
-              <a:t>内部 vs 外部带宽</a:t>
+              <a:t>锁页减少</a:t>
             </a:r>
             <a:endParaRPr lang="en-US" sz="1400" dirty="0"/>
           </a:p>
@@ -5400,7 +10397,7 @@
                 <a:ea typeface="PingFang SC" pitchFamily="34" charset="-122"/>
                 <a:cs typeface="PingFang SC" pitchFamily="34" charset="-120"/>
               </a:rPr>
-              <a:t>6.7×</a:t>
+              <a:t>−40~60%</a:t>
             </a:r>
             <a:endParaRPr lang="en-US" sz="4400" dirty="0"/>
           </a:p>
@@ -5439,7 +10436,7 @@
                 <a:ea typeface="PingFang SC" pitchFamily="34" charset="-122"/>
                 <a:cs typeface="PingFang SC" pitchFamily="34" charset="-120"/>
               </a:rPr>
-              <a:t>能耗降低</a:t>
+              <a:t>CPU 拷贝开销</a:t>
             </a:r>
             <a:endParaRPr lang="en-US" sz="1400" dirty="0"/>
           </a:p>
@@ -5535,7 +10532,7 @@
                 <a:ea typeface="PingFang SC" pitchFamily="34" charset="-122"/>
                 <a:cs typeface="PingFang SC" pitchFamily="34" charset="-120"/>
               </a:rPr>
-              <a:t>3</a:t>
+              <a:t>2</a:t>
             </a:r>
             <a:endParaRPr lang="en-US" sz="1800" dirty="0"/>
           </a:p>
@@ -5574,7 +10571,7 @@
                 <a:ea typeface="PingFang SC" pitchFamily="34" charset="-122"/>
                 <a:cs typeface="PingFang SC" pitchFamily="34" charset="-120"/>
               </a:rPr>
-              <a:t>CXL 近数据处理与内存压缩</a:t>
+              <a:t>LPDDR 近存计算（PIM）</a:t>
             </a:r>
             <a:endParaRPr lang="en-US" sz="2600" dirty="0"/>
           </a:p>
@@ -5640,7 +10637,7 @@
                 <a:ea typeface="PingFang SC" pitchFamily="34" charset="-122"/>
                 <a:cs typeface="PingFang SC" pitchFamily="34" charset="-120"/>
               </a:rPr>
-              <a:t>模块：CXL Type-3 设备控制器</a:t>
+              <a:t>模块：DRAM Bank 内部</a:t>
             </a:r>
             <a:endParaRPr lang="en-US" sz="1100" dirty="0"/>
           </a:p>
@@ -5755,7 +10752,7 @@
                 <a:ea typeface="PingFang SC" pitchFamily="34" charset="-122"/>
                 <a:cs typeface="PingFang SC" pitchFamily="34" charset="-120"/>
               </a:rPr>
-              <a:t>CXL 容量可扩展但带宽瓶颈——PCIe 5.0 x16 峰值仅 ~64 GB/s；64k+ token KV 缓存打满链路，BF16 权重直接压缩收益极低（仅 0–23%）。</a:t>
+              <a:t>LLM 解码受冯诺依曼瓶颈——7B INT8 每 token 需读 ~7 GB 权重，LPDDR5 外部 51.2 GB/s 只达 ~137 ms/tok；片外搬运能耗 ~20 pJ/bit 主导总功耗。</a:t>
             </a:r>
             <a:endParaRPr lang="en-US" sz="1500" dirty="0"/>
           </a:p>
@@ -5870,7 +10867,7 @@
                 <a:ea typeface="PingFang SC" pitchFamily="34" charset="-122"/>
                 <a:cs typeface="PingFang SC" pitchFamily="34" charset="-120"/>
               </a:rPr>
-              <a:t>CXL Type-3 设备端引入 NDP 控制器，位平面重组大幅提升可压缩性，数据跨链路前完成压缩/选择性读取，透明带宽放大。</a:t>
+              <a:t>Bank 内/旁嵌入 SIMD/MAC，利用内部全 Bank 带宽 409.6 GB/s（外部 8×），GEMV 就地执行；NMC 动态分配 PIM/传统 Bank。</a:t>
             </a:r>
             <a:endParaRPr lang="en-US" sz="1500" dirty="0"/>
           </a:p>
@@ -5936,7 +10933,7 @@
                 <a:ea typeface="PingFang SC" pitchFamily="34" charset="-122"/>
                 <a:cs typeface="PingFang SC" pitchFamily="34" charset="-120"/>
               </a:rPr>
-              <a:t>一句话：「原始数据过链路」→「近数据压缩 + 透明带宽放大」</a:t>
+              <a:t>一句话：「数据搬到计算」→「计算搬到数据」</a:t>
             </a:r>
             <a:endParaRPr lang="en-US" sz="1400" dirty="0"/>
           </a:p>
@@ -6009,7 +11006,7 @@
                 <a:ea typeface="PingFang SC" pitchFamily="34" charset="-122"/>
                 <a:cs typeface="PingFang SC" pitchFamily="34" charset="-120"/>
               </a:rPr>
-              <a:t>~640 ns</a:t>
+              <a:t>8×</a:t>
             </a:r>
             <a:endParaRPr lang="en-US" sz="4400" dirty="0"/>
           </a:p>
@@ -6048,7 +11045,7 @@
                 <a:ea typeface="PingFang SC" pitchFamily="34" charset="-122"/>
                 <a:cs typeface="PingFang SC" pitchFamily="34" charset="-120"/>
               </a:rPr>
-              <a:t>CXL.mem 延迟</a:t>
+              <a:t>内部 vs 外部带宽</a:t>
             </a:r>
             <a:endParaRPr lang="en-US" sz="1400" dirty="0"/>
           </a:p>
@@ -6121,7 +11118,7 @@
                 <a:ea typeface="PingFang SC" pitchFamily="34" charset="-122"/>
                 <a:cs typeface="PingFang SC" pitchFamily="34" charset="-120"/>
               </a:rPr>
-              <a:t>85%+</a:t>
+              <a:t>6.7×</a:t>
             </a:r>
             <a:endParaRPr lang="en-US" sz="4400" dirty="0"/>
           </a:p>
@@ -6160,7 +11157,7 @@
                 <a:ea typeface="PingFang SC" pitchFamily="34" charset="-122"/>
                 <a:cs typeface="PingFang SC" pitchFamily="34" charset="-120"/>
               </a:rPr>
-              <a:t>KV 卸载占链路</a:t>
+              <a:t>能耗降低</a:t>
             </a:r>
             <a:endParaRPr lang="en-US" sz="1400" dirty="0"/>
           </a:p>
@@ -6256,7 +11253,7 @@
                 <a:ea typeface="PingFang SC" pitchFamily="34" charset="-122"/>
                 <a:cs typeface="PingFang SC" pitchFamily="34" charset="-120"/>
               </a:rPr>
-              <a:t>4</a:t>
+              <a:t>3</a:t>
             </a:r>
             <a:endParaRPr lang="en-US" sz="1800" dirty="0"/>
           </a:p>
@@ -6295,7 +11292,7 @@
                 <a:ea typeface="PingFang SC" pitchFamily="34" charset="-122"/>
                 <a:cs typeface="PingFang SC" pitchFamily="34" charset="-120"/>
               </a:rPr>
-              <a:t>AMBA CHI C2C 与片上互联演进</a:t>
+              <a:t>CXL 近数据处理与内存压缩</a:t>
             </a:r>
             <a:endParaRPr lang="en-US" sz="2600" dirty="0"/>
           </a:p>
@@ -6361,7 +11358,7 @@
                 <a:ea typeface="PingFang SC" pitchFamily="34" charset="-122"/>
                 <a:cs typeface="PingFang SC" pitchFamily="34" charset="-120"/>
               </a:rPr>
-              <a:t>模块：CMN 一致性网格 / 跨芯粒</a:t>
+              <a:t>模块：CXL Type-3 设备控制器</a:t>
             </a:r>
             <a:endParaRPr lang="en-US" sz="1100" dirty="0"/>
           </a:p>
@@ -6476,7 +11473,7 @@
                 <a:ea typeface="PingFang SC" pitchFamily="34" charset="-122"/>
                 <a:cs typeface="PingFang SC" pitchFamily="34" charset="-120"/>
               </a:rPr>
-              <a:t>单片 SoC 受掩模面积上限（858 mm²）约束，良率超线性下降；协议桥每跳增加 50–100 ns 延迟，无法跨裸片传播安全 Realm。</a:t>
+              <a:t>CXL 容量可扩展但带宽瓶颈——PCIe 5.0 x16 峰值仅 ~64 GB/s；64k+ token KV 缓存打满链路，BF16 权重直接压缩收益极低（仅 0–23%）。</a:t>
             </a:r>
             <a:endParaRPr lang="en-US" sz="1500" dirty="0"/>
           </a:p>
@@ -6591,7 +11588,7 @@
                 <a:ea typeface="PingFang SC" pitchFamily="34" charset="-122"/>
                 <a:cs typeface="PingFang SC" pitchFamily="34" charset="-120"/>
               </a:rPr>
-              <a:t>CHI C2C 将一致性协议包化用 UCIe 跨裸片延伸 + NoC S3 异构背板 + Realm 安全域编码，实现多芯粒完整一致性域。</a:t>
+              <a:t>CXL Type-3 设备端引入 NDP 控制器，位平面重组大幅提升可压缩性，数据跨链路前完成压缩/选择性读取，透明带宽放大。</a:t>
             </a:r>
             <a:endParaRPr lang="en-US" sz="1500" dirty="0"/>
           </a:p>
@@ -6657,7 +11654,7 @@
                 <a:ea typeface="PingFang SC" pitchFamily="34" charset="-122"/>
                 <a:cs typeface="PingFang SC" pitchFamily="34" charset="-120"/>
               </a:rPr>
-              <a:t>一句话：「单片面积受限 + 桥接高延迟」→「CHI C2C 多芯粒一致性」</a:t>
+              <a:t>一句话：「原始数据过链路」→「近数据压缩 + 透明带宽放大」</a:t>
             </a:r>
             <a:endParaRPr lang="en-US" sz="1400" dirty="0"/>
           </a:p>
@@ -6730,7 +11727,7 @@
                 <a:ea typeface="PingFang SC" pitchFamily="34" charset="-122"/>
                 <a:cs typeface="PingFang SC" pitchFamily="34" charset="-120"/>
               </a:rPr>
-              <a:t>~20 ns</a:t>
+              <a:t>~640 ns</a:t>
             </a:r>
             <a:endParaRPr lang="en-US" sz="4400" dirty="0"/>
           </a:p>
@@ -6769,7 +11766,7 @@
                 <a:ea typeface="PingFang SC" pitchFamily="34" charset="-122"/>
                 <a:cs typeface="PingFang SC" pitchFamily="34" charset="-120"/>
               </a:rPr>
-              <a:t>跨芯粒延迟（降 2.5–5×）</a:t>
+              <a:t>CXL.mem 延迟</a:t>
             </a:r>
             <a:endParaRPr lang="en-US" sz="1400" dirty="0"/>
           </a:p>
@@ -6842,7 +11839,7 @@
                 <a:ea typeface="PingFang SC" pitchFamily="34" charset="-122"/>
                 <a:cs typeface="PingFang SC" pitchFamily="34" charset="-120"/>
               </a:rPr>
-              <a:t>50%→70%</a:t>
+              <a:t>85%+</a:t>
             </a:r>
             <a:endParaRPr lang="en-US" sz="4400" dirty="0"/>
           </a:p>
@@ -6881,7 +11878,7 @@
                 <a:ea typeface="PingFang SC" pitchFamily="34" charset="-122"/>
                 <a:cs typeface="PingFang SC" pitchFamily="34" charset="-120"/>
               </a:rPr>
-              <a:t>芯粒良率提升</a:t>
+              <a:t>KV 卸载占链路</a:t>
             </a:r>
             <a:endParaRPr lang="en-US" sz="1400" dirty="0"/>
           </a:p>
@@ -6977,7 +11974,7 @@
                 <a:ea typeface="PingFang SC" pitchFamily="34" charset="-122"/>
                 <a:cs typeface="PingFang SC" pitchFamily="34" charset="-120"/>
               </a:rPr>
-              <a:t>5</a:t>
+              <a:t>4</a:t>
             </a:r>
             <a:endParaRPr lang="en-US" sz="1800" dirty="0"/>
           </a:p>
@@ -7016,7 +12013,7 @@
                 <a:ea typeface="PingFang SC" pitchFamily="34" charset="-122"/>
                 <a:cs typeface="PingFang SC" pitchFamily="34" charset="-120"/>
               </a:rPr>
-              <a:t>CXL 缓存一致性协议验证</a:t>
+              <a:t>AMBA CHI C2C 与片上互联演进</a:t>
             </a:r>
             <a:endParaRPr lang="en-US" sz="2600" dirty="0"/>
           </a:p>
@@ -7082,7 +12079,7 @@
                 <a:ea typeface="PingFang SC" pitchFamily="34" charset="-122"/>
                 <a:cs typeface="PingFang SC" pitchFamily="34" charset="-120"/>
               </a:rPr>
-              <a:t>模块：CXL.cache 协议栈</a:t>
+              <a:t>模块：CMN 一致性网格 / 跨芯粒</a:t>
             </a:r>
             <a:endParaRPr lang="en-US" sz="1100" dirty="0"/>
           </a:p>
@@ -7197,7 +12194,7 @@
                 <a:ea typeface="PingFang SC" pitchFamily="34" charset="-122"/>
                 <a:cs typeface="PingFang SC" pitchFamily="34" charset="-120"/>
               </a:rPr>
-              <a:t>PCIe DMA 无硬件一致性——设备改内存不通知 CPU 缓存，须显式 clflush；粒度不匹配（DMA 4 KB vs 加速器 64 B），规范散文含歧义。</a:t>
+              <a:t>单片 SoC 受掩模面积上限（858 mm²）约束，良率超线性下降；协议桥每跳增加 50–100 ns 延迟，无法跨裸片传播安全 Realm。</a:t>
             </a:r>
             <a:endParaRPr lang="en-US" sz="1500" dirty="0"/>
           </a:p>
@@ -7312,7 +12309,7 @@
                 <a:ea typeface="PingFang SC" pitchFamily="34" charset="-122"/>
                 <a:cs typeface="PingFang SC" pitchFamily="34" charset="-120"/>
               </a:rPr>
-              <a:t>CXL.cache 以 64 B 缓存行粒度实现硬件一致性，设备持有 MESI 状态接受 snoop；Isabelle 形式化验证确保规范无歧义。</a:t>
+              <a:t>CHI C2C 将一致性协议包化用 UCIe 跨裸片延伸 + NoC S3 异构背板 + Realm 安全域编码，实现多芯粒完整一致性域。</a:t>
             </a:r>
             <a:endParaRPr lang="en-US" sz="1500" dirty="0"/>
           </a:p>
@@ -7378,7 +12375,7 @@
                 <a:ea typeface="PingFang SC" pitchFamily="34" charset="-122"/>
                 <a:cs typeface="PingFang SC" pitchFamily="34" charset="-120"/>
               </a:rPr>
-              <a:t>一句话：「软件刷 + 4KB DMA」→「64B 硬件一致 + 形式验证」</a:t>
+              <a:t>一句话：「单片面积受限 + 桥接高延迟」→「CHI C2C 多芯粒一致性」</a:t>
             </a:r>
             <a:endParaRPr lang="en-US" sz="1400" dirty="0"/>
           </a:p>
@@ -7451,7 +12448,7 @@
                 <a:ea typeface="PingFang SC" pitchFamily="34" charset="-122"/>
                 <a:cs typeface="PingFang SC" pitchFamily="34" charset="-120"/>
               </a:rPr>
-              <a:t>−85%</a:t>
+              <a:t>~20 ns</a:t>
             </a:r>
             <a:endParaRPr lang="en-US" sz="4400" dirty="0"/>
           </a:p>
@@ -7490,7 +12487,7 @@
                 <a:ea typeface="PingFang SC" pitchFamily="34" charset="-122"/>
                 <a:cs typeface="PingFang SC" pitchFamily="34" charset="-120"/>
               </a:rPr>
-              <a:t>描述符延迟</a:t>
+              <a:t>跨芯粒延迟（降 2.5–5×）</a:t>
             </a:r>
             <a:endParaRPr lang="en-US" sz="1400" dirty="0"/>
           </a:p>
@@ -7563,7 +12560,7 @@
                 <a:ea typeface="PingFang SC" pitchFamily="34" charset="-122"/>
                 <a:cs typeface="PingFang SC" pitchFamily="34" charset="-120"/>
               </a:rPr>
-              <a:t>40.2×</a:t>
+              <a:t>50%→70%</a:t>
             </a:r>
             <a:endParaRPr lang="en-US" sz="4400" dirty="0"/>
           </a:p>
@@ -7602,7 +12599,7 @@
                 <a:ea typeface="PingFang SC" pitchFamily="34" charset="-122"/>
                 <a:cs typeface="PingFang SC" pitchFamily="34" charset="-120"/>
               </a:rPr>
-              <a:t>远程原子操作加速</a:t>
+              <a:t>芯粒良率提升</a:t>
             </a:r>
             <a:endParaRPr lang="en-US" sz="1400" dirty="0"/>
           </a:p>
@@ -7698,7 +12695,7 @@
                 <a:ea typeface="PingFang SC" pitchFamily="34" charset="-122"/>
                 <a:cs typeface="PingFang SC" pitchFamily="34" charset="-120"/>
               </a:rPr>
-              <a:t>6</a:t>
+              <a:t>5</a:t>
             </a:r>
             <a:endParaRPr lang="en-US" sz="1800" dirty="0"/>
           </a:p>
@@ -7737,7 +12734,7 @@
                 <a:ea typeface="PingFang SC" pitchFamily="34" charset="-122"/>
                 <a:cs typeface="PingFang SC" pitchFamily="34" charset="-120"/>
               </a:rPr>
-              <a:t>细粒度异构一致性特化（FCS）</a:t>
+              <a:t>CXL 缓存一致性协议验证</a:t>
             </a:r>
             <a:endParaRPr lang="en-US" sz="2600" dirty="0"/>
           </a:p>
@@ -7803,7 +12800,7 @@
                 <a:ea typeface="PingFang SC" pitchFamily="34" charset="-122"/>
                 <a:cs typeface="PingFang SC" pitchFamily="34" charset="-120"/>
               </a:rPr>
-              <a:t>模块：LLC/L2 目录 ↔ 各 IP L1</a:t>
+              <a:t>模块：CXL.cache 协议栈</a:t>
             </a:r>
             <a:endParaRPr lang="en-US" sz="1100" dirty="0"/>
           </a:p>
@@ -7918,7 +12915,7 @@
                 <a:ea typeface="PingFang SC" pitchFamily="34" charset="-122"/>
                 <a:cs typeface="PingFang SC" pitchFamily="34" charset="-120"/>
               </a:rPr>
-              <a:t>统一 MESI 强制 GPU/DSP 用写方无效化——GPU 数千线程写不相交区域时，99% 网络流量为冗余一致性消息，吞吐严重退化。</a:t>
+              <a:t>PCIe DMA 无硬件一致性——设备改内存不通知 CPU 缓存，须显式 clflush；粒度不匹配（DMA 4 KB vs 加速器 64 B），规范散文含歧义。</a:t>
             </a:r>
             <a:endParaRPr lang="en-US" sz="1500" dirty="0"/>
           </a:p>
@@ -8033,7 +13030,7 @@
                 <a:ea typeface="PingFang SC" pitchFamily="34" charset="-122"/>
                 <a:cs typeface="PingFang SC" pitchFamily="34" charset="-120"/>
               </a:rPr>
-              <a:t>Spandex + FCS 在每条访存请求粒度独立选最优协议（ReqV/ReqO/Req2/ReqS），按运行时共享模式动态匹配，消除冗余无效化。</a:t>
+              <a:t>CXL.cache 以 64 B 缓存行粒度实现硬件一致性，设备持有 MESI 状态接受 snoop；Isabelle 形式化验证确保规范无歧义。</a:t>
             </a:r>
             <a:endParaRPr lang="en-US" sz="1500" dirty="0"/>
           </a:p>
@@ -8099,7 +13096,7 @@
                 <a:ea typeface="PingFang SC" pitchFamily="34" charset="-122"/>
                 <a:cs typeface="PingFang SC" pitchFamily="34" charset="-120"/>
               </a:rPr>
-              <a:t>一句话：「统一 MESI 一刀切」→「每请求选最优一致性协议」</a:t>
+              <a:t>一句话：「软件刷 + 4KB DMA」→「64B 硬件一致 + 形式验证」</a:t>
             </a:r>
             <a:endParaRPr lang="en-US" sz="1400" dirty="0"/>
           </a:p>
@@ -8172,7 +13169,7 @@
                 <a:ea typeface="PingFang SC" pitchFamily="34" charset="-122"/>
                 <a:cs typeface="PingFang SC" pitchFamily="34" charset="-120"/>
               </a:rPr>
-              <a:t>−99%</a:t>
+              <a:t>−85%</a:t>
             </a:r>
             <a:endParaRPr lang="en-US" sz="4400" dirty="0"/>
           </a:p>
@@ -8211,7 +13208,7 @@
                 <a:ea typeface="PingFang SC" pitchFamily="34" charset="-122"/>
                 <a:cs typeface="PingFang SC" pitchFamily="34" charset="-120"/>
               </a:rPr>
-              <a:t>GPU 冗余一致性消息</a:t>
+              <a:t>描述符延迟</a:t>
             </a:r>
             <a:endParaRPr lang="en-US" sz="1400" dirty="0"/>
           </a:p>
@@ -8284,7 +13281,7 @@
                 <a:ea typeface="PingFang SC" pitchFamily="34" charset="-122"/>
                 <a:cs typeface="PingFang SC" pitchFamily="34" charset="-120"/>
               </a:rPr>
-              <a:t>−29%</a:t>
+              <a:t>40.2×</a:t>
             </a:r>
             <a:endParaRPr lang="en-US" sz="4400" dirty="0"/>
           </a:p>
@@ -8323,7 +13320,7 @@
                 <a:ea typeface="PingFang SC" pitchFamily="34" charset="-122"/>
                 <a:cs typeface="PingFang SC" pitchFamily="34" charset="-120"/>
               </a:rPr>
-              <a:t>执行时间（Spandex+FCS）</a:t>
+              <a:t>远程原子操作加速</a:t>
             </a:r>
             <a:endParaRPr lang="en-US" sz="1400" dirty="0"/>
           </a:p>
@@ -8419,7 +13416,7 @@
                 <a:ea typeface="PingFang SC" pitchFamily="34" charset="-122"/>
                 <a:cs typeface="PingFang SC" pitchFamily="34" charset="-120"/>
               </a:rPr>
-              <a:t>7</a:t>
+              <a:t>6</a:t>
             </a:r>
             <a:endParaRPr lang="en-US" sz="1800" dirty="0"/>
           </a:p>
@@ -8458,7 +13455,7 @@
                 <a:ea typeface="PingFang SC" pitchFamily="34" charset="-122"/>
                 <a:cs typeface="PingFang SC" pitchFamily="34" charset="-120"/>
               </a:rPr>
-              <a:t>Processing-using-DRAM（Proteus）</a:t>
+              <a:t>细粒度异构一致性特化（FCS）</a:t>
             </a:r>
             <a:endParaRPr lang="en-US" sz="2600" dirty="0"/>
           </a:p>
@@ -8524,7 +13521,7 @@
                 <a:ea typeface="PingFang SC" pitchFamily="34" charset="-122"/>
                 <a:cs typeface="PingFang SC" pitchFamily="34" charset="-120"/>
               </a:rPr>
-              <a:t>模块：DRAM Bank 子阵列 / 位线</a:t>
+              <a:t>模块：LLC/L2 目录 ↔ 各 IP L1</a:t>
             </a:r>
             <a:endParaRPr lang="en-US" sz="1100" dirty="0"/>
           </a:p>
@@ -8639,7 +13636,7 @@
                 <a:ea typeface="PingFang SC" pitchFamily="34" charset="-122"/>
                 <a:cs typeface="PingFang SC" pitchFamily="34" charset="-120"/>
               </a:rPr>
-              <a:t>现有 PuD（Ambit/SIMDRAM）对 N 位操作数固定 N 串行周期不考虑有效精度；单阵列执行未利用 DRAM 多阵列并行性。</a:t>
+              <a:t>统一 MESI 强制 GPU/DSP 用写方无效化——GPU 数千线程写不相交区域时，99% 网络流量为冗余一致性消息，吞吐严重退化。</a:t>
             </a:r>
             <a:endParaRPr lang="en-US" sz="1500" dirty="0"/>
           </a:p>
@@ -8754,7 +13751,7 @@
                 <a:ea typeface="PingFang SC" pitchFamily="34" charset="-122"/>
                 <a:cs typeface="PingFang SC" pitchFamily="34" charset="-120"/>
               </a:rPr>
-              <a:t>Proteus 运行时检测有效精度（前导零/一），动态压缩位宽 + 跨多阵列并发执行，延迟从线性于位宽变为线性于有效精度。</a:t>
+              <a:t>Spandex + FCS 在每条访存请求粒度独立选最优协议（ReqV/ReqO/Req2/ReqS），按运行时共享模式动态匹配，消除冗余无效化。</a:t>
             </a:r>
             <a:endParaRPr lang="en-US" sz="1500" dirty="0"/>
           </a:p>
@@ -8820,7 +13817,7 @@
                 <a:ea typeface="PingFang SC" pitchFamily="34" charset="-122"/>
                 <a:cs typeface="PingFang SC" pitchFamily="34" charset="-120"/>
               </a:rPr>
-              <a:t>一句话：「固定位宽串行」→「有效精度自适应 + 多阵列并行」</a:t>
+              <a:t>一句话：「统一 MESI 一刀切」→「每请求选最优一致性协议」</a:t>
             </a:r>
             <a:endParaRPr lang="en-US" sz="1400" dirty="0"/>
           </a:p>
@@ -8893,7 +13890,7 @@
                 <a:ea typeface="PingFang SC" pitchFamily="34" charset="-122"/>
                 <a:cs typeface="PingFang SC" pitchFamily="34" charset="-120"/>
               </a:rPr>
-              <a:t>88×</a:t>
+              <a:t>−99%</a:t>
             </a:r>
             <a:endParaRPr lang="en-US" sz="4400" dirty="0"/>
           </a:p>
@@ -8932,7 +13929,7 @@
                 <a:ea typeface="PingFang SC" pitchFamily="34" charset="-122"/>
                 <a:cs typeface="PingFang SC" pitchFamily="34" charset="-120"/>
               </a:rPr>
-              <a:t>vs CPU 吞吐（16 bank）</a:t>
+              <a:t>GPU 冗余一致性消息</a:t>
             </a:r>
             <a:endParaRPr lang="en-US" sz="1400" dirty="0"/>
           </a:p>
@@ -9005,7 +14002,7 @@
                 <a:ea typeface="PingFang SC" pitchFamily="34" charset="-122"/>
                 <a:cs typeface="PingFang SC" pitchFamily="34" charset="-120"/>
               </a:rPr>
-              <a:t>35×</a:t>
+              <a:t>−29%</a:t>
             </a:r>
             <a:endParaRPr lang="en-US" sz="4400" dirty="0"/>
           </a:p>
@@ -9044,7 +14041,7 @@
                 <a:ea typeface="PingFang SC" pitchFamily="34" charset="-122"/>
                 <a:cs typeface="PingFang SC" pitchFamily="34" charset="-120"/>
               </a:rPr>
-              <a:t>vs CPU 能耗降低</a:t>
+              <a:t>执行时间（Spandex+FCS）</a:t>
             </a:r>
             <a:endParaRPr lang="en-US" sz="1400" dirty="0"/>
           </a:p>
